--- a/figures/resources/optical_sectioning.pptx
+++ b/figures/resources/optical_sectioning.pptx
@@ -2,19 +2,20 @@
 <file path=ppt/presentation.xml><?xml version="1.0" encoding="utf-8"?>
 <p:presentation xmlns:a="http://schemas.openxmlformats.org/drawingml/2006/main" xmlns:r="http://schemas.openxmlformats.org/officeDocument/2006/relationships" xmlns:p="http://schemas.openxmlformats.org/presentationml/2006/main" saveSubsetFonts="1">
   <p:sldMasterIdLst>
-    <p:sldMasterId id="2147483648" r:id="rId1"/>
+    <p:sldMasterId id="2147483660" r:id="rId1"/>
   </p:sldMasterIdLst>
   <p:sldIdLst>
     <p:sldId id="257" r:id="rId2"/>
     <p:sldId id="256" r:id="rId3"/>
+    <p:sldId id="258" r:id="rId4"/>
   </p:sldIdLst>
-  <p:sldSz cx="12192000" cy="6858000"/>
+  <p:sldSz cx="12192000" cy="13698538"/>
   <p:notesSz cx="6858000" cy="9144000"/>
   <p:defaultTextStyle>
     <a:defPPr>
       <a:defRPr lang="en-US"/>
     </a:defPPr>
-    <a:lvl1pPr marL="0" algn="l" defTabSz="914400" rtl="0" eaLnBrk="1" latinLnBrk="0" hangingPunct="1">
+    <a:lvl1pPr marL="0" algn="l" defTabSz="457200" rtl="0" eaLnBrk="1" latinLnBrk="0" hangingPunct="1">
       <a:defRPr sz="1800" kern="1200">
         <a:solidFill>
           <a:schemeClr val="tx1"/>
@@ -24,7 +25,7 @@
         <a:cs typeface="+mn-cs"/>
       </a:defRPr>
     </a:lvl1pPr>
-    <a:lvl2pPr marL="457200" algn="l" defTabSz="914400" rtl="0" eaLnBrk="1" latinLnBrk="0" hangingPunct="1">
+    <a:lvl2pPr marL="457200" algn="l" defTabSz="457200" rtl="0" eaLnBrk="1" latinLnBrk="0" hangingPunct="1">
       <a:defRPr sz="1800" kern="1200">
         <a:solidFill>
           <a:schemeClr val="tx1"/>
@@ -34,7 +35,7 @@
         <a:cs typeface="+mn-cs"/>
       </a:defRPr>
     </a:lvl2pPr>
-    <a:lvl3pPr marL="914400" algn="l" defTabSz="914400" rtl="0" eaLnBrk="1" latinLnBrk="0" hangingPunct="1">
+    <a:lvl3pPr marL="914400" algn="l" defTabSz="457200" rtl="0" eaLnBrk="1" latinLnBrk="0" hangingPunct="1">
       <a:defRPr sz="1800" kern="1200">
         <a:solidFill>
           <a:schemeClr val="tx1"/>
@@ -44,7 +45,7 @@
         <a:cs typeface="+mn-cs"/>
       </a:defRPr>
     </a:lvl3pPr>
-    <a:lvl4pPr marL="1371600" algn="l" defTabSz="914400" rtl="0" eaLnBrk="1" latinLnBrk="0" hangingPunct="1">
+    <a:lvl4pPr marL="1371600" algn="l" defTabSz="457200" rtl="0" eaLnBrk="1" latinLnBrk="0" hangingPunct="1">
       <a:defRPr sz="1800" kern="1200">
         <a:solidFill>
           <a:schemeClr val="tx1"/>
@@ -54,7 +55,7 @@
         <a:cs typeface="+mn-cs"/>
       </a:defRPr>
     </a:lvl4pPr>
-    <a:lvl5pPr marL="1828800" algn="l" defTabSz="914400" rtl="0" eaLnBrk="1" latinLnBrk="0" hangingPunct="1">
+    <a:lvl5pPr marL="1828800" algn="l" defTabSz="457200" rtl="0" eaLnBrk="1" latinLnBrk="0" hangingPunct="1">
       <a:defRPr sz="1800" kern="1200">
         <a:solidFill>
           <a:schemeClr val="tx1"/>
@@ -64,7 +65,7 @@
         <a:cs typeface="+mn-cs"/>
       </a:defRPr>
     </a:lvl5pPr>
-    <a:lvl6pPr marL="2286000" algn="l" defTabSz="914400" rtl="0" eaLnBrk="1" latinLnBrk="0" hangingPunct="1">
+    <a:lvl6pPr marL="2286000" algn="l" defTabSz="457200" rtl="0" eaLnBrk="1" latinLnBrk="0" hangingPunct="1">
       <a:defRPr sz="1800" kern="1200">
         <a:solidFill>
           <a:schemeClr val="tx1"/>
@@ -74,7 +75,7 @@
         <a:cs typeface="+mn-cs"/>
       </a:defRPr>
     </a:lvl6pPr>
-    <a:lvl7pPr marL="2743200" algn="l" defTabSz="914400" rtl="0" eaLnBrk="1" latinLnBrk="0" hangingPunct="1">
+    <a:lvl7pPr marL="2743200" algn="l" defTabSz="457200" rtl="0" eaLnBrk="1" latinLnBrk="0" hangingPunct="1">
       <a:defRPr sz="1800" kern="1200">
         <a:solidFill>
           <a:schemeClr val="tx1"/>
@@ -84,7 +85,7 @@
         <a:cs typeface="+mn-cs"/>
       </a:defRPr>
     </a:lvl7pPr>
-    <a:lvl8pPr marL="3200400" algn="l" defTabSz="914400" rtl="0" eaLnBrk="1" latinLnBrk="0" hangingPunct="1">
+    <a:lvl8pPr marL="3200400" algn="l" defTabSz="457200" rtl="0" eaLnBrk="1" latinLnBrk="0" hangingPunct="1">
       <a:defRPr sz="1800" kern="1200">
         <a:solidFill>
           <a:schemeClr val="tx1"/>
@@ -94,7 +95,7 @@
         <a:cs typeface="+mn-cs"/>
       </a:defRPr>
     </a:lvl8pPr>
-    <a:lvl9pPr marL="3657600" algn="l" defTabSz="914400" rtl="0" eaLnBrk="1" latinLnBrk="0" hangingPunct="1">
+    <a:lvl9pPr marL="3657600" algn="l" defTabSz="457200" rtl="0" eaLnBrk="1" latinLnBrk="0" hangingPunct="1">
       <a:defRPr sz="1800" kern="1200">
         <a:solidFill>
           <a:schemeClr val="tx1"/>
@@ -132,13 +133,7 @@
       </p:grpSpPr>
       <p:sp>
         <p:nvSpPr>
-          <p:cNvPr id="2" name="Title 1">
-            <a:extLst>
-              <a:ext uri="{FF2B5EF4-FFF2-40B4-BE49-F238E27FC236}">
-                <a16:creationId xmlns:a16="http://schemas.microsoft.com/office/drawing/2014/main" id="{D5AFAA65-7ABF-6DE6-5719-6A09EB9E0B99}"/>
-              </a:ext>
-            </a:extLst>
-          </p:cNvPr>
+          <p:cNvPr id="2" name="Title 1"/>
           <p:cNvSpPr>
             <a:spLocks noGrp="1"/>
           </p:cNvSpPr>
@@ -148,34 +143,29 @@
         </p:nvSpPr>
         <p:spPr>
           <a:xfrm>
-            <a:off x="1524000" y="1122363"/>
-            <a:ext cx="9144000" cy="2387600"/>
+            <a:off x="914400" y="2241868"/>
+            <a:ext cx="10363200" cy="4769121"/>
           </a:xfrm>
         </p:spPr>
         <p:txBody>
           <a:bodyPr anchor="b"/>
           <a:lstStyle>
             <a:lvl1pPr algn="ctr">
-              <a:defRPr sz="6000"/>
+              <a:defRPr sz="8000"/>
             </a:lvl1pPr>
           </a:lstStyle>
           <a:p>
             <a:r>
-              <a:rPr lang="en-US"/>
+              <a:rPr lang="en-GB"/>
               <a:t>Click to edit Master title style</a:t>
             </a:r>
-          </a:p>
-        </p:txBody>
-      </p:sp>
-      <p:sp>
-        <p:nvSpPr>
-          <p:cNvPr id="3" name="Subtitle 2">
-            <a:extLst>
-              <a:ext uri="{FF2B5EF4-FFF2-40B4-BE49-F238E27FC236}">
-                <a16:creationId xmlns:a16="http://schemas.microsoft.com/office/drawing/2014/main" id="{0B3673CC-75F5-9A54-FAD1-181F79666FAB}"/>
-              </a:ext>
-            </a:extLst>
-          </p:cNvPr>
+            <a:endParaRPr lang="en-US" dirty="0"/>
+          </a:p>
+        </p:txBody>
+      </p:sp>
+      <p:sp>
+        <p:nvSpPr>
+          <p:cNvPr id="3" name="Subtitle 2"/>
           <p:cNvSpPr>
             <a:spLocks noGrp="1"/>
           </p:cNvSpPr>
@@ -185,8 +175,8 @@
         </p:nvSpPr>
         <p:spPr>
           <a:xfrm>
-            <a:off x="1524000" y="3602038"/>
-            <a:ext cx="9144000" cy="1655762"/>
+            <a:off x="1524000" y="7194904"/>
+            <a:ext cx="9144000" cy="3307308"/>
           </a:xfrm>
         </p:spPr>
         <p:txBody>
@@ -194,58 +184,53 @@
           <a:lstStyle>
             <a:lvl1pPr marL="0" indent="0" algn="ctr">
               <a:buNone/>
+              <a:defRPr sz="3200"/>
+            </a:lvl1pPr>
+            <a:lvl2pPr marL="609585" indent="0" algn="ctr">
+              <a:buNone/>
+              <a:defRPr sz="2667"/>
+            </a:lvl2pPr>
+            <a:lvl3pPr marL="1219170" indent="0" algn="ctr">
+              <a:buNone/>
               <a:defRPr sz="2400"/>
-            </a:lvl1pPr>
-            <a:lvl2pPr marL="457200" indent="0" algn="ctr">
-              <a:buNone/>
-              <a:defRPr sz="2000"/>
-            </a:lvl2pPr>
-            <a:lvl3pPr marL="914400" indent="0" algn="ctr">
-              <a:buNone/>
-              <a:defRPr sz="1800"/>
             </a:lvl3pPr>
-            <a:lvl4pPr marL="1371600" indent="0" algn="ctr">
-              <a:buNone/>
-              <a:defRPr sz="1600"/>
+            <a:lvl4pPr marL="1828754" indent="0" algn="ctr">
+              <a:buNone/>
+              <a:defRPr sz="2133"/>
             </a:lvl4pPr>
-            <a:lvl5pPr marL="1828800" indent="0" algn="ctr">
-              <a:buNone/>
-              <a:defRPr sz="1600"/>
+            <a:lvl5pPr marL="2438339" indent="0" algn="ctr">
+              <a:buNone/>
+              <a:defRPr sz="2133"/>
             </a:lvl5pPr>
-            <a:lvl6pPr marL="2286000" indent="0" algn="ctr">
-              <a:buNone/>
-              <a:defRPr sz="1600"/>
+            <a:lvl6pPr marL="3047924" indent="0" algn="ctr">
+              <a:buNone/>
+              <a:defRPr sz="2133"/>
             </a:lvl6pPr>
-            <a:lvl7pPr marL="2743200" indent="0" algn="ctr">
-              <a:buNone/>
-              <a:defRPr sz="1600"/>
+            <a:lvl7pPr marL="3657509" indent="0" algn="ctr">
+              <a:buNone/>
+              <a:defRPr sz="2133"/>
             </a:lvl7pPr>
-            <a:lvl8pPr marL="3200400" indent="0" algn="ctr">
-              <a:buNone/>
-              <a:defRPr sz="1600"/>
+            <a:lvl8pPr marL="4267093" indent="0" algn="ctr">
+              <a:buNone/>
+              <a:defRPr sz="2133"/>
             </a:lvl8pPr>
-            <a:lvl9pPr marL="3657600" indent="0" algn="ctr">
-              <a:buNone/>
-              <a:defRPr sz="1600"/>
+            <a:lvl9pPr marL="4876678" indent="0" algn="ctr">
+              <a:buNone/>
+              <a:defRPr sz="2133"/>
             </a:lvl9pPr>
           </a:lstStyle>
           <a:p>
             <a:r>
-              <a:rPr lang="en-US"/>
+              <a:rPr lang="en-GB"/>
               <a:t>Click to edit Master subtitle style</a:t>
             </a:r>
-          </a:p>
-        </p:txBody>
-      </p:sp>
-      <p:sp>
-        <p:nvSpPr>
-          <p:cNvPr id="4" name="Date Placeholder 3">
-            <a:extLst>
-              <a:ext uri="{FF2B5EF4-FFF2-40B4-BE49-F238E27FC236}">
-                <a16:creationId xmlns:a16="http://schemas.microsoft.com/office/drawing/2014/main" id="{23EB1912-C68B-7F02-E400-DA72051EA8AA}"/>
-              </a:ext>
-            </a:extLst>
-          </p:cNvPr>
+            <a:endParaRPr lang="en-US" dirty="0"/>
+          </a:p>
+        </p:txBody>
+      </p:sp>
+      <p:sp>
+        <p:nvSpPr>
+          <p:cNvPr id="4" name="Date Placeholder 3"/>
           <p:cNvSpPr>
             <a:spLocks noGrp="1"/>
           </p:cNvSpPr>
@@ -260,7 +245,7 @@
           <a:p>
             <a:fld id="{B09E179D-AE25-442C-9DBD-25AA24DE7ADF}" type="datetimeFigureOut">
               <a:rPr lang="en-US" smtClean="0"/>
-              <a:t>4/24/2026</a:t>
+              <a:t>4/24/26</a:t>
             </a:fld>
             <a:endParaRPr lang="en-US"/>
           </a:p>
@@ -268,13 +253,7 @@
       </p:sp>
       <p:sp>
         <p:nvSpPr>
-          <p:cNvPr id="5" name="Footer Placeholder 4">
-            <a:extLst>
-              <a:ext uri="{FF2B5EF4-FFF2-40B4-BE49-F238E27FC236}">
-                <a16:creationId xmlns:a16="http://schemas.microsoft.com/office/drawing/2014/main" id="{B4EEA5D1-5729-15D0-042F-00427289971C}"/>
-              </a:ext>
-            </a:extLst>
-          </p:cNvPr>
+          <p:cNvPr id="5" name="Footer Placeholder 4"/>
           <p:cNvSpPr>
             <a:spLocks noGrp="1"/>
           </p:cNvSpPr>
@@ -293,13 +272,7 @@
       </p:sp>
       <p:sp>
         <p:nvSpPr>
-          <p:cNvPr id="6" name="Slide Number Placeholder 5">
-            <a:extLst>
-              <a:ext uri="{FF2B5EF4-FFF2-40B4-BE49-F238E27FC236}">
-                <a16:creationId xmlns:a16="http://schemas.microsoft.com/office/drawing/2014/main" id="{C7A83691-D6E9-9AA6-73E8-593E03DB9AA2}"/>
-              </a:ext>
-            </a:extLst>
-          </p:cNvPr>
+          <p:cNvPr id="6" name="Slide Number Placeholder 5"/>
           <p:cNvSpPr>
             <a:spLocks noGrp="1"/>
           </p:cNvSpPr>
@@ -323,7 +296,7 @@
     </p:spTree>
     <p:extLst>
       <p:ext uri="{BB962C8B-B14F-4D97-AF65-F5344CB8AC3E}">
-        <p14:creationId xmlns:p14="http://schemas.microsoft.com/office/powerpoint/2010/main" val="440504047"/>
+        <p14:creationId xmlns:p14="http://schemas.microsoft.com/office/powerpoint/2010/main" val="3378531347"/>
       </p:ext>
     </p:extLst>
   </p:cSld>
@@ -352,13 +325,7 @@
       </p:grpSpPr>
       <p:sp>
         <p:nvSpPr>
-          <p:cNvPr id="2" name="Title 1">
-            <a:extLst>
-              <a:ext uri="{FF2B5EF4-FFF2-40B4-BE49-F238E27FC236}">
-                <a16:creationId xmlns:a16="http://schemas.microsoft.com/office/drawing/2014/main" id="{2F69732A-3513-F9D8-10F4-538CA13FA62A}"/>
-              </a:ext>
-            </a:extLst>
-          </p:cNvPr>
+          <p:cNvPr id="2" name="Title 1"/>
           <p:cNvSpPr>
             <a:spLocks noGrp="1"/>
           </p:cNvSpPr>
@@ -372,21 +339,16 @@
           <a:lstStyle/>
           <a:p>
             <a:r>
-              <a:rPr lang="en-US"/>
+              <a:rPr lang="en-GB"/>
               <a:t>Click to edit Master title style</a:t>
             </a:r>
-          </a:p>
-        </p:txBody>
-      </p:sp>
-      <p:sp>
-        <p:nvSpPr>
-          <p:cNvPr id="3" name="Vertical Text Placeholder 2">
-            <a:extLst>
-              <a:ext uri="{FF2B5EF4-FFF2-40B4-BE49-F238E27FC236}">
-                <a16:creationId xmlns:a16="http://schemas.microsoft.com/office/drawing/2014/main" id="{BC8DE89B-C58A-D6DA-B042-18FBEA937172}"/>
-              </a:ext>
-            </a:extLst>
-          </p:cNvPr>
+            <a:endParaRPr lang="en-US" dirty="0"/>
+          </a:p>
+        </p:txBody>
+      </p:sp>
+      <p:sp>
+        <p:nvSpPr>
+          <p:cNvPr id="3" name="Vertical Text Placeholder 2"/>
           <p:cNvSpPr>
             <a:spLocks noGrp="1"/>
           </p:cNvSpPr>
@@ -401,49 +363,44 @@
           <a:p>
             <a:pPr lvl="0"/>
             <a:r>
-              <a:rPr lang="en-US"/>
+              <a:rPr lang="en-GB"/>
               <a:t>Click to edit Master text styles</a:t>
             </a:r>
           </a:p>
           <a:p>
             <a:pPr lvl="1"/>
             <a:r>
-              <a:rPr lang="en-US"/>
+              <a:rPr lang="en-GB"/>
               <a:t>Second level</a:t>
             </a:r>
           </a:p>
           <a:p>
             <a:pPr lvl="2"/>
             <a:r>
-              <a:rPr lang="en-US"/>
+              <a:rPr lang="en-GB"/>
               <a:t>Third level</a:t>
             </a:r>
           </a:p>
           <a:p>
             <a:pPr lvl="3"/>
             <a:r>
-              <a:rPr lang="en-US"/>
+              <a:rPr lang="en-GB"/>
               <a:t>Fourth level</a:t>
             </a:r>
           </a:p>
           <a:p>
             <a:pPr lvl="4"/>
             <a:r>
-              <a:rPr lang="en-US"/>
+              <a:rPr lang="en-GB"/>
               <a:t>Fifth level</a:t>
             </a:r>
-          </a:p>
-        </p:txBody>
-      </p:sp>
-      <p:sp>
-        <p:nvSpPr>
-          <p:cNvPr id="4" name="Date Placeholder 3">
-            <a:extLst>
-              <a:ext uri="{FF2B5EF4-FFF2-40B4-BE49-F238E27FC236}">
-                <a16:creationId xmlns:a16="http://schemas.microsoft.com/office/drawing/2014/main" id="{F76AE5A9-3ED2-C0AB-4F71-9C39A7D1874F}"/>
-              </a:ext>
-            </a:extLst>
-          </p:cNvPr>
+            <a:endParaRPr lang="en-US" dirty="0"/>
+          </a:p>
+        </p:txBody>
+      </p:sp>
+      <p:sp>
+        <p:nvSpPr>
+          <p:cNvPr id="4" name="Date Placeholder 3"/>
           <p:cNvSpPr>
             <a:spLocks noGrp="1"/>
           </p:cNvSpPr>
@@ -458,7 +415,7 @@
           <a:p>
             <a:fld id="{B09E179D-AE25-442C-9DBD-25AA24DE7ADF}" type="datetimeFigureOut">
               <a:rPr lang="en-US" smtClean="0"/>
-              <a:t>4/24/2026</a:t>
+              <a:t>4/24/26</a:t>
             </a:fld>
             <a:endParaRPr lang="en-US"/>
           </a:p>
@@ -466,13 +423,7 @@
       </p:sp>
       <p:sp>
         <p:nvSpPr>
-          <p:cNvPr id="5" name="Footer Placeholder 4">
-            <a:extLst>
-              <a:ext uri="{FF2B5EF4-FFF2-40B4-BE49-F238E27FC236}">
-                <a16:creationId xmlns:a16="http://schemas.microsoft.com/office/drawing/2014/main" id="{7B6AFF2E-B23B-F75A-A8DA-2C0664E6A7B3}"/>
-              </a:ext>
-            </a:extLst>
-          </p:cNvPr>
+          <p:cNvPr id="5" name="Footer Placeholder 4"/>
           <p:cNvSpPr>
             <a:spLocks noGrp="1"/>
           </p:cNvSpPr>
@@ -491,13 +442,7 @@
       </p:sp>
       <p:sp>
         <p:nvSpPr>
-          <p:cNvPr id="6" name="Slide Number Placeholder 5">
-            <a:extLst>
-              <a:ext uri="{FF2B5EF4-FFF2-40B4-BE49-F238E27FC236}">
-                <a16:creationId xmlns:a16="http://schemas.microsoft.com/office/drawing/2014/main" id="{0A90627A-25F1-033D-AD2C-10926DF95189}"/>
-              </a:ext>
-            </a:extLst>
-          </p:cNvPr>
+          <p:cNvPr id="6" name="Slide Number Placeholder 5"/>
           <p:cNvSpPr>
             <a:spLocks noGrp="1"/>
           </p:cNvSpPr>
@@ -521,7 +466,7 @@
     </p:spTree>
     <p:extLst>
       <p:ext uri="{BB962C8B-B14F-4D97-AF65-F5344CB8AC3E}">
-        <p14:creationId xmlns:p14="http://schemas.microsoft.com/office/powerpoint/2010/main" val="1854840894"/>
+        <p14:creationId xmlns:p14="http://schemas.microsoft.com/office/powerpoint/2010/main" val="314485994"/>
       </p:ext>
     </p:extLst>
   </p:cSld>
@@ -550,13 +495,7 @@
       </p:grpSpPr>
       <p:sp>
         <p:nvSpPr>
-          <p:cNvPr id="2" name="Vertical Title 1">
-            <a:extLst>
-              <a:ext uri="{FF2B5EF4-FFF2-40B4-BE49-F238E27FC236}">
-                <a16:creationId xmlns:a16="http://schemas.microsoft.com/office/drawing/2014/main" id="{C07C6977-A925-F1B0-43DE-D7B2B7685412}"/>
-              </a:ext>
-            </a:extLst>
-          </p:cNvPr>
+          <p:cNvPr id="2" name="Vertical Title 1"/>
           <p:cNvSpPr>
             <a:spLocks noGrp="1"/>
           </p:cNvSpPr>
@@ -566,8 +505,8 @@
         </p:nvSpPr>
         <p:spPr>
           <a:xfrm>
-            <a:off x="8724900" y="365125"/>
-            <a:ext cx="2628900" cy="5811838"/>
+            <a:off x="8724901" y="729320"/>
+            <a:ext cx="2628900" cy="11608878"/>
           </a:xfrm>
         </p:spPr>
         <p:txBody>
@@ -575,21 +514,16 @@
           <a:lstStyle/>
           <a:p>
             <a:r>
-              <a:rPr lang="en-US"/>
+              <a:rPr lang="en-GB"/>
               <a:t>Click to edit Master title style</a:t>
             </a:r>
-          </a:p>
-        </p:txBody>
-      </p:sp>
-      <p:sp>
-        <p:nvSpPr>
-          <p:cNvPr id="3" name="Vertical Text Placeholder 2">
-            <a:extLst>
-              <a:ext uri="{FF2B5EF4-FFF2-40B4-BE49-F238E27FC236}">
-                <a16:creationId xmlns:a16="http://schemas.microsoft.com/office/drawing/2014/main" id="{51E765F6-C3B1-3E11-7B56-C84A8B53627C}"/>
-              </a:ext>
-            </a:extLst>
-          </p:cNvPr>
+            <a:endParaRPr lang="en-US" dirty="0"/>
+          </a:p>
+        </p:txBody>
+      </p:sp>
+      <p:sp>
+        <p:nvSpPr>
+          <p:cNvPr id="3" name="Vertical Text Placeholder 2"/>
           <p:cNvSpPr>
             <a:spLocks noGrp="1"/>
           </p:cNvSpPr>
@@ -599,8 +533,8 @@
         </p:nvSpPr>
         <p:spPr>
           <a:xfrm>
-            <a:off x="838200" y="365125"/>
-            <a:ext cx="7734300" cy="5811838"/>
+            <a:off x="838201" y="729320"/>
+            <a:ext cx="7734300" cy="11608878"/>
           </a:xfrm>
         </p:spPr>
         <p:txBody>
@@ -609,49 +543,44 @@
           <a:p>
             <a:pPr lvl="0"/>
             <a:r>
-              <a:rPr lang="en-US"/>
+              <a:rPr lang="en-GB"/>
               <a:t>Click to edit Master text styles</a:t>
             </a:r>
           </a:p>
           <a:p>
             <a:pPr lvl="1"/>
             <a:r>
-              <a:rPr lang="en-US"/>
+              <a:rPr lang="en-GB"/>
               <a:t>Second level</a:t>
             </a:r>
           </a:p>
           <a:p>
             <a:pPr lvl="2"/>
             <a:r>
-              <a:rPr lang="en-US"/>
+              <a:rPr lang="en-GB"/>
               <a:t>Third level</a:t>
             </a:r>
           </a:p>
           <a:p>
             <a:pPr lvl="3"/>
             <a:r>
-              <a:rPr lang="en-US"/>
+              <a:rPr lang="en-GB"/>
               <a:t>Fourth level</a:t>
             </a:r>
           </a:p>
           <a:p>
             <a:pPr lvl="4"/>
             <a:r>
-              <a:rPr lang="en-US"/>
+              <a:rPr lang="en-GB"/>
               <a:t>Fifth level</a:t>
             </a:r>
-          </a:p>
-        </p:txBody>
-      </p:sp>
-      <p:sp>
-        <p:nvSpPr>
-          <p:cNvPr id="4" name="Date Placeholder 3">
-            <a:extLst>
-              <a:ext uri="{FF2B5EF4-FFF2-40B4-BE49-F238E27FC236}">
-                <a16:creationId xmlns:a16="http://schemas.microsoft.com/office/drawing/2014/main" id="{FFB5F5B6-48EA-87D2-F02A-688513D93ABA}"/>
-              </a:ext>
-            </a:extLst>
-          </p:cNvPr>
+            <a:endParaRPr lang="en-US" dirty="0"/>
+          </a:p>
+        </p:txBody>
+      </p:sp>
+      <p:sp>
+        <p:nvSpPr>
+          <p:cNvPr id="4" name="Date Placeholder 3"/>
           <p:cNvSpPr>
             <a:spLocks noGrp="1"/>
           </p:cNvSpPr>
@@ -666,7 +595,7 @@
           <a:p>
             <a:fld id="{B09E179D-AE25-442C-9DBD-25AA24DE7ADF}" type="datetimeFigureOut">
               <a:rPr lang="en-US" smtClean="0"/>
-              <a:t>4/24/2026</a:t>
+              <a:t>4/24/26</a:t>
             </a:fld>
             <a:endParaRPr lang="en-US"/>
           </a:p>
@@ -674,13 +603,7 @@
       </p:sp>
       <p:sp>
         <p:nvSpPr>
-          <p:cNvPr id="5" name="Footer Placeholder 4">
-            <a:extLst>
-              <a:ext uri="{FF2B5EF4-FFF2-40B4-BE49-F238E27FC236}">
-                <a16:creationId xmlns:a16="http://schemas.microsoft.com/office/drawing/2014/main" id="{3FCA01D5-62A2-6506-0B7B-449C991D6AD7}"/>
-              </a:ext>
-            </a:extLst>
-          </p:cNvPr>
+          <p:cNvPr id="5" name="Footer Placeholder 4"/>
           <p:cNvSpPr>
             <a:spLocks noGrp="1"/>
           </p:cNvSpPr>
@@ -699,13 +622,7 @@
       </p:sp>
       <p:sp>
         <p:nvSpPr>
-          <p:cNvPr id="6" name="Slide Number Placeholder 5">
-            <a:extLst>
-              <a:ext uri="{FF2B5EF4-FFF2-40B4-BE49-F238E27FC236}">
-                <a16:creationId xmlns:a16="http://schemas.microsoft.com/office/drawing/2014/main" id="{0FD2C52A-6735-C285-022E-CEF1D0C9DB62}"/>
-              </a:ext>
-            </a:extLst>
-          </p:cNvPr>
+          <p:cNvPr id="6" name="Slide Number Placeholder 5"/>
           <p:cNvSpPr>
             <a:spLocks noGrp="1"/>
           </p:cNvSpPr>
@@ -729,7 +646,7 @@
     </p:spTree>
     <p:extLst>
       <p:ext uri="{BB962C8B-B14F-4D97-AF65-F5344CB8AC3E}">
-        <p14:creationId xmlns:p14="http://schemas.microsoft.com/office/powerpoint/2010/main" val="3092295542"/>
+        <p14:creationId xmlns:p14="http://schemas.microsoft.com/office/powerpoint/2010/main" val="1590117856"/>
       </p:ext>
     </p:extLst>
   </p:cSld>
@@ -758,13 +675,7 @@
       </p:grpSpPr>
       <p:sp>
         <p:nvSpPr>
-          <p:cNvPr id="2" name="Title 1">
-            <a:extLst>
-              <a:ext uri="{FF2B5EF4-FFF2-40B4-BE49-F238E27FC236}">
-                <a16:creationId xmlns:a16="http://schemas.microsoft.com/office/drawing/2014/main" id="{42D00AFB-FF1A-4897-6C91-EC44439A5814}"/>
-              </a:ext>
-            </a:extLst>
-          </p:cNvPr>
+          <p:cNvPr id="2" name="Title 1"/>
           <p:cNvSpPr>
             <a:spLocks noGrp="1"/>
           </p:cNvSpPr>
@@ -778,21 +689,16 @@
           <a:lstStyle/>
           <a:p>
             <a:r>
-              <a:rPr lang="en-US"/>
+              <a:rPr lang="en-GB"/>
               <a:t>Click to edit Master title style</a:t>
             </a:r>
-          </a:p>
-        </p:txBody>
-      </p:sp>
-      <p:sp>
-        <p:nvSpPr>
-          <p:cNvPr id="3" name="Content Placeholder 2">
-            <a:extLst>
-              <a:ext uri="{FF2B5EF4-FFF2-40B4-BE49-F238E27FC236}">
-                <a16:creationId xmlns:a16="http://schemas.microsoft.com/office/drawing/2014/main" id="{85857057-42C8-1DDB-5120-F887F5539B9D}"/>
-              </a:ext>
-            </a:extLst>
-          </p:cNvPr>
+            <a:endParaRPr lang="en-US" dirty="0"/>
+          </a:p>
+        </p:txBody>
+      </p:sp>
+      <p:sp>
+        <p:nvSpPr>
+          <p:cNvPr id="3" name="Content Placeholder 2"/>
           <p:cNvSpPr>
             <a:spLocks noGrp="1"/>
           </p:cNvSpPr>
@@ -807,49 +713,44 @@
           <a:p>
             <a:pPr lvl="0"/>
             <a:r>
-              <a:rPr lang="en-US"/>
+              <a:rPr lang="en-GB"/>
               <a:t>Click to edit Master text styles</a:t>
             </a:r>
           </a:p>
           <a:p>
             <a:pPr lvl="1"/>
             <a:r>
-              <a:rPr lang="en-US"/>
+              <a:rPr lang="en-GB"/>
               <a:t>Second level</a:t>
             </a:r>
           </a:p>
           <a:p>
             <a:pPr lvl="2"/>
             <a:r>
-              <a:rPr lang="en-US"/>
+              <a:rPr lang="en-GB"/>
               <a:t>Third level</a:t>
             </a:r>
           </a:p>
           <a:p>
             <a:pPr lvl="3"/>
             <a:r>
-              <a:rPr lang="en-US"/>
+              <a:rPr lang="en-GB"/>
               <a:t>Fourth level</a:t>
             </a:r>
           </a:p>
           <a:p>
             <a:pPr lvl="4"/>
             <a:r>
-              <a:rPr lang="en-US"/>
+              <a:rPr lang="en-GB"/>
               <a:t>Fifth level</a:t>
             </a:r>
-          </a:p>
-        </p:txBody>
-      </p:sp>
-      <p:sp>
-        <p:nvSpPr>
-          <p:cNvPr id="4" name="Date Placeholder 3">
-            <a:extLst>
-              <a:ext uri="{FF2B5EF4-FFF2-40B4-BE49-F238E27FC236}">
-                <a16:creationId xmlns:a16="http://schemas.microsoft.com/office/drawing/2014/main" id="{55C6B6F1-7F63-1D8F-2CB3-F927BC136F3E}"/>
-              </a:ext>
-            </a:extLst>
-          </p:cNvPr>
+            <a:endParaRPr lang="en-US" dirty="0"/>
+          </a:p>
+        </p:txBody>
+      </p:sp>
+      <p:sp>
+        <p:nvSpPr>
+          <p:cNvPr id="4" name="Date Placeholder 3"/>
           <p:cNvSpPr>
             <a:spLocks noGrp="1"/>
           </p:cNvSpPr>
@@ -864,7 +765,7 @@
           <a:p>
             <a:fld id="{B09E179D-AE25-442C-9DBD-25AA24DE7ADF}" type="datetimeFigureOut">
               <a:rPr lang="en-US" smtClean="0"/>
-              <a:t>4/24/2026</a:t>
+              <a:t>4/24/26</a:t>
             </a:fld>
             <a:endParaRPr lang="en-US"/>
           </a:p>
@@ -872,13 +773,7 @@
       </p:sp>
       <p:sp>
         <p:nvSpPr>
-          <p:cNvPr id="5" name="Footer Placeholder 4">
-            <a:extLst>
-              <a:ext uri="{FF2B5EF4-FFF2-40B4-BE49-F238E27FC236}">
-                <a16:creationId xmlns:a16="http://schemas.microsoft.com/office/drawing/2014/main" id="{E69565E5-3B15-F87E-2D14-B4C01EE6FC3B}"/>
-              </a:ext>
-            </a:extLst>
-          </p:cNvPr>
+          <p:cNvPr id="5" name="Footer Placeholder 4"/>
           <p:cNvSpPr>
             <a:spLocks noGrp="1"/>
           </p:cNvSpPr>
@@ -897,13 +792,7 @@
       </p:sp>
       <p:sp>
         <p:nvSpPr>
-          <p:cNvPr id="6" name="Slide Number Placeholder 5">
-            <a:extLst>
-              <a:ext uri="{FF2B5EF4-FFF2-40B4-BE49-F238E27FC236}">
-                <a16:creationId xmlns:a16="http://schemas.microsoft.com/office/drawing/2014/main" id="{B3D36B53-5366-791E-7766-6E97F8A836CD}"/>
-              </a:ext>
-            </a:extLst>
-          </p:cNvPr>
+          <p:cNvPr id="6" name="Slide Number Placeholder 5"/>
           <p:cNvSpPr>
             <a:spLocks noGrp="1"/>
           </p:cNvSpPr>
@@ -927,7 +816,7 @@
     </p:spTree>
     <p:extLst>
       <p:ext uri="{BB962C8B-B14F-4D97-AF65-F5344CB8AC3E}">
-        <p14:creationId xmlns:p14="http://schemas.microsoft.com/office/powerpoint/2010/main" val="2957174880"/>
+        <p14:creationId xmlns:p14="http://schemas.microsoft.com/office/powerpoint/2010/main" val="3745100639"/>
       </p:ext>
     </p:extLst>
   </p:cSld>
@@ -956,13 +845,7 @@
       </p:grpSpPr>
       <p:sp>
         <p:nvSpPr>
-          <p:cNvPr id="2" name="Title 1">
-            <a:extLst>
-              <a:ext uri="{FF2B5EF4-FFF2-40B4-BE49-F238E27FC236}">
-                <a16:creationId xmlns:a16="http://schemas.microsoft.com/office/drawing/2014/main" id="{2DC013EB-FCF2-167C-FBD4-7E61B2E7A094}"/>
-              </a:ext>
-            </a:extLst>
-          </p:cNvPr>
+          <p:cNvPr id="2" name="Title 1"/>
           <p:cNvSpPr>
             <a:spLocks noGrp="1"/>
           </p:cNvSpPr>
@@ -972,34 +855,29 @@
         </p:nvSpPr>
         <p:spPr>
           <a:xfrm>
-            <a:off x="831850" y="1709738"/>
-            <a:ext cx="10515600" cy="2852737"/>
+            <a:off x="831851" y="3415126"/>
+            <a:ext cx="10515600" cy="5698210"/>
           </a:xfrm>
         </p:spPr>
         <p:txBody>
           <a:bodyPr anchor="b"/>
           <a:lstStyle>
             <a:lvl1pPr>
-              <a:defRPr sz="6000"/>
+              <a:defRPr sz="8000"/>
             </a:lvl1pPr>
           </a:lstStyle>
           <a:p>
             <a:r>
-              <a:rPr lang="en-US"/>
+              <a:rPr lang="en-GB"/>
               <a:t>Click to edit Master title style</a:t>
             </a:r>
-          </a:p>
-        </p:txBody>
-      </p:sp>
-      <p:sp>
-        <p:nvSpPr>
-          <p:cNvPr id="3" name="Text Placeholder 2">
-            <a:extLst>
-              <a:ext uri="{FF2B5EF4-FFF2-40B4-BE49-F238E27FC236}">
-                <a16:creationId xmlns:a16="http://schemas.microsoft.com/office/drawing/2014/main" id="{F2381230-9D96-8428-804E-D190F1CB02D2}"/>
-              </a:ext>
-            </a:extLst>
-          </p:cNvPr>
+            <a:endParaRPr lang="en-US" dirty="0"/>
+          </a:p>
+        </p:txBody>
+      </p:sp>
+      <p:sp>
+        <p:nvSpPr>
+          <p:cNvPr id="3" name="Text Placeholder 2"/>
           <p:cNvSpPr>
             <a:spLocks noGrp="1"/>
           </p:cNvSpPr>
@@ -1009,14 +887,34 @@
         </p:nvSpPr>
         <p:spPr>
           <a:xfrm>
-            <a:off x="831850" y="4589463"/>
-            <a:ext cx="10515600" cy="1500187"/>
+            <a:off x="831851" y="9167243"/>
+            <a:ext cx="10515600" cy="2996554"/>
           </a:xfrm>
         </p:spPr>
         <p:txBody>
           <a:bodyPr/>
           <a:lstStyle>
             <a:lvl1pPr marL="0" indent="0">
+              <a:buNone/>
+              <a:defRPr sz="3200">
+                <a:solidFill>
+                  <a:schemeClr val="tx1">
+                    <a:tint val="82000"/>
+                  </a:schemeClr>
+                </a:solidFill>
+              </a:defRPr>
+            </a:lvl1pPr>
+            <a:lvl2pPr marL="609585" indent="0">
+              <a:buNone/>
+              <a:defRPr sz="2667">
+                <a:solidFill>
+                  <a:schemeClr val="tx1">
+                    <a:tint val="82000"/>
+                  </a:schemeClr>
+                </a:solidFill>
+              </a:defRPr>
+            </a:lvl2pPr>
+            <a:lvl3pPr marL="1219170" indent="0">
               <a:buNone/>
               <a:defRPr sz="2400">
                 <a:solidFill>
@@ -1025,30 +923,10 @@
                   </a:schemeClr>
                 </a:solidFill>
               </a:defRPr>
-            </a:lvl1pPr>
-            <a:lvl2pPr marL="457200" indent="0">
-              <a:buNone/>
-              <a:defRPr sz="2000">
-                <a:solidFill>
-                  <a:schemeClr val="tx1">
-                    <a:tint val="82000"/>
-                  </a:schemeClr>
-                </a:solidFill>
-              </a:defRPr>
-            </a:lvl2pPr>
-            <a:lvl3pPr marL="914400" indent="0">
-              <a:buNone/>
-              <a:defRPr sz="1800">
-                <a:solidFill>
-                  <a:schemeClr val="tx1">
-                    <a:tint val="82000"/>
-                  </a:schemeClr>
-                </a:solidFill>
-              </a:defRPr>
             </a:lvl3pPr>
-            <a:lvl4pPr marL="1371600" indent="0">
-              <a:buNone/>
-              <a:defRPr sz="1600">
+            <a:lvl4pPr marL="1828754" indent="0">
+              <a:buNone/>
+              <a:defRPr sz="2133">
                 <a:solidFill>
                   <a:schemeClr val="tx1">
                     <a:tint val="82000"/>
@@ -1056,9 +934,9 @@
                 </a:solidFill>
               </a:defRPr>
             </a:lvl4pPr>
-            <a:lvl5pPr marL="1828800" indent="0">
-              <a:buNone/>
-              <a:defRPr sz="1600">
+            <a:lvl5pPr marL="2438339" indent="0">
+              <a:buNone/>
+              <a:defRPr sz="2133">
                 <a:solidFill>
                   <a:schemeClr val="tx1">
                     <a:tint val="82000"/>
@@ -1066,9 +944,9 @@
                 </a:solidFill>
               </a:defRPr>
             </a:lvl5pPr>
-            <a:lvl6pPr marL="2286000" indent="0">
-              <a:buNone/>
-              <a:defRPr sz="1600">
+            <a:lvl6pPr marL="3047924" indent="0">
+              <a:buNone/>
+              <a:defRPr sz="2133">
                 <a:solidFill>
                   <a:schemeClr val="tx1">
                     <a:tint val="82000"/>
@@ -1076,9 +954,9 @@
                 </a:solidFill>
               </a:defRPr>
             </a:lvl6pPr>
-            <a:lvl7pPr marL="2743200" indent="0">
-              <a:buNone/>
-              <a:defRPr sz="1600">
+            <a:lvl7pPr marL="3657509" indent="0">
+              <a:buNone/>
+              <a:defRPr sz="2133">
                 <a:solidFill>
                   <a:schemeClr val="tx1">
                     <a:tint val="82000"/>
@@ -1086,9 +964,9 @@
                 </a:solidFill>
               </a:defRPr>
             </a:lvl7pPr>
-            <a:lvl8pPr marL="3200400" indent="0">
-              <a:buNone/>
-              <a:defRPr sz="1600">
+            <a:lvl8pPr marL="4267093" indent="0">
+              <a:buNone/>
+              <a:defRPr sz="2133">
                 <a:solidFill>
                   <a:schemeClr val="tx1">
                     <a:tint val="82000"/>
@@ -1096,9 +974,9 @@
                 </a:solidFill>
               </a:defRPr>
             </a:lvl8pPr>
-            <a:lvl9pPr marL="3657600" indent="0">
-              <a:buNone/>
-              <a:defRPr sz="1600">
+            <a:lvl9pPr marL="4876678" indent="0">
+              <a:buNone/>
+              <a:defRPr sz="2133">
                 <a:solidFill>
                   <a:schemeClr val="tx1">
                     <a:tint val="82000"/>
@@ -1110,7 +988,7 @@
           <a:p>
             <a:pPr lvl="0"/>
             <a:r>
-              <a:rPr lang="en-US"/>
+              <a:rPr lang="en-GB"/>
               <a:t>Click to edit Master text styles</a:t>
             </a:r>
           </a:p>
@@ -1118,13 +996,7 @@
       </p:sp>
       <p:sp>
         <p:nvSpPr>
-          <p:cNvPr id="4" name="Date Placeholder 3">
-            <a:extLst>
-              <a:ext uri="{FF2B5EF4-FFF2-40B4-BE49-F238E27FC236}">
-                <a16:creationId xmlns:a16="http://schemas.microsoft.com/office/drawing/2014/main" id="{B088F472-545D-1A5D-A052-8C2EDFAFAC53}"/>
-              </a:ext>
-            </a:extLst>
-          </p:cNvPr>
+          <p:cNvPr id="4" name="Date Placeholder 3"/>
           <p:cNvSpPr>
             <a:spLocks noGrp="1"/>
           </p:cNvSpPr>
@@ -1139,7 +1011,7 @@
           <a:p>
             <a:fld id="{B09E179D-AE25-442C-9DBD-25AA24DE7ADF}" type="datetimeFigureOut">
               <a:rPr lang="en-US" smtClean="0"/>
-              <a:t>4/24/2026</a:t>
+              <a:t>4/24/26</a:t>
             </a:fld>
             <a:endParaRPr lang="en-US"/>
           </a:p>
@@ -1147,13 +1019,7 @@
       </p:sp>
       <p:sp>
         <p:nvSpPr>
-          <p:cNvPr id="5" name="Footer Placeholder 4">
-            <a:extLst>
-              <a:ext uri="{FF2B5EF4-FFF2-40B4-BE49-F238E27FC236}">
-                <a16:creationId xmlns:a16="http://schemas.microsoft.com/office/drawing/2014/main" id="{E2C28333-ED30-F079-EC95-A2C99439D9B8}"/>
-              </a:ext>
-            </a:extLst>
-          </p:cNvPr>
+          <p:cNvPr id="5" name="Footer Placeholder 4"/>
           <p:cNvSpPr>
             <a:spLocks noGrp="1"/>
           </p:cNvSpPr>
@@ -1172,13 +1038,7 @@
       </p:sp>
       <p:sp>
         <p:nvSpPr>
-          <p:cNvPr id="6" name="Slide Number Placeholder 5">
-            <a:extLst>
-              <a:ext uri="{FF2B5EF4-FFF2-40B4-BE49-F238E27FC236}">
-                <a16:creationId xmlns:a16="http://schemas.microsoft.com/office/drawing/2014/main" id="{91662B82-4ECE-7803-681A-347164DE1B7F}"/>
-              </a:ext>
-            </a:extLst>
-          </p:cNvPr>
+          <p:cNvPr id="6" name="Slide Number Placeholder 5"/>
           <p:cNvSpPr>
             <a:spLocks noGrp="1"/>
           </p:cNvSpPr>
@@ -1202,7 +1062,7 @@
     </p:spTree>
     <p:extLst>
       <p:ext uri="{BB962C8B-B14F-4D97-AF65-F5344CB8AC3E}">
-        <p14:creationId xmlns:p14="http://schemas.microsoft.com/office/powerpoint/2010/main" val="914122060"/>
+        <p14:creationId xmlns:p14="http://schemas.microsoft.com/office/powerpoint/2010/main" val="2481330733"/>
       </p:ext>
     </p:extLst>
   </p:cSld>
@@ -1231,13 +1091,7 @@
       </p:grpSpPr>
       <p:sp>
         <p:nvSpPr>
-          <p:cNvPr id="2" name="Title 1">
-            <a:extLst>
-              <a:ext uri="{FF2B5EF4-FFF2-40B4-BE49-F238E27FC236}">
-                <a16:creationId xmlns:a16="http://schemas.microsoft.com/office/drawing/2014/main" id="{2C433BD1-1851-4278-55CB-8F1B1F211333}"/>
-              </a:ext>
-            </a:extLst>
-          </p:cNvPr>
+          <p:cNvPr id="2" name="Title 1"/>
           <p:cNvSpPr>
             <a:spLocks noGrp="1"/>
           </p:cNvSpPr>
@@ -1251,21 +1105,16 @@
           <a:lstStyle/>
           <a:p>
             <a:r>
-              <a:rPr lang="en-US"/>
+              <a:rPr lang="en-GB"/>
               <a:t>Click to edit Master title style</a:t>
             </a:r>
-          </a:p>
-        </p:txBody>
-      </p:sp>
-      <p:sp>
-        <p:nvSpPr>
-          <p:cNvPr id="3" name="Content Placeholder 2">
-            <a:extLst>
-              <a:ext uri="{FF2B5EF4-FFF2-40B4-BE49-F238E27FC236}">
-                <a16:creationId xmlns:a16="http://schemas.microsoft.com/office/drawing/2014/main" id="{C0D831DF-DAC0-E05E-26A5-45B3BDDB3D5E}"/>
-              </a:ext>
-            </a:extLst>
-          </p:cNvPr>
+            <a:endParaRPr lang="en-US" dirty="0"/>
+          </a:p>
+        </p:txBody>
+      </p:sp>
+      <p:sp>
+        <p:nvSpPr>
+          <p:cNvPr id="3" name="Content Placeholder 2"/>
           <p:cNvSpPr>
             <a:spLocks noGrp="1"/>
           </p:cNvSpPr>
@@ -1275,8 +1124,8 @@
         </p:nvSpPr>
         <p:spPr>
           <a:xfrm>
-            <a:off x="838200" y="1825625"/>
-            <a:ext cx="5181600" cy="4351338"/>
+            <a:off x="838200" y="3646601"/>
+            <a:ext cx="5181600" cy="8691597"/>
           </a:xfrm>
         </p:spPr>
         <p:txBody>
@@ -1285,49 +1134,44 @@
           <a:p>
             <a:pPr lvl="0"/>
             <a:r>
-              <a:rPr lang="en-US"/>
+              <a:rPr lang="en-GB"/>
               <a:t>Click to edit Master text styles</a:t>
             </a:r>
           </a:p>
           <a:p>
             <a:pPr lvl="1"/>
             <a:r>
-              <a:rPr lang="en-US"/>
+              <a:rPr lang="en-GB"/>
               <a:t>Second level</a:t>
             </a:r>
           </a:p>
           <a:p>
             <a:pPr lvl="2"/>
             <a:r>
-              <a:rPr lang="en-US"/>
+              <a:rPr lang="en-GB"/>
               <a:t>Third level</a:t>
             </a:r>
           </a:p>
           <a:p>
             <a:pPr lvl="3"/>
             <a:r>
-              <a:rPr lang="en-US"/>
+              <a:rPr lang="en-GB"/>
               <a:t>Fourth level</a:t>
             </a:r>
           </a:p>
           <a:p>
             <a:pPr lvl="4"/>
             <a:r>
-              <a:rPr lang="en-US"/>
+              <a:rPr lang="en-GB"/>
               <a:t>Fifth level</a:t>
             </a:r>
-          </a:p>
-        </p:txBody>
-      </p:sp>
-      <p:sp>
-        <p:nvSpPr>
-          <p:cNvPr id="4" name="Content Placeholder 3">
-            <a:extLst>
-              <a:ext uri="{FF2B5EF4-FFF2-40B4-BE49-F238E27FC236}">
-                <a16:creationId xmlns:a16="http://schemas.microsoft.com/office/drawing/2014/main" id="{14073E3B-9F87-CE2E-328F-7DC73DC5B5A3}"/>
-              </a:ext>
-            </a:extLst>
-          </p:cNvPr>
+            <a:endParaRPr lang="en-US" dirty="0"/>
+          </a:p>
+        </p:txBody>
+      </p:sp>
+      <p:sp>
+        <p:nvSpPr>
+          <p:cNvPr id="4" name="Content Placeholder 3"/>
           <p:cNvSpPr>
             <a:spLocks noGrp="1"/>
           </p:cNvSpPr>
@@ -1337,8 +1181,8 @@
         </p:nvSpPr>
         <p:spPr>
           <a:xfrm>
-            <a:off x="6172200" y="1825625"/>
-            <a:ext cx="5181600" cy="4351338"/>
+            <a:off x="6172200" y="3646601"/>
+            <a:ext cx="5181600" cy="8691597"/>
           </a:xfrm>
         </p:spPr>
         <p:txBody>
@@ -1347,49 +1191,44 @@
           <a:p>
             <a:pPr lvl="0"/>
             <a:r>
-              <a:rPr lang="en-US"/>
+              <a:rPr lang="en-GB"/>
               <a:t>Click to edit Master text styles</a:t>
             </a:r>
           </a:p>
           <a:p>
             <a:pPr lvl="1"/>
             <a:r>
-              <a:rPr lang="en-US"/>
+              <a:rPr lang="en-GB"/>
               <a:t>Second level</a:t>
             </a:r>
           </a:p>
           <a:p>
             <a:pPr lvl="2"/>
             <a:r>
-              <a:rPr lang="en-US"/>
+              <a:rPr lang="en-GB"/>
               <a:t>Third level</a:t>
             </a:r>
           </a:p>
           <a:p>
             <a:pPr lvl="3"/>
             <a:r>
-              <a:rPr lang="en-US"/>
+              <a:rPr lang="en-GB"/>
               <a:t>Fourth level</a:t>
             </a:r>
           </a:p>
           <a:p>
             <a:pPr lvl="4"/>
             <a:r>
-              <a:rPr lang="en-US"/>
+              <a:rPr lang="en-GB"/>
               <a:t>Fifth level</a:t>
             </a:r>
-          </a:p>
-        </p:txBody>
-      </p:sp>
-      <p:sp>
-        <p:nvSpPr>
-          <p:cNvPr id="5" name="Date Placeholder 4">
-            <a:extLst>
-              <a:ext uri="{FF2B5EF4-FFF2-40B4-BE49-F238E27FC236}">
-                <a16:creationId xmlns:a16="http://schemas.microsoft.com/office/drawing/2014/main" id="{F1002CB9-026A-1FF2-3BA9-D822A9D82D08}"/>
-              </a:ext>
-            </a:extLst>
-          </p:cNvPr>
+            <a:endParaRPr lang="en-US" dirty="0"/>
+          </a:p>
+        </p:txBody>
+      </p:sp>
+      <p:sp>
+        <p:nvSpPr>
+          <p:cNvPr id="5" name="Date Placeholder 4"/>
           <p:cNvSpPr>
             <a:spLocks noGrp="1"/>
           </p:cNvSpPr>
@@ -1404,7 +1243,7 @@
           <a:p>
             <a:fld id="{B09E179D-AE25-442C-9DBD-25AA24DE7ADF}" type="datetimeFigureOut">
               <a:rPr lang="en-US" smtClean="0"/>
-              <a:t>4/24/2026</a:t>
+              <a:t>4/24/26</a:t>
             </a:fld>
             <a:endParaRPr lang="en-US"/>
           </a:p>
@@ -1412,13 +1251,7 @@
       </p:sp>
       <p:sp>
         <p:nvSpPr>
-          <p:cNvPr id="6" name="Footer Placeholder 5">
-            <a:extLst>
-              <a:ext uri="{FF2B5EF4-FFF2-40B4-BE49-F238E27FC236}">
-                <a16:creationId xmlns:a16="http://schemas.microsoft.com/office/drawing/2014/main" id="{201E2759-6B57-5751-F457-21DDC8291519}"/>
-              </a:ext>
-            </a:extLst>
-          </p:cNvPr>
+          <p:cNvPr id="6" name="Footer Placeholder 5"/>
           <p:cNvSpPr>
             <a:spLocks noGrp="1"/>
           </p:cNvSpPr>
@@ -1437,13 +1270,7 @@
       </p:sp>
       <p:sp>
         <p:nvSpPr>
-          <p:cNvPr id="7" name="Slide Number Placeholder 6">
-            <a:extLst>
-              <a:ext uri="{FF2B5EF4-FFF2-40B4-BE49-F238E27FC236}">
-                <a16:creationId xmlns:a16="http://schemas.microsoft.com/office/drawing/2014/main" id="{955FD741-4436-AC54-56E8-8BF1500A31A7}"/>
-              </a:ext>
-            </a:extLst>
-          </p:cNvPr>
+          <p:cNvPr id="7" name="Slide Number Placeholder 6"/>
           <p:cNvSpPr>
             <a:spLocks noGrp="1"/>
           </p:cNvSpPr>
@@ -1467,7 +1294,7 @@
     </p:spTree>
     <p:extLst>
       <p:ext uri="{BB962C8B-B14F-4D97-AF65-F5344CB8AC3E}">
-        <p14:creationId xmlns:p14="http://schemas.microsoft.com/office/powerpoint/2010/main" val="1746626918"/>
+        <p14:creationId xmlns:p14="http://schemas.microsoft.com/office/powerpoint/2010/main" val="2036510703"/>
       </p:ext>
     </p:extLst>
   </p:cSld>
@@ -1496,13 +1323,7 @@
       </p:grpSpPr>
       <p:sp>
         <p:nvSpPr>
-          <p:cNvPr id="2" name="Title 1">
-            <a:extLst>
-              <a:ext uri="{FF2B5EF4-FFF2-40B4-BE49-F238E27FC236}">
-                <a16:creationId xmlns:a16="http://schemas.microsoft.com/office/drawing/2014/main" id="{6E11C61B-62E7-8332-11C8-18F17B29C959}"/>
-              </a:ext>
-            </a:extLst>
-          </p:cNvPr>
+          <p:cNvPr id="2" name="Title 1"/>
           <p:cNvSpPr>
             <a:spLocks noGrp="1"/>
           </p:cNvSpPr>
@@ -1512,8 +1333,8 @@
         </p:nvSpPr>
         <p:spPr>
           <a:xfrm>
-            <a:off x="839788" y="365125"/>
-            <a:ext cx="10515600" cy="1325563"/>
+            <a:off x="839788" y="729323"/>
+            <a:ext cx="10515600" cy="2647751"/>
           </a:xfrm>
         </p:spPr>
         <p:txBody>
@@ -1521,21 +1342,16 @@
           <a:lstStyle/>
           <a:p>
             <a:r>
-              <a:rPr lang="en-US"/>
+              <a:rPr lang="en-GB"/>
               <a:t>Click to edit Master title style</a:t>
             </a:r>
-          </a:p>
-        </p:txBody>
-      </p:sp>
-      <p:sp>
-        <p:nvSpPr>
-          <p:cNvPr id="3" name="Text Placeholder 2">
-            <a:extLst>
-              <a:ext uri="{FF2B5EF4-FFF2-40B4-BE49-F238E27FC236}">
-                <a16:creationId xmlns:a16="http://schemas.microsoft.com/office/drawing/2014/main" id="{40099675-C083-489C-609A-154C977F75A2}"/>
-              </a:ext>
-            </a:extLst>
-          </p:cNvPr>
+            <a:endParaRPr lang="en-US" dirty="0"/>
+          </a:p>
+        </p:txBody>
+      </p:sp>
+      <p:sp>
+        <p:nvSpPr>
+          <p:cNvPr id="3" name="Text Placeholder 2"/>
           <p:cNvSpPr>
             <a:spLocks noGrp="1"/>
           </p:cNvSpPr>
@@ -1545,8 +1361,8 @@
         </p:nvSpPr>
         <p:spPr>
           <a:xfrm>
-            <a:off x="839788" y="1681163"/>
-            <a:ext cx="5157787" cy="823912"/>
+            <a:off x="839789" y="3358045"/>
+            <a:ext cx="5157787" cy="1645726"/>
           </a:xfrm>
         </p:spPr>
         <p:txBody>
@@ -1554,45 +1370,45 @@
           <a:lstStyle>
             <a:lvl1pPr marL="0" indent="0">
               <a:buNone/>
+              <a:defRPr sz="3200" b="1"/>
+            </a:lvl1pPr>
+            <a:lvl2pPr marL="609585" indent="0">
+              <a:buNone/>
+              <a:defRPr sz="2667" b="1"/>
+            </a:lvl2pPr>
+            <a:lvl3pPr marL="1219170" indent="0">
+              <a:buNone/>
               <a:defRPr sz="2400" b="1"/>
-            </a:lvl1pPr>
-            <a:lvl2pPr marL="457200" indent="0">
-              <a:buNone/>
-              <a:defRPr sz="2000" b="1"/>
-            </a:lvl2pPr>
-            <a:lvl3pPr marL="914400" indent="0">
-              <a:buNone/>
-              <a:defRPr sz="1800" b="1"/>
             </a:lvl3pPr>
-            <a:lvl4pPr marL="1371600" indent="0">
-              <a:buNone/>
-              <a:defRPr sz="1600" b="1"/>
+            <a:lvl4pPr marL="1828754" indent="0">
+              <a:buNone/>
+              <a:defRPr sz="2133" b="1"/>
             </a:lvl4pPr>
-            <a:lvl5pPr marL="1828800" indent="0">
-              <a:buNone/>
-              <a:defRPr sz="1600" b="1"/>
+            <a:lvl5pPr marL="2438339" indent="0">
+              <a:buNone/>
+              <a:defRPr sz="2133" b="1"/>
             </a:lvl5pPr>
-            <a:lvl6pPr marL="2286000" indent="0">
-              <a:buNone/>
-              <a:defRPr sz="1600" b="1"/>
+            <a:lvl6pPr marL="3047924" indent="0">
+              <a:buNone/>
+              <a:defRPr sz="2133" b="1"/>
             </a:lvl6pPr>
-            <a:lvl7pPr marL="2743200" indent="0">
-              <a:buNone/>
-              <a:defRPr sz="1600" b="1"/>
+            <a:lvl7pPr marL="3657509" indent="0">
+              <a:buNone/>
+              <a:defRPr sz="2133" b="1"/>
             </a:lvl7pPr>
-            <a:lvl8pPr marL="3200400" indent="0">
-              <a:buNone/>
-              <a:defRPr sz="1600" b="1"/>
+            <a:lvl8pPr marL="4267093" indent="0">
+              <a:buNone/>
+              <a:defRPr sz="2133" b="1"/>
             </a:lvl8pPr>
-            <a:lvl9pPr marL="3657600" indent="0">
-              <a:buNone/>
-              <a:defRPr sz="1600" b="1"/>
+            <a:lvl9pPr marL="4876678" indent="0">
+              <a:buNone/>
+              <a:defRPr sz="2133" b="1"/>
             </a:lvl9pPr>
           </a:lstStyle>
           <a:p>
             <a:pPr lvl="0"/>
             <a:r>
-              <a:rPr lang="en-US"/>
+              <a:rPr lang="en-GB"/>
               <a:t>Click to edit Master text styles</a:t>
             </a:r>
           </a:p>
@@ -1600,13 +1416,7 @@
       </p:sp>
       <p:sp>
         <p:nvSpPr>
-          <p:cNvPr id="4" name="Content Placeholder 3">
-            <a:extLst>
-              <a:ext uri="{FF2B5EF4-FFF2-40B4-BE49-F238E27FC236}">
-                <a16:creationId xmlns:a16="http://schemas.microsoft.com/office/drawing/2014/main" id="{DAE1ED26-B325-FB05-48FC-F1BBA44986B6}"/>
-              </a:ext>
-            </a:extLst>
-          </p:cNvPr>
+          <p:cNvPr id="4" name="Content Placeholder 3"/>
           <p:cNvSpPr>
             <a:spLocks noGrp="1"/>
           </p:cNvSpPr>
@@ -1616,8 +1426,8 @@
         </p:nvSpPr>
         <p:spPr>
           <a:xfrm>
-            <a:off x="839788" y="2505075"/>
-            <a:ext cx="5157787" cy="3684588"/>
+            <a:off x="839789" y="5003772"/>
+            <a:ext cx="5157787" cy="7359794"/>
           </a:xfrm>
         </p:spPr>
         <p:txBody>
@@ -1626,49 +1436,44 @@
           <a:p>
             <a:pPr lvl="0"/>
             <a:r>
-              <a:rPr lang="en-US"/>
+              <a:rPr lang="en-GB"/>
               <a:t>Click to edit Master text styles</a:t>
             </a:r>
           </a:p>
           <a:p>
             <a:pPr lvl="1"/>
             <a:r>
-              <a:rPr lang="en-US"/>
+              <a:rPr lang="en-GB"/>
               <a:t>Second level</a:t>
             </a:r>
           </a:p>
           <a:p>
             <a:pPr lvl="2"/>
             <a:r>
-              <a:rPr lang="en-US"/>
+              <a:rPr lang="en-GB"/>
               <a:t>Third level</a:t>
             </a:r>
           </a:p>
           <a:p>
             <a:pPr lvl="3"/>
             <a:r>
-              <a:rPr lang="en-US"/>
+              <a:rPr lang="en-GB"/>
               <a:t>Fourth level</a:t>
             </a:r>
           </a:p>
           <a:p>
             <a:pPr lvl="4"/>
             <a:r>
-              <a:rPr lang="en-US"/>
+              <a:rPr lang="en-GB"/>
               <a:t>Fifth level</a:t>
             </a:r>
-          </a:p>
-        </p:txBody>
-      </p:sp>
-      <p:sp>
-        <p:nvSpPr>
-          <p:cNvPr id="5" name="Text Placeholder 4">
-            <a:extLst>
-              <a:ext uri="{FF2B5EF4-FFF2-40B4-BE49-F238E27FC236}">
-                <a16:creationId xmlns:a16="http://schemas.microsoft.com/office/drawing/2014/main" id="{21E52AA3-20DF-ACA3-DB3A-7769CE7BA18E}"/>
-              </a:ext>
-            </a:extLst>
-          </p:cNvPr>
+            <a:endParaRPr lang="en-US" dirty="0"/>
+          </a:p>
+        </p:txBody>
+      </p:sp>
+      <p:sp>
+        <p:nvSpPr>
+          <p:cNvPr id="5" name="Text Placeholder 4"/>
           <p:cNvSpPr>
             <a:spLocks noGrp="1"/>
           </p:cNvSpPr>
@@ -1678,8 +1483,8 @@
         </p:nvSpPr>
         <p:spPr>
           <a:xfrm>
-            <a:off x="6172200" y="1681163"/>
-            <a:ext cx="5183188" cy="823912"/>
+            <a:off x="6172201" y="3358045"/>
+            <a:ext cx="5183188" cy="1645726"/>
           </a:xfrm>
         </p:spPr>
         <p:txBody>
@@ -1687,45 +1492,45 @@
           <a:lstStyle>
             <a:lvl1pPr marL="0" indent="0">
               <a:buNone/>
+              <a:defRPr sz="3200" b="1"/>
+            </a:lvl1pPr>
+            <a:lvl2pPr marL="609585" indent="0">
+              <a:buNone/>
+              <a:defRPr sz="2667" b="1"/>
+            </a:lvl2pPr>
+            <a:lvl3pPr marL="1219170" indent="0">
+              <a:buNone/>
               <a:defRPr sz="2400" b="1"/>
-            </a:lvl1pPr>
-            <a:lvl2pPr marL="457200" indent="0">
-              <a:buNone/>
-              <a:defRPr sz="2000" b="1"/>
-            </a:lvl2pPr>
-            <a:lvl3pPr marL="914400" indent="0">
-              <a:buNone/>
-              <a:defRPr sz="1800" b="1"/>
             </a:lvl3pPr>
-            <a:lvl4pPr marL="1371600" indent="0">
-              <a:buNone/>
-              <a:defRPr sz="1600" b="1"/>
+            <a:lvl4pPr marL="1828754" indent="0">
+              <a:buNone/>
+              <a:defRPr sz="2133" b="1"/>
             </a:lvl4pPr>
-            <a:lvl5pPr marL="1828800" indent="0">
-              <a:buNone/>
-              <a:defRPr sz="1600" b="1"/>
+            <a:lvl5pPr marL="2438339" indent="0">
+              <a:buNone/>
+              <a:defRPr sz="2133" b="1"/>
             </a:lvl5pPr>
-            <a:lvl6pPr marL="2286000" indent="0">
-              <a:buNone/>
-              <a:defRPr sz="1600" b="1"/>
+            <a:lvl6pPr marL="3047924" indent="0">
+              <a:buNone/>
+              <a:defRPr sz="2133" b="1"/>
             </a:lvl6pPr>
-            <a:lvl7pPr marL="2743200" indent="0">
-              <a:buNone/>
-              <a:defRPr sz="1600" b="1"/>
+            <a:lvl7pPr marL="3657509" indent="0">
+              <a:buNone/>
+              <a:defRPr sz="2133" b="1"/>
             </a:lvl7pPr>
-            <a:lvl8pPr marL="3200400" indent="0">
-              <a:buNone/>
-              <a:defRPr sz="1600" b="1"/>
+            <a:lvl8pPr marL="4267093" indent="0">
+              <a:buNone/>
+              <a:defRPr sz="2133" b="1"/>
             </a:lvl8pPr>
-            <a:lvl9pPr marL="3657600" indent="0">
-              <a:buNone/>
-              <a:defRPr sz="1600" b="1"/>
+            <a:lvl9pPr marL="4876678" indent="0">
+              <a:buNone/>
+              <a:defRPr sz="2133" b="1"/>
             </a:lvl9pPr>
           </a:lstStyle>
           <a:p>
             <a:pPr lvl="0"/>
             <a:r>
-              <a:rPr lang="en-US"/>
+              <a:rPr lang="en-GB"/>
               <a:t>Click to edit Master text styles</a:t>
             </a:r>
           </a:p>
@@ -1733,13 +1538,7 @@
       </p:sp>
       <p:sp>
         <p:nvSpPr>
-          <p:cNvPr id="6" name="Content Placeholder 5">
-            <a:extLst>
-              <a:ext uri="{FF2B5EF4-FFF2-40B4-BE49-F238E27FC236}">
-                <a16:creationId xmlns:a16="http://schemas.microsoft.com/office/drawing/2014/main" id="{3573BF10-97D2-19BF-A634-E3B170FE0010}"/>
-              </a:ext>
-            </a:extLst>
-          </p:cNvPr>
+          <p:cNvPr id="6" name="Content Placeholder 5"/>
           <p:cNvSpPr>
             <a:spLocks noGrp="1"/>
           </p:cNvSpPr>
@@ -1749,8 +1548,8 @@
         </p:nvSpPr>
         <p:spPr>
           <a:xfrm>
-            <a:off x="6172200" y="2505075"/>
-            <a:ext cx="5183188" cy="3684588"/>
+            <a:off x="6172201" y="5003772"/>
+            <a:ext cx="5183188" cy="7359794"/>
           </a:xfrm>
         </p:spPr>
         <p:txBody>
@@ -1759,49 +1558,44 @@
           <a:p>
             <a:pPr lvl="0"/>
             <a:r>
-              <a:rPr lang="en-US"/>
+              <a:rPr lang="en-GB"/>
               <a:t>Click to edit Master text styles</a:t>
             </a:r>
           </a:p>
           <a:p>
             <a:pPr lvl="1"/>
             <a:r>
-              <a:rPr lang="en-US"/>
+              <a:rPr lang="en-GB"/>
               <a:t>Second level</a:t>
             </a:r>
           </a:p>
           <a:p>
             <a:pPr lvl="2"/>
             <a:r>
-              <a:rPr lang="en-US"/>
+              <a:rPr lang="en-GB"/>
               <a:t>Third level</a:t>
             </a:r>
           </a:p>
           <a:p>
             <a:pPr lvl="3"/>
             <a:r>
-              <a:rPr lang="en-US"/>
+              <a:rPr lang="en-GB"/>
               <a:t>Fourth level</a:t>
             </a:r>
           </a:p>
           <a:p>
             <a:pPr lvl="4"/>
             <a:r>
-              <a:rPr lang="en-US"/>
+              <a:rPr lang="en-GB"/>
               <a:t>Fifth level</a:t>
             </a:r>
-          </a:p>
-        </p:txBody>
-      </p:sp>
-      <p:sp>
-        <p:nvSpPr>
-          <p:cNvPr id="7" name="Date Placeholder 6">
-            <a:extLst>
-              <a:ext uri="{FF2B5EF4-FFF2-40B4-BE49-F238E27FC236}">
-                <a16:creationId xmlns:a16="http://schemas.microsoft.com/office/drawing/2014/main" id="{B54C1635-9792-1679-3046-6A2BB2B53390}"/>
-              </a:ext>
-            </a:extLst>
-          </p:cNvPr>
+            <a:endParaRPr lang="en-US" dirty="0"/>
+          </a:p>
+        </p:txBody>
+      </p:sp>
+      <p:sp>
+        <p:nvSpPr>
+          <p:cNvPr id="7" name="Date Placeholder 6"/>
           <p:cNvSpPr>
             <a:spLocks noGrp="1"/>
           </p:cNvSpPr>
@@ -1816,7 +1610,7 @@
           <a:p>
             <a:fld id="{B09E179D-AE25-442C-9DBD-25AA24DE7ADF}" type="datetimeFigureOut">
               <a:rPr lang="en-US" smtClean="0"/>
-              <a:t>4/24/2026</a:t>
+              <a:t>4/24/26</a:t>
             </a:fld>
             <a:endParaRPr lang="en-US"/>
           </a:p>
@@ -1824,13 +1618,7 @@
       </p:sp>
       <p:sp>
         <p:nvSpPr>
-          <p:cNvPr id="8" name="Footer Placeholder 7">
-            <a:extLst>
-              <a:ext uri="{FF2B5EF4-FFF2-40B4-BE49-F238E27FC236}">
-                <a16:creationId xmlns:a16="http://schemas.microsoft.com/office/drawing/2014/main" id="{90775B75-6C9D-40DC-A9A4-3BFD7C917811}"/>
-              </a:ext>
-            </a:extLst>
-          </p:cNvPr>
+          <p:cNvPr id="8" name="Footer Placeholder 7"/>
           <p:cNvSpPr>
             <a:spLocks noGrp="1"/>
           </p:cNvSpPr>
@@ -1849,13 +1637,7 @@
       </p:sp>
       <p:sp>
         <p:nvSpPr>
-          <p:cNvPr id="9" name="Slide Number Placeholder 8">
-            <a:extLst>
-              <a:ext uri="{FF2B5EF4-FFF2-40B4-BE49-F238E27FC236}">
-                <a16:creationId xmlns:a16="http://schemas.microsoft.com/office/drawing/2014/main" id="{0BAB2ACB-770C-0098-7A62-E5C87A3FC679}"/>
-              </a:ext>
-            </a:extLst>
-          </p:cNvPr>
+          <p:cNvPr id="9" name="Slide Number Placeholder 8"/>
           <p:cNvSpPr>
             <a:spLocks noGrp="1"/>
           </p:cNvSpPr>
@@ -1879,7 +1661,7 @@
     </p:spTree>
     <p:extLst>
       <p:ext uri="{BB962C8B-B14F-4D97-AF65-F5344CB8AC3E}">
-        <p14:creationId xmlns:p14="http://schemas.microsoft.com/office/powerpoint/2010/main" val="3744673230"/>
+        <p14:creationId xmlns:p14="http://schemas.microsoft.com/office/powerpoint/2010/main" val="2739224043"/>
       </p:ext>
     </p:extLst>
   </p:cSld>
@@ -1908,13 +1690,7 @@
       </p:grpSpPr>
       <p:sp>
         <p:nvSpPr>
-          <p:cNvPr id="2" name="Title 1">
-            <a:extLst>
-              <a:ext uri="{FF2B5EF4-FFF2-40B4-BE49-F238E27FC236}">
-                <a16:creationId xmlns:a16="http://schemas.microsoft.com/office/drawing/2014/main" id="{C949CEF2-C8AA-7AF9-76FC-C188F41723E7}"/>
-              </a:ext>
-            </a:extLst>
-          </p:cNvPr>
+          <p:cNvPr id="2" name="Title 1"/>
           <p:cNvSpPr>
             <a:spLocks noGrp="1"/>
           </p:cNvSpPr>
@@ -1928,21 +1704,16 @@
           <a:lstStyle/>
           <a:p>
             <a:r>
-              <a:rPr lang="en-US"/>
+              <a:rPr lang="en-GB"/>
               <a:t>Click to edit Master title style</a:t>
             </a:r>
-          </a:p>
-        </p:txBody>
-      </p:sp>
-      <p:sp>
-        <p:nvSpPr>
-          <p:cNvPr id="3" name="Date Placeholder 2">
-            <a:extLst>
-              <a:ext uri="{FF2B5EF4-FFF2-40B4-BE49-F238E27FC236}">
-                <a16:creationId xmlns:a16="http://schemas.microsoft.com/office/drawing/2014/main" id="{1548C0C4-8971-EB23-DF27-A8961084FE76}"/>
-              </a:ext>
-            </a:extLst>
-          </p:cNvPr>
+            <a:endParaRPr lang="en-US" dirty="0"/>
+          </a:p>
+        </p:txBody>
+      </p:sp>
+      <p:sp>
+        <p:nvSpPr>
+          <p:cNvPr id="3" name="Date Placeholder 2"/>
           <p:cNvSpPr>
             <a:spLocks noGrp="1"/>
           </p:cNvSpPr>
@@ -1957,7 +1728,7 @@
           <a:p>
             <a:fld id="{B09E179D-AE25-442C-9DBD-25AA24DE7ADF}" type="datetimeFigureOut">
               <a:rPr lang="en-US" smtClean="0"/>
-              <a:t>4/24/2026</a:t>
+              <a:t>4/24/26</a:t>
             </a:fld>
             <a:endParaRPr lang="en-US"/>
           </a:p>
@@ -1965,13 +1736,7 @@
       </p:sp>
       <p:sp>
         <p:nvSpPr>
-          <p:cNvPr id="4" name="Footer Placeholder 3">
-            <a:extLst>
-              <a:ext uri="{FF2B5EF4-FFF2-40B4-BE49-F238E27FC236}">
-                <a16:creationId xmlns:a16="http://schemas.microsoft.com/office/drawing/2014/main" id="{C4DA9942-03EC-F2D7-5218-710A52A921C8}"/>
-              </a:ext>
-            </a:extLst>
-          </p:cNvPr>
+          <p:cNvPr id="4" name="Footer Placeholder 3"/>
           <p:cNvSpPr>
             <a:spLocks noGrp="1"/>
           </p:cNvSpPr>
@@ -1990,13 +1755,7 @@
       </p:sp>
       <p:sp>
         <p:nvSpPr>
-          <p:cNvPr id="5" name="Slide Number Placeholder 4">
-            <a:extLst>
-              <a:ext uri="{FF2B5EF4-FFF2-40B4-BE49-F238E27FC236}">
-                <a16:creationId xmlns:a16="http://schemas.microsoft.com/office/drawing/2014/main" id="{C124A754-4C72-384F-4934-C63127E3B5FB}"/>
-              </a:ext>
-            </a:extLst>
-          </p:cNvPr>
+          <p:cNvPr id="5" name="Slide Number Placeholder 4"/>
           <p:cNvSpPr>
             <a:spLocks noGrp="1"/>
           </p:cNvSpPr>
@@ -2020,7 +1779,7 @@
     </p:spTree>
     <p:extLst>
       <p:ext uri="{BB962C8B-B14F-4D97-AF65-F5344CB8AC3E}">
-        <p14:creationId xmlns:p14="http://schemas.microsoft.com/office/powerpoint/2010/main" val="553057670"/>
+        <p14:creationId xmlns:p14="http://schemas.microsoft.com/office/powerpoint/2010/main" val="1980091857"/>
       </p:ext>
     </p:extLst>
   </p:cSld>
@@ -2049,13 +1808,7 @@
       </p:grpSpPr>
       <p:sp>
         <p:nvSpPr>
-          <p:cNvPr id="2" name="Date Placeholder 1">
-            <a:extLst>
-              <a:ext uri="{FF2B5EF4-FFF2-40B4-BE49-F238E27FC236}">
-                <a16:creationId xmlns:a16="http://schemas.microsoft.com/office/drawing/2014/main" id="{34B8D1A6-4D4E-841F-D718-D8E405E18980}"/>
-              </a:ext>
-            </a:extLst>
-          </p:cNvPr>
+          <p:cNvPr id="2" name="Date Placeholder 1"/>
           <p:cNvSpPr>
             <a:spLocks noGrp="1"/>
           </p:cNvSpPr>
@@ -2070,7 +1823,7 @@
           <a:p>
             <a:fld id="{B09E179D-AE25-442C-9DBD-25AA24DE7ADF}" type="datetimeFigureOut">
               <a:rPr lang="en-US" smtClean="0"/>
-              <a:t>4/24/2026</a:t>
+              <a:t>4/24/26</a:t>
             </a:fld>
             <a:endParaRPr lang="en-US"/>
           </a:p>
@@ -2078,13 +1831,7 @@
       </p:sp>
       <p:sp>
         <p:nvSpPr>
-          <p:cNvPr id="3" name="Footer Placeholder 2">
-            <a:extLst>
-              <a:ext uri="{FF2B5EF4-FFF2-40B4-BE49-F238E27FC236}">
-                <a16:creationId xmlns:a16="http://schemas.microsoft.com/office/drawing/2014/main" id="{DE4C9F6B-62CC-521F-F8AF-A5D22295E3D4}"/>
-              </a:ext>
-            </a:extLst>
-          </p:cNvPr>
+          <p:cNvPr id="3" name="Footer Placeholder 2"/>
           <p:cNvSpPr>
             <a:spLocks noGrp="1"/>
           </p:cNvSpPr>
@@ -2103,13 +1850,7 @@
       </p:sp>
       <p:sp>
         <p:nvSpPr>
-          <p:cNvPr id="4" name="Slide Number Placeholder 3">
-            <a:extLst>
-              <a:ext uri="{FF2B5EF4-FFF2-40B4-BE49-F238E27FC236}">
-                <a16:creationId xmlns:a16="http://schemas.microsoft.com/office/drawing/2014/main" id="{42AF7E29-DBEF-11D5-D9A7-48C86CBF2A02}"/>
-              </a:ext>
-            </a:extLst>
-          </p:cNvPr>
+          <p:cNvPr id="4" name="Slide Number Placeholder 3"/>
           <p:cNvSpPr>
             <a:spLocks noGrp="1"/>
           </p:cNvSpPr>
@@ -2133,7 +1874,7 @@
     </p:spTree>
     <p:extLst>
       <p:ext uri="{BB962C8B-B14F-4D97-AF65-F5344CB8AC3E}">
-        <p14:creationId xmlns:p14="http://schemas.microsoft.com/office/powerpoint/2010/main" val="1827494509"/>
+        <p14:creationId xmlns:p14="http://schemas.microsoft.com/office/powerpoint/2010/main" val="1704164720"/>
       </p:ext>
     </p:extLst>
   </p:cSld>
@@ -2162,13 +1903,7 @@
       </p:grpSpPr>
       <p:sp>
         <p:nvSpPr>
-          <p:cNvPr id="2" name="Title 1">
-            <a:extLst>
-              <a:ext uri="{FF2B5EF4-FFF2-40B4-BE49-F238E27FC236}">
-                <a16:creationId xmlns:a16="http://schemas.microsoft.com/office/drawing/2014/main" id="{FF1C512A-DFD8-7B45-0F07-4B63A5ADEDBE}"/>
-              </a:ext>
-            </a:extLst>
-          </p:cNvPr>
+          <p:cNvPr id="2" name="Title 1"/>
           <p:cNvSpPr>
             <a:spLocks noGrp="1"/>
           </p:cNvSpPr>
@@ -2178,34 +1913,29 @@
         </p:nvSpPr>
         <p:spPr>
           <a:xfrm>
-            <a:off x="839788" y="457200"/>
-            <a:ext cx="3932237" cy="1600200"/>
+            <a:off x="839788" y="913236"/>
+            <a:ext cx="3932237" cy="3196326"/>
           </a:xfrm>
         </p:spPr>
         <p:txBody>
           <a:bodyPr anchor="b"/>
           <a:lstStyle>
             <a:lvl1pPr>
-              <a:defRPr sz="3200"/>
+              <a:defRPr sz="4267"/>
             </a:lvl1pPr>
           </a:lstStyle>
           <a:p>
             <a:r>
-              <a:rPr lang="en-US"/>
+              <a:rPr lang="en-GB"/>
               <a:t>Click to edit Master title style</a:t>
             </a:r>
-          </a:p>
-        </p:txBody>
-      </p:sp>
-      <p:sp>
-        <p:nvSpPr>
-          <p:cNvPr id="3" name="Content Placeholder 2">
-            <a:extLst>
-              <a:ext uri="{FF2B5EF4-FFF2-40B4-BE49-F238E27FC236}">
-                <a16:creationId xmlns:a16="http://schemas.microsoft.com/office/drawing/2014/main" id="{71D6FBA1-8E15-65AF-3AD1-8BE5F8F781AF}"/>
-              </a:ext>
-            </a:extLst>
-          </p:cNvPr>
+            <a:endParaRPr lang="en-US" dirty="0"/>
+          </a:p>
+        </p:txBody>
+      </p:sp>
+      <p:sp>
+        <p:nvSpPr>
+          <p:cNvPr id="3" name="Content Placeholder 2"/>
           <p:cNvSpPr>
             <a:spLocks noGrp="1"/>
           </p:cNvSpPr>
@@ -2215,87 +1945,82 @@
         </p:nvSpPr>
         <p:spPr>
           <a:xfrm>
-            <a:off x="5183188" y="987425"/>
-            <a:ext cx="6172200" cy="4873625"/>
+            <a:off x="5183188" y="1972339"/>
+            <a:ext cx="6172200" cy="9734841"/>
           </a:xfrm>
         </p:spPr>
         <p:txBody>
           <a:bodyPr/>
           <a:lstStyle>
             <a:lvl1pPr>
-              <a:defRPr sz="3200"/>
+              <a:defRPr sz="4267"/>
             </a:lvl1pPr>
             <a:lvl2pPr>
-              <a:defRPr sz="2800"/>
+              <a:defRPr sz="3733"/>
             </a:lvl2pPr>
             <a:lvl3pPr>
-              <a:defRPr sz="2400"/>
+              <a:defRPr sz="3200"/>
             </a:lvl3pPr>
             <a:lvl4pPr>
-              <a:defRPr sz="2000"/>
+              <a:defRPr sz="2667"/>
             </a:lvl4pPr>
             <a:lvl5pPr>
-              <a:defRPr sz="2000"/>
+              <a:defRPr sz="2667"/>
             </a:lvl5pPr>
             <a:lvl6pPr>
-              <a:defRPr sz="2000"/>
+              <a:defRPr sz="2667"/>
             </a:lvl6pPr>
             <a:lvl7pPr>
-              <a:defRPr sz="2000"/>
+              <a:defRPr sz="2667"/>
             </a:lvl7pPr>
             <a:lvl8pPr>
-              <a:defRPr sz="2000"/>
+              <a:defRPr sz="2667"/>
             </a:lvl8pPr>
             <a:lvl9pPr>
-              <a:defRPr sz="2000"/>
+              <a:defRPr sz="2667"/>
             </a:lvl9pPr>
           </a:lstStyle>
           <a:p>
             <a:pPr lvl="0"/>
             <a:r>
-              <a:rPr lang="en-US"/>
+              <a:rPr lang="en-GB"/>
               <a:t>Click to edit Master text styles</a:t>
             </a:r>
           </a:p>
           <a:p>
             <a:pPr lvl="1"/>
             <a:r>
-              <a:rPr lang="en-US"/>
+              <a:rPr lang="en-GB"/>
               <a:t>Second level</a:t>
             </a:r>
           </a:p>
           <a:p>
             <a:pPr lvl="2"/>
             <a:r>
-              <a:rPr lang="en-US"/>
+              <a:rPr lang="en-GB"/>
               <a:t>Third level</a:t>
             </a:r>
           </a:p>
           <a:p>
             <a:pPr lvl="3"/>
             <a:r>
-              <a:rPr lang="en-US"/>
+              <a:rPr lang="en-GB"/>
               <a:t>Fourth level</a:t>
             </a:r>
           </a:p>
           <a:p>
             <a:pPr lvl="4"/>
             <a:r>
-              <a:rPr lang="en-US"/>
+              <a:rPr lang="en-GB"/>
               <a:t>Fifth level</a:t>
             </a:r>
-          </a:p>
-        </p:txBody>
-      </p:sp>
-      <p:sp>
-        <p:nvSpPr>
-          <p:cNvPr id="4" name="Text Placeholder 3">
-            <a:extLst>
-              <a:ext uri="{FF2B5EF4-FFF2-40B4-BE49-F238E27FC236}">
-                <a16:creationId xmlns:a16="http://schemas.microsoft.com/office/drawing/2014/main" id="{2586859A-1324-731C-4A89-E42D6ED6AA47}"/>
-              </a:ext>
-            </a:extLst>
-          </p:cNvPr>
+            <a:endParaRPr lang="en-US" dirty="0"/>
+          </a:p>
+        </p:txBody>
+      </p:sp>
+      <p:sp>
+        <p:nvSpPr>
+          <p:cNvPr id="4" name="Text Placeholder 3"/>
           <p:cNvSpPr>
             <a:spLocks noGrp="1"/>
           </p:cNvSpPr>
@@ -2305,8 +2030,8 @@
         </p:nvSpPr>
         <p:spPr>
           <a:xfrm>
-            <a:off x="839788" y="2057400"/>
-            <a:ext cx="3932237" cy="3811588"/>
+            <a:off x="839788" y="4109561"/>
+            <a:ext cx="3932237" cy="7613471"/>
           </a:xfrm>
         </p:spPr>
         <p:txBody>
@@ -2314,45 +2039,45 @@
           <a:lstStyle>
             <a:lvl1pPr marL="0" indent="0">
               <a:buNone/>
+              <a:defRPr sz="2133"/>
+            </a:lvl1pPr>
+            <a:lvl2pPr marL="609585" indent="0">
+              <a:buNone/>
+              <a:defRPr sz="1867"/>
+            </a:lvl2pPr>
+            <a:lvl3pPr marL="1219170" indent="0">
+              <a:buNone/>
               <a:defRPr sz="1600"/>
-            </a:lvl1pPr>
-            <a:lvl2pPr marL="457200" indent="0">
-              <a:buNone/>
-              <a:defRPr sz="1400"/>
-            </a:lvl2pPr>
-            <a:lvl3pPr marL="914400" indent="0">
-              <a:buNone/>
-              <a:defRPr sz="1200"/>
             </a:lvl3pPr>
-            <a:lvl4pPr marL="1371600" indent="0">
-              <a:buNone/>
-              <a:defRPr sz="1000"/>
+            <a:lvl4pPr marL="1828754" indent="0">
+              <a:buNone/>
+              <a:defRPr sz="1333"/>
             </a:lvl4pPr>
-            <a:lvl5pPr marL="1828800" indent="0">
-              <a:buNone/>
-              <a:defRPr sz="1000"/>
+            <a:lvl5pPr marL="2438339" indent="0">
+              <a:buNone/>
+              <a:defRPr sz="1333"/>
             </a:lvl5pPr>
-            <a:lvl6pPr marL="2286000" indent="0">
-              <a:buNone/>
-              <a:defRPr sz="1000"/>
+            <a:lvl6pPr marL="3047924" indent="0">
+              <a:buNone/>
+              <a:defRPr sz="1333"/>
             </a:lvl6pPr>
-            <a:lvl7pPr marL="2743200" indent="0">
-              <a:buNone/>
-              <a:defRPr sz="1000"/>
+            <a:lvl7pPr marL="3657509" indent="0">
+              <a:buNone/>
+              <a:defRPr sz="1333"/>
             </a:lvl7pPr>
-            <a:lvl8pPr marL="3200400" indent="0">
-              <a:buNone/>
-              <a:defRPr sz="1000"/>
+            <a:lvl8pPr marL="4267093" indent="0">
+              <a:buNone/>
+              <a:defRPr sz="1333"/>
             </a:lvl8pPr>
-            <a:lvl9pPr marL="3657600" indent="0">
-              <a:buNone/>
-              <a:defRPr sz="1000"/>
+            <a:lvl9pPr marL="4876678" indent="0">
+              <a:buNone/>
+              <a:defRPr sz="1333"/>
             </a:lvl9pPr>
           </a:lstStyle>
           <a:p>
             <a:pPr lvl="0"/>
             <a:r>
-              <a:rPr lang="en-US"/>
+              <a:rPr lang="en-GB"/>
               <a:t>Click to edit Master text styles</a:t>
             </a:r>
           </a:p>
@@ -2360,13 +2085,7 @@
       </p:sp>
       <p:sp>
         <p:nvSpPr>
-          <p:cNvPr id="5" name="Date Placeholder 4">
-            <a:extLst>
-              <a:ext uri="{FF2B5EF4-FFF2-40B4-BE49-F238E27FC236}">
-                <a16:creationId xmlns:a16="http://schemas.microsoft.com/office/drawing/2014/main" id="{B474631E-0BF8-FA93-1301-FD379890775A}"/>
-              </a:ext>
-            </a:extLst>
-          </p:cNvPr>
+          <p:cNvPr id="5" name="Date Placeholder 4"/>
           <p:cNvSpPr>
             <a:spLocks noGrp="1"/>
           </p:cNvSpPr>
@@ -2381,7 +2100,7 @@
           <a:p>
             <a:fld id="{B09E179D-AE25-442C-9DBD-25AA24DE7ADF}" type="datetimeFigureOut">
               <a:rPr lang="en-US" smtClean="0"/>
-              <a:t>4/24/2026</a:t>
+              <a:t>4/24/26</a:t>
             </a:fld>
             <a:endParaRPr lang="en-US"/>
           </a:p>
@@ -2389,13 +2108,7 @@
       </p:sp>
       <p:sp>
         <p:nvSpPr>
-          <p:cNvPr id="6" name="Footer Placeholder 5">
-            <a:extLst>
-              <a:ext uri="{FF2B5EF4-FFF2-40B4-BE49-F238E27FC236}">
-                <a16:creationId xmlns:a16="http://schemas.microsoft.com/office/drawing/2014/main" id="{E7AB9382-438F-EC61-9D63-D9A9EEE8D9B9}"/>
-              </a:ext>
-            </a:extLst>
-          </p:cNvPr>
+          <p:cNvPr id="6" name="Footer Placeholder 5"/>
           <p:cNvSpPr>
             <a:spLocks noGrp="1"/>
           </p:cNvSpPr>
@@ -2414,13 +2127,7 @@
       </p:sp>
       <p:sp>
         <p:nvSpPr>
-          <p:cNvPr id="7" name="Slide Number Placeholder 6">
-            <a:extLst>
-              <a:ext uri="{FF2B5EF4-FFF2-40B4-BE49-F238E27FC236}">
-                <a16:creationId xmlns:a16="http://schemas.microsoft.com/office/drawing/2014/main" id="{4D254843-7B2E-579A-71AA-3D391618FCCE}"/>
-              </a:ext>
-            </a:extLst>
-          </p:cNvPr>
+          <p:cNvPr id="7" name="Slide Number Placeholder 6"/>
           <p:cNvSpPr>
             <a:spLocks noGrp="1"/>
           </p:cNvSpPr>
@@ -2444,7 +2151,7 @@
     </p:spTree>
     <p:extLst>
       <p:ext uri="{BB962C8B-B14F-4D97-AF65-F5344CB8AC3E}">
-        <p14:creationId xmlns:p14="http://schemas.microsoft.com/office/powerpoint/2010/main" val="936675388"/>
+        <p14:creationId xmlns:p14="http://schemas.microsoft.com/office/powerpoint/2010/main" val="115574304"/>
       </p:ext>
     </p:extLst>
   </p:cSld>
@@ -2473,13 +2180,7 @@
       </p:grpSpPr>
       <p:sp>
         <p:nvSpPr>
-          <p:cNvPr id="2" name="Title 1">
-            <a:extLst>
-              <a:ext uri="{FF2B5EF4-FFF2-40B4-BE49-F238E27FC236}">
-                <a16:creationId xmlns:a16="http://schemas.microsoft.com/office/drawing/2014/main" id="{58361A9F-AF13-C833-F8A5-1E951505EFB8}"/>
-              </a:ext>
-            </a:extLst>
-          </p:cNvPr>
+          <p:cNvPr id="2" name="Title 1"/>
           <p:cNvSpPr>
             <a:spLocks noGrp="1"/>
           </p:cNvSpPr>
@@ -2489,36 +2190,31 @@
         </p:nvSpPr>
         <p:spPr>
           <a:xfrm>
-            <a:off x="839788" y="457200"/>
-            <a:ext cx="3932237" cy="1600200"/>
+            <a:off x="839788" y="913236"/>
+            <a:ext cx="3932237" cy="3196326"/>
           </a:xfrm>
         </p:spPr>
         <p:txBody>
           <a:bodyPr anchor="b"/>
           <a:lstStyle>
             <a:lvl1pPr>
-              <a:defRPr sz="3200"/>
+              <a:defRPr sz="4267"/>
             </a:lvl1pPr>
           </a:lstStyle>
           <a:p>
             <a:r>
-              <a:rPr lang="en-US"/>
+              <a:rPr lang="en-GB"/>
               <a:t>Click to edit Master title style</a:t>
             </a:r>
-          </a:p>
-        </p:txBody>
-      </p:sp>
-      <p:sp>
-        <p:nvSpPr>
-          <p:cNvPr id="3" name="Picture Placeholder 2">
-            <a:extLst>
-              <a:ext uri="{FF2B5EF4-FFF2-40B4-BE49-F238E27FC236}">
-                <a16:creationId xmlns:a16="http://schemas.microsoft.com/office/drawing/2014/main" id="{9BA22F1B-0A78-36B9-7C3B-E5261DF51F5B}"/>
-              </a:ext>
-            </a:extLst>
-          </p:cNvPr>
-          <p:cNvSpPr>
-            <a:spLocks noGrp="1"/>
+            <a:endParaRPr lang="en-US" dirty="0"/>
+          </a:p>
+        </p:txBody>
+      </p:sp>
+      <p:sp>
+        <p:nvSpPr>
+          <p:cNvPr id="3" name="Picture Placeholder 2"/>
+          <p:cNvSpPr>
+            <a:spLocks noGrp="1" noChangeAspect="1"/>
           </p:cNvSpPr>
           <p:nvPr>
             <p:ph type="pic" idx="1"/>
@@ -2526,8 +2222,73 @@
         </p:nvSpPr>
         <p:spPr>
           <a:xfrm>
-            <a:off x="5183188" y="987425"/>
-            <a:ext cx="6172200" cy="4873625"/>
+            <a:off x="5183188" y="1972339"/>
+            <a:ext cx="6172200" cy="9734841"/>
+          </a:xfrm>
+        </p:spPr>
+        <p:txBody>
+          <a:bodyPr anchor="t"/>
+          <a:lstStyle>
+            <a:lvl1pPr marL="0" indent="0">
+              <a:buNone/>
+              <a:defRPr sz="4267"/>
+            </a:lvl1pPr>
+            <a:lvl2pPr marL="609585" indent="0">
+              <a:buNone/>
+              <a:defRPr sz="3733"/>
+            </a:lvl2pPr>
+            <a:lvl3pPr marL="1219170" indent="0">
+              <a:buNone/>
+              <a:defRPr sz="3200"/>
+            </a:lvl3pPr>
+            <a:lvl4pPr marL="1828754" indent="0">
+              <a:buNone/>
+              <a:defRPr sz="2667"/>
+            </a:lvl4pPr>
+            <a:lvl5pPr marL="2438339" indent="0">
+              <a:buNone/>
+              <a:defRPr sz="2667"/>
+            </a:lvl5pPr>
+            <a:lvl6pPr marL="3047924" indent="0">
+              <a:buNone/>
+              <a:defRPr sz="2667"/>
+            </a:lvl6pPr>
+            <a:lvl7pPr marL="3657509" indent="0">
+              <a:buNone/>
+              <a:defRPr sz="2667"/>
+            </a:lvl7pPr>
+            <a:lvl8pPr marL="4267093" indent="0">
+              <a:buNone/>
+              <a:defRPr sz="2667"/>
+            </a:lvl8pPr>
+            <a:lvl9pPr marL="4876678" indent="0">
+              <a:buNone/>
+              <a:defRPr sz="2667"/>
+            </a:lvl9pPr>
+          </a:lstStyle>
+          <a:p>
+            <a:r>
+              <a:rPr lang="en-GB"/>
+              <a:t>Click icon to add picture</a:t>
+            </a:r>
+            <a:endParaRPr lang="en-US" dirty="0"/>
+          </a:p>
+        </p:txBody>
+      </p:sp>
+      <p:sp>
+        <p:nvSpPr>
+          <p:cNvPr id="4" name="Text Placeholder 3"/>
+          <p:cNvSpPr>
+            <a:spLocks noGrp="1"/>
+          </p:cNvSpPr>
+          <p:nvPr>
+            <p:ph type="body" sz="half" idx="2"/>
+          </p:nvPr>
+        </p:nvSpPr>
+        <p:spPr>
+          <a:xfrm>
+            <a:off x="839788" y="4109561"/>
+            <a:ext cx="3932237" cy="7613471"/>
           </a:xfrm>
         </p:spPr>
         <p:txBody>
@@ -2535,112 +2296,45 @@
           <a:lstStyle>
             <a:lvl1pPr marL="0" indent="0">
               <a:buNone/>
-              <a:defRPr sz="3200"/>
+              <a:defRPr sz="2133"/>
             </a:lvl1pPr>
-            <a:lvl2pPr marL="457200" indent="0">
-              <a:buNone/>
-              <a:defRPr sz="2800"/>
+            <a:lvl2pPr marL="609585" indent="0">
+              <a:buNone/>
+              <a:defRPr sz="1867"/>
             </a:lvl2pPr>
-            <a:lvl3pPr marL="914400" indent="0">
-              <a:buNone/>
-              <a:defRPr sz="2400"/>
+            <a:lvl3pPr marL="1219170" indent="0">
+              <a:buNone/>
+              <a:defRPr sz="1600"/>
             </a:lvl3pPr>
-            <a:lvl4pPr marL="1371600" indent="0">
-              <a:buNone/>
-              <a:defRPr sz="2000"/>
+            <a:lvl4pPr marL="1828754" indent="0">
+              <a:buNone/>
+              <a:defRPr sz="1333"/>
             </a:lvl4pPr>
-            <a:lvl5pPr marL="1828800" indent="0">
-              <a:buNone/>
-              <a:defRPr sz="2000"/>
+            <a:lvl5pPr marL="2438339" indent="0">
+              <a:buNone/>
+              <a:defRPr sz="1333"/>
             </a:lvl5pPr>
-            <a:lvl6pPr marL="2286000" indent="0">
-              <a:buNone/>
-              <a:defRPr sz="2000"/>
+            <a:lvl6pPr marL="3047924" indent="0">
+              <a:buNone/>
+              <a:defRPr sz="1333"/>
             </a:lvl6pPr>
-            <a:lvl7pPr marL="2743200" indent="0">
-              <a:buNone/>
-              <a:defRPr sz="2000"/>
+            <a:lvl7pPr marL="3657509" indent="0">
+              <a:buNone/>
+              <a:defRPr sz="1333"/>
             </a:lvl7pPr>
-            <a:lvl8pPr marL="3200400" indent="0">
-              <a:buNone/>
-              <a:defRPr sz="2000"/>
+            <a:lvl8pPr marL="4267093" indent="0">
+              <a:buNone/>
+              <a:defRPr sz="1333"/>
             </a:lvl8pPr>
-            <a:lvl9pPr marL="3657600" indent="0">
-              <a:buNone/>
-              <a:defRPr sz="2000"/>
+            <a:lvl9pPr marL="4876678" indent="0">
+              <a:buNone/>
+              <a:defRPr sz="1333"/>
             </a:lvl9pPr>
           </a:lstStyle>
           <a:p>
-            <a:endParaRPr lang="en-US"/>
-          </a:p>
-        </p:txBody>
-      </p:sp>
-      <p:sp>
-        <p:nvSpPr>
-          <p:cNvPr id="4" name="Text Placeholder 3">
-            <a:extLst>
-              <a:ext uri="{FF2B5EF4-FFF2-40B4-BE49-F238E27FC236}">
-                <a16:creationId xmlns:a16="http://schemas.microsoft.com/office/drawing/2014/main" id="{52058CAB-9230-2F23-D539-B6591F0B364A}"/>
-              </a:ext>
-            </a:extLst>
-          </p:cNvPr>
-          <p:cNvSpPr>
-            <a:spLocks noGrp="1"/>
-          </p:cNvSpPr>
-          <p:nvPr>
-            <p:ph type="body" sz="half" idx="2"/>
-          </p:nvPr>
-        </p:nvSpPr>
-        <p:spPr>
-          <a:xfrm>
-            <a:off x="839788" y="2057400"/>
-            <a:ext cx="3932237" cy="3811588"/>
-          </a:xfrm>
-        </p:spPr>
-        <p:txBody>
-          <a:bodyPr/>
-          <a:lstStyle>
-            <a:lvl1pPr marL="0" indent="0">
-              <a:buNone/>
-              <a:defRPr sz="1600"/>
-            </a:lvl1pPr>
-            <a:lvl2pPr marL="457200" indent="0">
-              <a:buNone/>
-              <a:defRPr sz="1400"/>
-            </a:lvl2pPr>
-            <a:lvl3pPr marL="914400" indent="0">
-              <a:buNone/>
-              <a:defRPr sz="1200"/>
-            </a:lvl3pPr>
-            <a:lvl4pPr marL="1371600" indent="0">
-              <a:buNone/>
-              <a:defRPr sz="1000"/>
-            </a:lvl4pPr>
-            <a:lvl5pPr marL="1828800" indent="0">
-              <a:buNone/>
-              <a:defRPr sz="1000"/>
-            </a:lvl5pPr>
-            <a:lvl6pPr marL="2286000" indent="0">
-              <a:buNone/>
-              <a:defRPr sz="1000"/>
-            </a:lvl6pPr>
-            <a:lvl7pPr marL="2743200" indent="0">
-              <a:buNone/>
-              <a:defRPr sz="1000"/>
-            </a:lvl7pPr>
-            <a:lvl8pPr marL="3200400" indent="0">
-              <a:buNone/>
-              <a:defRPr sz="1000"/>
-            </a:lvl8pPr>
-            <a:lvl9pPr marL="3657600" indent="0">
-              <a:buNone/>
-              <a:defRPr sz="1000"/>
-            </a:lvl9pPr>
-          </a:lstStyle>
-          <a:p>
             <a:pPr lvl="0"/>
             <a:r>
-              <a:rPr lang="en-US"/>
+              <a:rPr lang="en-GB"/>
               <a:t>Click to edit Master text styles</a:t>
             </a:r>
           </a:p>
@@ -2648,13 +2342,7 @@
       </p:sp>
       <p:sp>
         <p:nvSpPr>
-          <p:cNvPr id="5" name="Date Placeholder 4">
-            <a:extLst>
-              <a:ext uri="{FF2B5EF4-FFF2-40B4-BE49-F238E27FC236}">
-                <a16:creationId xmlns:a16="http://schemas.microsoft.com/office/drawing/2014/main" id="{AF054061-BB4B-776E-89C4-38831787F62B}"/>
-              </a:ext>
-            </a:extLst>
-          </p:cNvPr>
+          <p:cNvPr id="5" name="Date Placeholder 4"/>
           <p:cNvSpPr>
             <a:spLocks noGrp="1"/>
           </p:cNvSpPr>
@@ -2669,7 +2357,7 @@
           <a:p>
             <a:fld id="{B09E179D-AE25-442C-9DBD-25AA24DE7ADF}" type="datetimeFigureOut">
               <a:rPr lang="en-US" smtClean="0"/>
-              <a:t>4/24/2026</a:t>
+              <a:t>4/24/26</a:t>
             </a:fld>
             <a:endParaRPr lang="en-US"/>
           </a:p>
@@ -2677,13 +2365,7 @@
       </p:sp>
       <p:sp>
         <p:nvSpPr>
-          <p:cNvPr id="6" name="Footer Placeholder 5">
-            <a:extLst>
-              <a:ext uri="{FF2B5EF4-FFF2-40B4-BE49-F238E27FC236}">
-                <a16:creationId xmlns:a16="http://schemas.microsoft.com/office/drawing/2014/main" id="{C2B8E8B2-8282-E75B-56A2-0977A62B074D}"/>
-              </a:ext>
-            </a:extLst>
-          </p:cNvPr>
+          <p:cNvPr id="6" name="Footer Placeholder 5"/>
           <p:cNvSpPr>
             <a:spLocks noGrp="1"/>
           </p:cNvSpPr>
@@ -2702,13 +2384,7 @@
       </p:sp>
       <p:sp>
         <p:nvSpPr>
-          <p:cNvPr id="7" name="Slide Number Placeholder 6">
-            <a:extLst>
-              <a:ext uri="{FF2B5EF4-FFF2-40B4-BE49-F238E27FC236}">
-                <a16:creationId xmlns:a16="http://schemas.microsoft.com/office/drawing/2014/main" id="{78BF5302-72A3-D708-9FEF-5979E82DEA5C}"/>
-              </a:ext>
-            </a:extLst>
-          </p:cNvPr>
+          <p:cNvPr id="7" name="Slide Number Placeholder 6"/>
           <p:cNvSpPr>
             <a:spLocks noGrp="1"/>
           </p:cNvSpPr>
@@ -2732,7 +2408,7 @@
     </p:spTree>
     <p:extLst>
       <p:ext uri="{BB962C8B-B14F-4D97-AF65-F5344CB8AC3E}">
-        <p14:creationId xmlns:p14="http://schemas.microsoft.com/office/powerpoint/2010/main" val="2664943645"/>
+        <p14:creationId xmlns:p14="http://schemas.microsoft.com/office/powerpoint/2010/main" val="3480011614"/>
       </p:ext>
     </p:extLst>
   </p:cSld>
@@ -2766,13 +2442,7 @@
       </p:grpSpPr>
       <p:sp>
         <p:nvSpPr>
-          <p:cNvPr id="2" name="Title Placeholder 1">
-            <a:extLst>
-              <a:ext uri="{FF2B5EF4-FFF2-40B4-BE49-F238E27FC236}">
-                <a16:creationId xmlns:a16="http://schemas.microsoft.com/office/drawing/2014/main" id="{EC8D937F-00C9-D9A3-9FD0-BF1EB0726460}"/>
-              </a:ext>
-            </a:extLst>
-          </p:cNvPr>
+          <p:cNvPr id="2" name="Title Placeholder 1"/>
           <p:cNvSpPr>
             <a:spLocks noGrp="1"/>
           </p:cNvSpPr>
@@ -2782,8 +2452,8 @@
         </p:nvSpPr>
         <p:spPr>
           <a:xfrm>
-            <a:off x="838200" y="365125"/>
-            <a:ext cx="10515600" cy="1325563"/>
+            <a:off x="838200" y="729323"/>
+            <a:ext cx="10515600" cy="2647751"/>
           </a:xfrm>
           <a:prstGeom prst="rect">
             <a:avLst/>
@@ -2796,21 +2466,16 @@
           <a:lstStyle/>
           <a:p>
             <a:r>
-              <a:rPr lang="en-US"/>
+              <a:rPr lang="en-GB"/>
               <a:t>Click to edit Master title style</a:t>
             </a:r>
-          </a:p>
-        </p:txBody>
-      </p:sp>
-      <p:sp>
-        <p:nvSpPr>
-          <p:cNvPr id="3" name="Text Placeholder 2">
-            <a:extLst>
-              <a:ext uri="{FF2B5EF4-FFF2-40B4-BE49-F238E27FC236}">
-                <a16:creationId xmlns:a16="http://schemas.microsoft.com/office/drawing/2014/main" id="{EBD94D68-77EE-DD8C-3C96-135C63C106D4}"/>
-              </a:ext>
-            </a:extLst>
-          </p:cNvPr>
+            <a:endParaRPr lang="en-US" dirty="0"/>
+          </a:p>
+        </p:txBody>
+      </p:sp>
+      <p:sp>
+        <p:nvSpPr>
+          <p:cNvPr id="3" name="Text Placeholder 2"/>
           <p:cNvSpPr>
             <a:spLocks noGrp="1"/>
           </p:cNvSpPr>
@@ -2820,8 +2485,8 @@
         </p:nvSpPr>
         <p:spPr>
           <a:xfrm>
-            <a:off x="838200" y="1825625"/>
-            <a:ext cx="10515600" cy="4351338"/>
+            <a:off x="838200" y="3646601"/>
+            <a:ext cx="10515600" cy="8691597"/>
           </a:xfrm>
           <a:prstGeom prst="rect">
             <a:avLst/>
@@ -2835,49 +2500,44 @@
           <a:p>
             <a:pPr lvl="0"/>
             <a:r>
-              <a:rPr lang="en-US"/>
+              <a:rPr lang="en-GB"/>
               <a:t>Click to edit Master text styles</a:t>
             </a:r>
           </a:p>
           <a:p>
             <a:pPr lvl="1"/>
             <a:r>
-              <a:rPr lang="en-US"/>
+              <a:rPr lang="en-GB"/>
               <a:t>Second level</a:t>
             </a:r>
           </a:p>
           <a:p>
             <a:pPr lvl="2"/>
             <a:r>
-              <a:rPr lang="en-US"/>
+              <a:rPr lang="en-GB"/>
               <a:t>Third level</a:t>
             </a:r>
           </a:p>
           <a:p>
             <a:pPr lvl="3"/>
             <a:r>
-              <a:rPr lang="en-US"/>
+              <a:rPr lang="en-GB"/>
               <a:t>Fourth level</a:t>
             </a:r>
           </a:p>
           <a:p>
             <a:pPr lvl="4"/>
             <a:r>
-              <a:rPr lang="en-US"/>
+              <a:rPr lang="en-GB"/>
               <a:t>Fifth level</a:t>
             </a:r>
-          </a:p>
-        </p:txBody>
-      </p:sp>
-      <p:sp>
-        <p:nvSpPr>
-          <p:cNvPr id="4" name="Date Placeholder 3">
-            <a:extLst>
-              <a:ext uri="{FF2B5EF4-FFF2-40B4-BE49-F238E27FC236}">
-                <a16:creationId xmlns:a16="http://schemas.microsoft.com/office/drawing/2014/main" id="{05A7EBC0-D4FE-B80F-2CC4-87C273680379}"/>
-              </a:ext>
-            </a:extLst>
-          </p:cNvPr>
+            <a:endParaRPr lang="en-US" dirty="0"/>
+          </a:p>
+        </p:txBody>
+      </p:sp>
+      <p:sp>
+        <p:nvSpPr>
+          <p:cNvPr id="4" name="Date Placeholder 3"/>
           <p:cNvSpPr>
             <a:spLocks noGrp="1"/>
           </p:cNvSpPr>
@@ -2887,8 +2547,8 @@
         </p:nvSpPr>
         <p:spPr>
           <a:xfrm>
-            <a:off x="838200" y="6356350"/>
-            <a:ext cx="2743200" cy="365125"/>
+            <a:off x="838200" y="12696518"/>
+            <a:ext cx="2743200" cy="729320"/>
           </a:xfrm>
           <a:prstGeom prst="rect">
             <a:avLst/>
@@ -2898,7 +2558,7 @@
           <a:bodyPr vert="horz" lIns="91440" tIns="45720" rIns="91440" bIns="45720" rtlCol="0" anchor="ctr"/>
           <a:lstStyle>
             <a:lvl1pPr algn="l">
-              <a:defRPr sz="1200">
+              <a:defRPr sz="1600">
                 <a:solidFill>
                   <a:schemeClr val="tx1">
                     <a:tint val="82000"/>
@@ -2910,7 +2570,7 @@
           <a:p>
             <a:fld id="{B09E179D-AE25-442C-9DBD-25AA24DE7ADF}" type="datetimeFigureOut">
               <a:rPr lang="en-US" smtClean="0"/>
-              <a:t>4/24/2026</a:t>
+              <a:t>4/24/26</a:t>
             </a:fld>
             <a:endParaRPr lang="en-US"/>
           </a:p>
@@ -2918,13 +2578,7 @@
       </p:sp>
       <p:sp>
         <p:nvSpPr>
-          <p:cNvPr id="5" name="Footer Placeholder 4">
-            <a:extLst>
-              <a:ext uri="{FF2B5EF4-FFF2-40B4-BE49-F238E27FC236}">
-                <a16:creationId xmlns:a16="http://schemas.microsoft.com/office/drawing/2014/main" id="{49E1B83E-063B-E5BC-291C-CF707F902919}"/>
-              </a:ext>
-            </a:extLst>
-          </p:cNvPr>
+          <p:cNvPr id="5" name="Footer Placeholder 4"/>
           <p:cNvSpPr>
             <a:spLocks noGrp="1"/>
           </p:cNvSpPr>
@@ -2934,8 +2588,8 @@
         </p:nvSpPr>
         <p:spPr>
           <a:xfrm>
-            <a:off x="4038600" y="6356350"/>
-            <a:ext cx="4114800" cy="365125"/>
+            <a:off x="4038600" y="12696518"/>
+            <a:ext cx="4114800" cy="729320"/>
           </a:xfrm>
           <a:prstGeom prst="rect">
             <a:avLst/>
@@ -2945,7 +2599,7 @@
           <a:bodyPr vert="horz" lIns="91440" tIns="45720" rIns="91440" bIns="45720" rtlCol="0" anchor="ctr"/>
           <a:lstStyle>
             <a:lvl1pPr algn="ctr">
-              <a:defRPr sz="1200">
+              <a:defRPr sz="1600">
                 <a:solidFill>
                   <a:schemeClr val="tx1">
                     <a:tint val="82000"/>
@@ -2961,13 +2615,7 @@
       </p:sp>
       <p:sp>
         <p:nvSpPr>
-          <p:cNvPr id="6" name="Slide Number Placeholder 5">
-            <a:extLst>
-              <a:ext uri="{FF2B5EF4-FFF2-40B4-BE49-F238E27FC236}">
-                <a16:creationId xmlns:a16="http://schemas.microsoft.com/office/drawing/2014/main" id="{9BFD369D-7369-ED19-D1BE-3B03CFBDC0CB}"/>
-              </a:ext>
-            </a:extLst>
-          </p:cNvPr>
+          <p:cNvPr id="6" name="Slide Number Placeholder 5"/>
           <p:cNvSpPr>
             <a:spLocks noGrp="1"/>
           </p:cNvSpPr>
@@ -2977,8 +2625,8 @@
         </p:nvSpPr>
         <p:spPr>
           <a:xfrm>
-            <a:off x="8610600" y="6356350"/>
-            <a:ext cx="2743200" cy="365125"/>
+            <a:off x="8610600" y="12696518"/>
+            <a:ext cx="2743200" cy="729320"/>
           </a:xfrm>
           <a:prstGeom prst="rect">
             <a:avLst/>
@@ -2988,7 +2636,7 @@
           <a:bodyPr vert="horz" lIns="91440" tIns="45720" rIns="91440" bIns="45720" rtlCol="0" anchor="ctr"/>
           <a:lstStyle>
             <a:lvl1pPr algn="r">
-              <a:defRPr sz="1200">
+              <a:defRPr sz="1600">
                 <a:solidFill>
                   <a:schemeClr val="tx1">
                     <a:tint val="82000"/>
@@ -3009,27 +2657,27 @@
     </p:spTree>
     <p:extLst>
       <p:ext uri="{BB962C8B-B14F-4D97-AF65-F5344CB8AC3E}">
-        <p14:creationId xmlns:p14="http://schemas.microsoft.com/office/powerpoint/2010/main" val="3384930853"/>
+        <p14:creationId xmlns:p14="http://schemas.microsoft.com/office/powerpoint/2010/main" val="2947189646"/>
       </p:ext>
     </p:extLst>
   </p:cSld>
   <p:clrMap bg1="lt1" tx1="dk1" bg2="lt2" tx2="dk2" accent1="accent1" accent2="accent2" accent3="accent3" accent4="accent4" accent5="accent5" accent6="accent6" hlink="hlink" folHlink="folHlink"/>
   <p:sldLayoutIdLst>
-    <p:sldLayoutId id="2147483649" r:id="rId1"/>
-    <p:sldLayoutId id="2147483650" r:id="rId2"/>
-    <p:sldLayoutId id="2147483651" r:id="rId3"/>
-    <p:sldLayoutId id="2147483652" r:id="rId4"/>
-    <p:sldLayoutId id="2147483653" r:id="rId5"/>
-    <p:sldLayoutId id="2147483654" r:id="rId6"/>
-    <p:sldLayoutId id="2147483655" r:id="rId7"/>
-    <p:sldLayoutId id="2147483656" r:id="rId8"/>
-    <p:sldLayoutId id="2147483657" r:id="rId9"/>
-    <p:sldLayoutId id="2147483658" r:id="rId10"/>
-    <p:sldLayoutId id="2147483659" r:id="rId11"/>
+    <p:sldLayoutId id="2147483661" r:id="rId1"/>
+    <p:sldLayoutId id="2147483662" r:id="rId2"/>
+    <p:sldLayoutId id="2147483663" r:id="rId3"/>
+    <p:sldLayoutId id="2147483664" r:id="rId4"/>
+    <p:sldLayoutId id="2147483665" r:id="rId5"/>
+    <p:sldLayoutId id="2147483666" r:id="rId6"/>
+    <p:sldLayoutId id="2147483667" r:id="rId7"/>
+    <p:sldLayoutId id="2147483668" r:id="rId8"/>
+    <p:sldLayoutId id="2147483669" r:id="rId9"/>
+    <p:sldLayoutId id="2147483670" r:id="rId10"/>
+    <p:sldLayoutId id="2147483671" r:id="rId11"/>
   </p:sldLayoutIdLst>
   <p:txStyles>
     <p:titleStyle>
-      <a:lvl1pPr algn="l" defTabSz="914400" rtl="0" eaLnBrk="1" latinLnBrk="0" hangingPunct="1">
+      <a:lvl1pPr algn="l" defTabSz="1219170" rtl="0" eaLnBrk="1" latinLnBrk="0" hangingPunct="1">
         <a:lnSpc>
           <a:spcPct val="90000"/>
         </a:lnSpc>
@@ -3037,7 +2685,7 @@
           <a:spcPct val="0"/>
         </a:spcBef>
         <a:buNone/>
-        <a:defRPr sz="4400" kern="1200">
+        <a:defRPr sz="5867" kern="1200">
           <a:solidFill>
             <a:schemeClr val="tx1"/>
           </a:solidFill>
@@ -3048,16 +2696,16 @@
       </a:lvl1pPr>
     </p:titleStyle>
     <p:bodyStyle>
-      <a:lvl1pPr marL="228600" indent="-228600" algn="l" defTabSz="914400" rtl="0" eaLnBrk="1" latinLnBrk="0" hangingPunct="1">
+      <a:lvl1pPr marL="304792" indent="-304792" algn="l" defTabSz="1219170" rtl="0" eaLnBrk="1" latinLnBrk="0" hangingPunct="1">
         <a:lnSpc>
           <a:spcPct val="90000"/>
         </a:lnSpc>
         <a:spcBef>
-          <a:spcPts val="1000"/>
+          <a:spcPts val="1333"/>
         </a:spcBef>
         <a:buFont typeface="Arial" panose="020B0604020202020204" pitchFamily="34" charset="0"/>
         <a:buChar char="•"/>
-        <a:defRPr sz="2800" kern="1200">
+        <a:defRPr sz="3733" kern="1200">
           <a:solidFill>
             <a:schemeClr val="tx1"/>
           </a:solidFill>
@@ -3066,12 +2714,48 @@
           <a:cs typeface="+mn-cs"/>
         </a:defRPr>
       </a:lvl1pPr>
-      <a:lvl2pPr marL="685800" indent="-228600" algn="l" defTabSz="914400" rtl="0" eaLnBrk="1" latinLnBrk="0" hangingPunct="1">
+      <a:lvl2pPr marL="914377" indent="-304792" algn="l" defTabSz="1219170" rtl="0" eaLnBrk="1" latinLnBrk="0" hangingPunct="1">
         <a:lnSpc>
           <a:spcPct val="90000"/>
         </a:lnSpc>
         <a:spcBef>
-          <a:spcPts val="500"/>
+          <a:spcPts val="667"/>
+        </a:spcBef>
+        <a:buFont typeface="Arial" panose="020B0604020202020204" pitchFamily="34" charset="0"/>
+        <a:buChar char="•"/>
+        <a:defRPr sz="3200" kern="1200">
+          <a:solidFill>
+            <a:schemeClr val="tx1"/>
+          </a:solidFill>
+          <a:latin typeface="+mn-lt"/>
+          <a:ea typeface="+mn-ea"/>
+          <a:cs typeface="+mn-cs"/>
+        </a:defRPr>
+      </a:lvl2pPr>
+      <a:lvl3pPr marL="1523962" indent="-304792" algn="l" defTabSz="1219170" rtl="0" eaLnBrk="1" latinLnBrk="0" hangingPunct="1">
+        <a:lnSpc>
+          <a:spcPct val="90000"/>
+        </a:lnSpc>
+        <a:spcBef>
+          <a:spcPts val="667"/>
+        </a:spcBef>
+        <a:buFont typeface="Arial" panose="020B0604020202020204" pitchFamily="34" charset="0"/>
+        <a:buChar char="•"/>
+        <a:defRPr sz="2667" kern="1200">
+          <a:solidFill>
+            <a:schemeClr val="tx1"/>
+          </a:solidFill>
+          <a:latin typeface="+mn-lt"/>
+          <a:ea typeface="+mn-ea"/>
+          <a:cs typeface="+mn-cs"/>
+        </a:defRPr>
+      </a:lvl3pPr>
+      <a:lvl4pPr marL="2133547" indent="-304792" algn="l" defTabSz="1219170" rtl="0" eaLnBrk="1" latinLnBrk="0" hangingPunct="1">
+        <a:lnSpc>
+          <a:spcPct val="90000"/>
+        </a:lnSpc>
+        <a:spcBef>
+          <a:spcPts val="667"/>
         </a:spcBef>
         <a:buFont typeface="Arial" panose="020B0604020202020204" pitchFamily="34" charset="0"/>
         <a:buChar char="•"/>
@@ -3083,53 +2767,17 @@
           <a:ea typeface="+mn-ea"/>
           <a:cs typeface="+mn-cs"/>
         </a:defRPr>
-      </a:lvl2pPr>
-      <a:lvl3pPr marL="1143000" indent="-228600" algn="l" defTabSz="914400" rtl="0" eaLnBrk="1" latinLnBrk="0" hangingPunct="1">
+      </a:lvl4pPr>
+      <a:lvl5pPr marL="2743131" indent="-304792" algn="l" defTabSz="1219170" rtl="0" eaLnBrk="1" latinLnBrk="0" hangingPunct="1">
         <a:lnSpc>
           <a:spcPct val="90000"/>
         </a:lnSpc>
         <a:spcBef>
-          <a:spcPts val="500"/>
+          <a:spcPts val="667"/>
         </a:spcBef>
         <a:buFont typeface="Arial" panose="020B0604020202020204" pitchFamily="34" charset="0"/>
         <a:buChar char="•"/>
-        <a:defRPr sz="2000" kern="1200">
-          <a:solidFill>
-            <a:schemeClr val="tx1"/>
-          </a:solidFill>
-          <a:latin typeface="+mn-lt"/>
-          <a:ea typeface="+mn-ea"/>
-          <a:cs typeface="+mn-cs"/>
-        </a:defRPr>
-      </a:lvl3pPr>
-      <a:lvl4pPr marL="1600200" indent="-228600" algn="l" defTabSz="914400" rtl="0" eaLnBrk="1" latinLnBrk="0" hangingPunct="1">
-        <a:lnSpc>
-          <a:spcPct val="90000"/>
-        </a:lnSpc>
-        <a:spcBef>
-          <a:spcPts val="500"/>
-        </a:spcBef>
-        <a:buFont typeface="Arial" panose="020B0604020202020204" pitchFamily="34" charset="0"/>
-        <a:buChar char="•"/>
-        <a:defRPr sz="1800" kern="1200">
-          <a:solidFill>
-            <a:schemeClr val="tx1"/>
-          </a:solidFill>
-          <a:latin typeface="+mn-lt"/>
-          <a:ea typeface="+mn-ea"/>
-          <a:cs typeface="+mn-cs"/>
-        </a:defRPr>
-      </a:lvl4pPr>
-      <a:lvl5pPr marL="2057400" indent="-228600" algn="l" defTabSz="914400" rtl="0" eaLnBrk="1" latinLnBrk="0" hangingPunct="1">
-        <a:lnSpc>
-          <a:spcPct val="90000"/>
-        </a:lnSpc>
-        <a:spcBef>
-          <a:spcPts val="500"/>
-        </a:spcBef>
-        <a:buFont typeface="Arial" panose="020B0604020202020204" pitchFamily="34" charset="0"/>
-        <a:buChar char="•"/>
-        <a:defRPr sz="1800" kern="1200">
+        <a:defRPr sz="2400" kern="1200">
           <a:solidFill>
             <a:schemeClr val="tx1"/>
           </a:solidFill>
@@ -3138,16 +2786,16 @@
           <a:cs typeface="+mn-cs"/>
         </a:defRPr>
       </a:lvl5pPr>
-      <a:lvl6pPr marL="2514600" indent="-228600" algn="l" defTabSz="914400" rtl="0" eaLnBrk="1" latinLnBrk="0" hangingPunct="1">
+      <a:lvl6pPr marL="3352716" indent="-304792" algn="l" defTabSz="1219170" rtl="0" eaLnBrk="1" latinLnBrk="0" hangingPunct="1">
         <a:lnSpc>
           <a:spcPct val="90000"/>
         </a:lnSpc>
         <a:spcBef>
-          <a:spcPts val="500"/>
+          <a:spcPts val="667"/>
         </a:spcBef>
         <a:buFont typeface="Arial" panose="020B0604020202020204" pitchFamily="34" charset="0"/>
         <a:buChar char="•"/>
-        <a:defRPr sz="1800" kern="1200">
+        <a:defRPr sz="2400" kern="1200">
           <a:solidFill>
             <a:schemeClr val="tx1"/>
           </a:solidFill>
@@ -3156,16 +2804,16 @@
           <a:cs typeface="+mn-cs"/>
         </a:defRPr>
       </a:lvl6pPr>
-      <a:lvl7pPr marL="2971800" indent="-228600" algn="l" defTabSz="914400" rtl="0" eaLnBrk="1" latinLnBrk="0" hangingPunct="1">
+      <a:lvl7pPr marL="3962301" indent="-304792" algn="l" defTabSz="1219170" rtl="0" eaLnBrk="1" latinLnBrk="0" hangingPunct="1">
         <a:lnSpc>
           <a:spcPct val="90000"/>
         </a:lnSpc>
         <a:spcBef>
-          <a:spcPts val="500"/>
+          <a:spcPts val="667"/>
         </a:spcBef>
         <a:buFont typeface="Arial" panose="020B0604020202020204" pitchFamily="34" charset="0"/>
         <a:buChar char="•"/>
-        <a:defRPr sz="1800" kern="1200">
+        <a:defRPr sz="2400" kern="1200">
           <a:solidFill>
             <a:schemeClr val="tx1"/>
           </a:solidFill>
@@ -3174,16 +2822,16 @@
           <a:cs typeface="+mn-cs"/>
         </a:defRPr>
       </a:lvl7pPr>
-      <a:lvl8pPr marL="3429000" indent="-228600" algn="l" defTabSz="914400" rtl="0" eaLnBrk="1" latinLnBrk="0" hangingPunct="1">
+      <a:lvl8pPr marL="4571886" indent="-304792" algn="l" defTabSz="1219170" rtl="0" eaLnBrk="1" latinLnBrk="0" hangingPunct="1">
         <a:lnSpc>
           <a:spcPct val="90000"/>
         </a:lnSpc>
         <a:spcBef>
-          <a:spcPts val="500"/>
+          <a:spcPts val="667"/>
         </a:spcBef>
         <a:buFont typeface="Arial" panose="020B0604020202020204" pitchFamily="34" charset="0"/>
         <a:buChar char="•"/>
-        <a:defRPr sz="1800" kern="1200">
+        <a:defRPr sz="2400" kern="1200">
           <a:solidFill>
             <a:schemeClr val="tx1"/>
           </a:solidFill>
@@ -3192,16 +2840,16 @@
           <a:cs typeface="+mn-cs"/>
         </a:defRPr>
       </a:lvl8pPr>
-      <a:lvl9pPr marL="3886200" indent="-228600" algn="l" defTabSz="914400" rtl="0" eaLnBrk="1" latinLnBrk="0" hangingPunct="1">
+      <a:lvl9pPr marL="5181470" indent="-304792" algn="l" defTabSz="1219170" rtl="0" eaLnBrk="1" latinLnBrk="0" hangingPunct="1">
         <a:lnSpc>
           <a:spcPct val="90000"/>
         </a:lnSpc>
         <a:spcBef>
-          <a:spcPts val="500"/>
+          <a:spcPts val="667"/>
         </a:spcBef>
         <a:buFont typeface="Arial" panose="020B0604020202020204" pitchFamily="34" charset="0"/>
         <a:buChar char="•"/>
-        <a:defRPr sz="1800" kern="1200">
+        <a:defRPr sz="2400" kern="1200">
           <a:solidFill>
             <a:schemeClr val="tx1"/>
           </a:solidFill>
@@ -3215,8 +2863,8 @@
       <a:defPPr>
         <a:defRPr lang="en-US"/>
       </a:defPPr>
-      <a:lvl1pPr marL="0" algn="l" defTabSz="914400" rtl="0" eaLnBrk="1" latinLnBrk="0" hangingPunct="1">
-        <a:defRPr sz="1800" kern="1200">
+      <a:lvl1pPr marL="0" algn="l" defTabSz="1219170" rtl="0" eaLnBrk="1" latinLnBrk="0" hangingPunct="1">
+        <a:defRPr sz="2400" kern="1200">
           <a:solidFill>
             <a:schemeClr val="tx1"/>
           </a:solidFill>
@@ -3225,8 +2873,8 @@
           <a:cs typeface="+mn-cs"/>
         </a:defRPr>
       </a:lvl1pPr>
-      <a:lvl2pPr marL="457200" algn="l" defTabSz="914400" rtl="0" eaLnBrk="1" latinLnBrk="0" hangingPunct="1">
-        <a:defRPr sz="1800" kern="1200">
+      <a:lvl2pPr marL="609585" algn="l" defTabSz="1219170" rtl="0" eaLnBrk="1" latinLnBrk="0" hangingPunct="1">
+        <a:defRPr sz="2400" kern="1200">
           <a:solidFill>
             <a:schemeClr val="tx1"/>
           </a:solidFill>
@@ -3235,8 +2883,8 @@
           <a:cs typeface="+mn-cs"/>
         </a:defRPr>
       </a:lvl2pPr>
-      <a:lvl3pPr marL="914400" algn="l" defTabSz="914400" rtl="0" eaLnBrk="1" latinLnBrk="0" hangingPunct="1">
-        <a:defRPr sz="1800" kern="1200">
+      <a:lvl3pPr marL="1219170" algn="l" defTabSz="1219170" rtl="0" eaLnBrk="1" latinLnBrk="0" hangingPunct="1">
+        <a:defRPr sz="2400" kern="1200">
           <a:solidFill>
             <a:schemeClr val="tx1"/>
           </a:solidFill>
@@ -3245,8 +2893,8 @@
           <a:cs typeface="+mn-cs"/>
         </a:defRPr>
       </a:lvl3pPr>
-      <a:lvl4pPr marL="1371600" algn="l" defTabSz="914400" rtl="0" eaLnBrk="1" latinLnBrk="0" hangingPunct="1">
-        <a:defRPr sz="1800" kern="1200">
+      <a:lvl4pPr marL="1828754" algn="l" defTabSz="1219170" rtl="0" eaLnBrk="1" latinLnBrk="0" hangingPunct="1">
+        <a:defRPr sz="2400" kern="1200">
           <a:solidFill>
             <a:schemeClr val="tx1"/>
           </a:solidFill>
@@ -3255,8 +2903,8 @@
           <a:cs typeface="+mn-cs"/>
         </a:defRPr>
       </a:lvl4pPr>
-      <a:lvl5pPr marL="1828800" algn="l" defTabSz="914400" rtl="0" eaLnBrk="1" latinLnBrk="0" hangingPunct="1">
-        <a:defRPr sz="1800" kern="1200">
+      <a:lvl5pPr marL="2438339" algn="l" defTabSz="1219170" rtl="0" eaLnBrk="1" latinLnBrk="0" hangingPunct="1">
+        <a:defRPr sz="2400" kern="1200">
           <a:solidFill>
             <a:schemeClr val="tx1"/>
           </a:solidFill>
@@ -3265,8 +2913,8 @@
           <a:cs typeface="+mn-cs"/>
         </a:defRPr>
       </a:lvl5pPr>
-      <a:lvl6pPr marL="2286000" algn="l" defTabSz="914400" rtl="0" eaLnBrk="1" latinLnBrk="0" hangingPunct="1">
-        <a:defRPr sz="1800" kern="1200">
+      <a:lvl6pPr marL="3047924" algn="l" defTabSz="1219170" rtl="0" eaLnBrk="1" latinLnBrk="0" hangingPunct="1">
+        <a:defRPr sz="2400" kern="1200">
           <a:solidFill>
             <a:schemeClr val="tx1"/>
           </a:solidFill>
@@ -3275,8 +2923,8 @@
           <a:cs typeface="+mn-cs"/>
         </a:defRPr>
       </a:lvl6pPr>
-      <a:lvl7pPr marL="2743200" algn="l" defTabSz="914400" rtl="0" eaLnBrk="1" latinLnBrk="0" hangingPunct="1">
-        <a:defRPr sz="1800" kern="1200">
+      <a:lvl7pPr marL="3657509" algn="l" defTabSz="1219170" rtl="0" eaLnBrk="1" latinLnBrk="0" hangingPunct="1">
+        <a:defRPr sz="2400" kern="1200">
           <a:solidFill>
             <a:schemeClr val="tx1"/>
           </a:solidFill>
@@ -3285,8 +2933,8 @@
           <a:cs typeface="+mn-cs"/>
         </a:defRPr>
       </a:lvl7pPr>
-      <a:lvl8pPr marL="3200400" algn="l" defTabSz="914400" rtl="0" eaLnBrk="1" latinLnBrk="0" hangingPunct="1">
-        <a:defRPr sz="1800" kern="1200">
+      <a:lvl8pPr marL="4267093" algn="l" defTabSz="1219170" rtl="0" eaLnBrk="1" latinLnBrk="0" hangingPunct="1">
+        <a:defRPr sz="2400" kern="1200">
           <a:solidFill>
             <a:schemeClr val="tx1"/>
           </a:solidFill>
@@ -3295,8 +2943,8 @@
           <a:cs typeface="+mn-cs"/>
         </a:defRPr>
       </a:lvl8pPr>
-      <a:lvl9pPr marL="3657600" algn="l" defTabSz="914400" rtl="0" eaLnBrk="1" latinLnBrk="0" hangingPunct="1">
-        <a:defRPr sz="1800" kern="1200">
+      <a:lvl9pPr marL="4876678" algn="l" defTabSz="1219170" rtl="0" eaLnBrk="1" latinLnBrk="0" hangingPunct="1">
+        <a:defRPr sz="2400" kern="1200">
           <a:solidFill>
             <a:schemeClr val="tx1"/>
           </a:solidFill>
@@ -3341,7 +2989,7 @@
         </p:nvSpPr>
         <p:spPr>
           <a:xfrm>
-            <a:off x="1059180" y="1371600"/>
+            <a:off x="1059180" y="4791869"/>
             <a:ext cx="2537460" cy="369332"/>
           </a:xfrm>
           <a:prstGeom prst="rect">
@@ -3392,307 +3040,12 @@
           <a:chExt cx="0" cy="0"/>
         </a:xfrm>
       </p:grpSpPr>
-      <p:pic>
-        <p:nvPicPr>
-          <p:cNvPr id="3" name="Picture 2">
+      <p:grpSp>
+        <p:nvGrpSpPr>
+          <p:cNvPr id="2" name="Group 1">
             <a:extLst>
               <a:ext uri="{FF2B5EF4-FFF2-40B4-BE49-F238E27FC236}">
-                <a16:creationId xmlns:a16="http://schemas.microsoft.com/office/drawing/2014/main" id="{13D441B9-5605-D99C-6BFC-F5F5EC2CE69E}"/>
-              </a:ext>
-            </a:extLst>
-          </p:cNvPr>
-          <p:cNvPicPr>
-            <a:picLocks noChangeAspect="1"/>
-          </p:cNvPicPr>
-          <p:nvPr/>
-        </p:nvPicPr>
-        <p:blipFill>
-          <a:blip r:embed="rId2"/>
-          <a:stretch>
-            <a:fillRect/>
-          </a:stretch>
-        </p:blipFill>
-        <p:spPr>
-          <a:xfrm>
-            <a:off x="2154965" y="2188978"/>
-            <a:ext cx="2927297" cy="2558563"/>
-          </a:xfrm>
-          <a:prstGeom prst="rect">
-            <a:avLst/>
-          </a:prstGeom>
-        </p:spPr>
-      </p:pic>
-      <p:pic>
-        <p:nvPicPr>
-          <p:cNvPr id="9" name="Picture 8">
-            <a:extLst>
-              <a:ext uri="{FF2B5EF4-FFF2-40B4-BE49-F238E27FC236}">
-                <a16:creationId xmlns:a16="http://schemas.microsoft.com/office/drawing/2014/main" id="{511F15A5-9417-A55F-F67C-ACF5BA71203F}"/>
-              </a:ext>
-            </a:extLst>
-          </p:cNvPr>
-          <p:cNvPicPr>
-            <a:picLocks noChangeAspect="1"/>
-          </p:cNvPicPr>
-          <p:nvPr/>
-        </p:nvPicPr>
-        <p:blipFill>
-          <a:blip r:embed="rId3"/>
-          <a:stretch>
-            <a:fillRect/>
-          </a:stretch>
-        </p:blipFill>
-        <p:spPr>
-          <a:xfrm>
-            <a:off x="5204113" y="2188978"/>
-            <a:ext cx="2927297" cy="2558563"/>
-          </a:xfrm>
-          <a:prstGeom prst="rect">
-            <a:avLst/>
-          </a:prstGeom>
-        </p:spPr>
-      </p:pic>
-      <p:pic>
-        <p:nvPicPr>
-          <p:cNvPr id="11" name="Picture 10">
-            <a:extLst>
-              <a:ext uri="{FF2B5EF4-FFF2-40B4-BE49-F238E27FC236}">
-                <a16:creationId xmlns:a16="http://schemas.microsoft.com/office/drawing/2014/main" id="{A5A0A549-FB4E-C2CE-D514-C5D27B2AC993}"/>
-              </a:ext>
-            </a:extLst>
-          </p:cNvPr>
-          <p:cNvPicPr>
-            <a:picLocks noChangeAspect="1"/>
-          </p:cNvPicPr>
-          <p:nvPr/>
-        </p:nvPicPr>
-        <p:blipFill>
-          <a:blip r:embed="rId4"/>
-          <a:stretch>
-            <a:fillRect/>
-          </a:stretch>
-        </p:blipFill>
-        <p:spPr>
-          <a:xfrm rot="10800000" flipH="1">
-            <a:off x="2156470" y="4828013"/>
-            <a:ext cx="2925792" cy="1310425"/>
-          </a:xfrm>
-          <a:prstGeom prst="rect">
-            <a:avLst/>
-          </a:prstGeom>
-        </p:spPr>
-      </p:pic>
-      <p:pic>
-        <p:nvPicPr>
-          <p:cNvPr id="13" name="Picture 12">
-            <a:extLst>
-              <a:ext uri="{FF2B5EF4-FFF2-40B4-BE49-F238E27FC236}">
-                <a16:creationId xmlns:a16="http://schemas.microsoft.com/office/drawing/2014/main" id="{17ECA0BC-EAF4-1F03-7E50-179A2F9085EB}"/>
-              </a:ext>
-            </a:extLst>
-          </p:cNvPr>
-          <p:cNvPicPr>
-            <a:picLocks noChangeAspect="1"/>
-          </p:cNvPicPr>
-          <p:nvPr/>
-        </p:nvPicPr>
-        <p:blipFill>
-          <a:blip r:embed="rId5"/>
-          <a:stretch>
-            <a:fillRect/>
-          </a:stretch>
-        </p:blipFill>
-        <p:spPr>
-          <a:xfrm rot="10800000" flipH="1">
-            <a:off x="5205618" y="4828013"/>
-            <a:ext cx="2925792" cy="1280170"/>
-          </a:xfrm>
-          <a:prstGeom prst="rect">
-            <a:avLst/>
-          </a:prstGeom>
-        </p:spPr>
-      </p:pic>
-      <p:sp>
-        <p:nvSpPr>
-          <p:cNvPr id="14" name="TextBox 13">
-            <a:extLst>
-              <a:ext uri="{FF2B5EF4-FFF2-40B4-BE49-F238E27FC236}">
-                <a16:creationId xmlns:a16="http://schemas.microsoft.com/office/drawing/2014/main" id="{385341A5-63A7-50CB-3FB0-A5C349E80879}"/>
-              </a:ext>
-            </a:extLst>
-          </p:cNvPr>
-          <p:cNvSpPr txBox="1"/>
-          <p:nvPr/>
-        </p:nvSpPr>
-        <p:spPr>
-          <a:xfrm>
-            <a:off x="2086550" y="1819646"/>
-            <a:ext cx="1130438" cy="369332"/>
-          </a:xfrm>
-          <a:prstGeom prst="rect">
-            <a:avLst/>
-          </a:prstGeom>
-          <a:noFill/>
-        </p:spPr>
-        <p:txBody>
-          <a:bodyPr wrap="none" rtlCol="0">
-            <a:spAutoFit/>
-          </a:bodyPr>
-          <a:lstStyle/>
-          <a:p>
-            <a:r>
-              <a:rPr lang="en-US" dirty="0"/>
-              <a:t>Widefield</a:t>
-            </a:r>
-          </a:p>
-        </p:txBody>
-      </p:sp>
-      <p:sp>
-        <p:nvSpPr>
-          <p:cNvPr id="15" name="TextBox 14">
-            <a:extLst>
-              <a:ext uri="{FF2B5EF4-FFF2-40B4-BE49-F238E27FC236}">
-                <a16:creationId xmlns:a16="http://schemas.microsoft.com/office/drawing/2014/main" id="{82C39089-3FEE-A937-F373-5C4562EB4FDC}"/>
-              </a:ext>
-            </a:extLst>
-          </p:cNvPr>
-          <p:cNvSpPr txBox="1"/>
-          <p:nvPr/>
-        </p:nvSpPr>
-        <p:spPr>
-          <a:xfrm>
-            <a:off x="5150677" y="1814511"/>
-            <a:ext cx="2603983" cy="369332"/>
-          </a:xfrm>
-          <a:prstGeom prst="rect">
-            <a:avLst/>
-          </a:prstGeom>
-          <a:noFill/>
-        </p:spPr>
-        <p:txBody>
-          <a:bodyPr wrap="none" rtlCol="0">
-            <a:spAutoFit/>
-          </a:bodyPr>
-          <a:lstStyle/>
-          <a:p>
-            <a:r>
-              <a:rPr lang="en-US" dirty="0"/>
-              <a:t>Laser scanning confocal</a:t>
-            </a:r>
-          </a:p>
-        </p:txBody>
-      </p:sp>
-      <p:sp>
-        <p:nvSpPr>
-          <p:cNvPr id="16" name="TextBox 15">
-            <a:extLst>
-              <a:ext uri="{FF2B5EF4-FFF2-40B4-BE49-F238E27FC236}">
-                <a16:creationId xmlns:a16="http://schemas.microsoft.com/office/drawing/2014/main" id="{A7E0C8E2-9BFA-FD16-32FE-BB5B6FCD0058}"/>
-              </a:ext>
-            </a:extLst>
-          </p:cNvPr>
-          <p:cNvSpPr txBox="1"/>
-          <p:nvPr/>
-        </p:nvSpPr>
-        <p:spPr>
-          <a:xfrm>
-            <a:off x="1878264" y="4458681"/>
-            <a:ext cx="309700" cy="369332"/>
-          </a:xfrm>
-          <a:prstGeom prst="rect">
-            <a:avLst/>
-          </a:prstGeom>
-          <a:noFill/>
-        </p:spPr>
-        <p:txBody>
-          <a:bodyPr wrap="none" rtlCol="0">
-            <a:spAutoFit/>
-          </a:bodyPr>
-          <a:lstStyle/>
-          <a:p>
-            <a:r>
-              <a:rPr lang="en-US" dirty="0"/>
-              <a:t>Y</a:t>
-            </a:r>
-          </a:p>
-        </p:txBody>
-      </p:sp>
-      <p:sp>
-        <p:nvSpPr>
-          <p:cNvPr id="17" name="TextBox 16">
-            <a:extLst>
-              <a:ext uri="{FF2B5EF4-FFF2-40B4-BE49-F238E27FC236}">
-                <a16:creationId xmlns:a16="http://schemas.microsoft.com/office/drawing/2014/main" id="{2580C4F2-01B7-A154-FCD2-6A5E7976F9EE}"/>
-              </a:ext>
-            </a:extLst>
-          </p:cNvPr>
-          <p:cNvSpPr txBox="1"/>
-          <p:nvPr/>
-        </p:nvSpPr>
-        <p:spPr>
-          <a:xfrm>
-            <a:off x="1878264" y="5849579"/>
-            <a:ext cx="309700" cy="369332"/>
-          </a:xfrm>
-          <a:prstGeom prst="rect">
-            <a:avLst/>
-          </a:prstGeom>
-          <a:noFill/>
-        </p:spPr>
-        <p:txBody>
-          <a:bodyPr wrap="none" rtlCol="0">
-            <a:spAutoFit/>
-          </a:bodyPr>
-          <a:lstStyle/>
-          <a:p>
-            <a:r>
-              <a:rPr lang="en-US" dirty="0"/>
-              <a:t>Z</a:t>
-            </a:r>
-          </a:p>
-        </p:txBody>
-      </p:sp>
-      <p:sp>
-        <p:nvSpPr>
-          <p:cNvPr id="18" name="TextBox 17">
-            <a:extLst>
-              <a:ext uri="{FF2B5EF4-FFF2-40B4-BE49-F238E27FC236}">
-                <a16:creationId xmlns:a16="http://schemas.microsoft.com/office/drawing/2014/main" id="{687D38E6-635D-7893-D767-C7446127BBE3}"/>
-              </a:ext>
-            </a:extLst>
-          </p:cNvPr>
-          <p:cNvSpPr txBox="1"/>
-          <p:nvPr/>
-        </p:nvSpPr>
-        <p:spPr>
-          <a:xfrm>
-            <a:off x="2156470" y="6138439"/>
-            <a:ext cx="312906" cy="369332"/>
-          </a:xfrm>
-          <a:prstGeom prst="rect">
-            <a:avLst/>
-          </a:prstGeom>
-          <a:noFill/>
-        </p:spPr>
-        <p:txBody>
-          <a:bodyPr wrap="none" rtlCol="0">
-            <a:spAutoFit/>
-          </a:bodyPr>
-          <a:lstStyle/>
-          <a:p>
-            <a:r>
-              <a:rPr lang="en-US" dirty="0"/>
-              <a:t>X</a:t>
-            </a:r>
-          </a:p>
-        </p:txBody>
-      </p:sp>
-      <p:grpSp>
-        <p:nvGrpSpPr>
-          <p:cNvPr id="117" name="Group 116">
-            <a:extLst>
-              <a:ext uri="{FF2B5EF4-FFF2-40B4-BE49-F238E27FC236}">
-                <a16:creationId xmlns:a16="http://schemas.microsoft.com/office/drawing/2014/main" id="{22B0FD66-BCCA-199B-FC4F-13EF52223BBE}"/>
+                <a16:creationId xmlns:a16="http://schemas.microsoft.com/office/drawing/2014/main" id="{9E4FA6AE-86A5-F7E8-451B-162188CBFE24}"/>
               </a:ext>
             </a:extLst>
           </p:cNvPr>
@@ -3701,745 +3054,313 @@
         </p:nvGrpSpPr>
         <p:grpSpPr>
           <a:xfrm>
-            <a:off x="8614754" y="1814511"/>
-            <a:ext cx="2635927" cy="4731916"/>
-            <a:chOff x="8438255" y="1824775"/>
-            <a:chExt cx="2635927" cy="4731916"/>
+            <a:off x="672058" y="6849269"/>
+            <a:ext cx="11269878" cy="5576297"/>
+            <a:chOff x="2027351" y="1063042"/>
+            <a:chExt cx="9563356" cy="4731916"/>
           </a:xfrm>
         </p:grpSpPr>
-        <p:sp>
-          <p:nvSpPr>
-            <p:cNvPr id="58" name="Freeform: Shape 57">
+        <p:pic>
+          <p:nvPicPr>
+            <p:cNvPr id="3" name="Picture 2">
               <a:extLst>
                 <a:ext uri="{FF2B5EF4-FFF2-40B4-BE49-F238E27FC236}">
-                  <a16:creationId xmlns:a16="http://schemas.microsoft.com/office/drawing/2014/main" id="{748BF6F1-E6DE-8DE9-88FE-306701896414}"/>
+                  <a16:creationId xmlns:a16="http://schemas.microsoft.com/office/drawing/2014/main" id="{13D441B9-5605-D99C-6BFC-F5F5EC2CE69E}"/>
                 </a:ext>
               </a:extLst>
             </p:cNvPr>
-            <p:cNvSpPr/>
+            <p:cNvPicPr>
+              <a:picLocks noChangeAspect="1"/>
+            </p:cNvPicPr>
             <p:nvPr/>
-          </p:nvSpPr>
+          </p:nvPicPr>
+          <p:blipFill>
+            <a:blip r:embed="rId2"/>
+            <a:stretch>
+              <a:fillRect/>
+            </a:stretch>
+          </p:blipFill>
           <p:spPr>
-            <a:xfrm rot="16200000">
-              <a:off x="9237887" y="1191863"/>
-              <a:ext cx="495470" cy="1761294"/>
-            </a:xfrm>
-            <a:custGeom>
-              <a:avLst/>
-              <a:gdLst>
-                <a:gd name="connsiteX0" fmla="*/ 10099 w 495470"/>
-                <a:gd name="connsiteY0" fmla="*/ 177970 h 1761294"/>
-                <a:gd name="connsiteX1" fmla="*/ 10099 w 495470"/>
-                <a:gd name="connsiteY1" fmla="*/ 177970 h 1761294"/>
-                <a:gd name="connsiteX2" fmla="*/ 10099 w 495470"/>
-                <a:gd name="connsiteY2" fmla="*/ 1343984 h 1761294"/>
-                <a:gd name="connsiteX3" fmla="*/ 40783 w 495470"/>
-                <a:gd name="connsiteY3" fmla="*/ 1411490 h 1761294"/>
-                <a:gd name="connsiteX4" fmla="*/ 89878 w 495470"/>
-                <a:gd name="connsiteY4" fmla="*/ 1515817 h 1761294"/>
-                <a:gd name="connsiteX5" fmla="*/ 102152 w 495470"/>
-                <a:gd name="connsiteY5" fmla="*/ 1632418 h 1761294"/>
-                <a:gd name="connsiteX6" fmla="*/ 108289 w 495470"/>
-                <a:gd name="connsiteY6" fmla="*/ 1650829 h 1761294"/>
-                <a:gd name="connsiteX7" fmla="*/ 59194 w 495470"/>
-                <a:gd name="connsiteY7" fmla="*/ 1718335 h 1761294"/>
-                <a:gd name="connsiteX8" fmla="*/ 65331 w 495470"/>
-                <a:gd name="connsiteY8" fmla="*/ 1761294 h 1761294"/>
-                <a:gd name="connsiteX9" fmla="*/ 120563 w 495470"/>
-                <a:gd name="connsiteY9" fmla="*/ 1724472 h 1761294"/>
-                <a:gd name="connsiteX10" fmla="*/ 157384 w 495470"/>
-                <a:gd name="connsiteY10" fmla="*/ 1583323 h 1761294"/>
-                <a:gd name="connsiteX11" fmla="*/ 237164 w 495470"/>
-                <a:gd name="connsiteY11" fmla="*/ 1454448 h 1761294"/>
-                <a:gd name="connsiteX12" fmla="*/ 267849 w 495470"/>
-                <a:gd name="connsiteY12" fmla="*/ 1386942 h 1761294"/>
-                <a:gd name="connsiteX13" fmla="*/ 280123 w 495470"/>
-                <a:gd name="connsiteY13" fmla="*/ 1221245 h 1761294"/>
-                <a:gd name="connsiteX14" fmla="*/ 316944 w 495470"/>
-                <a:gd name="connsiteY14" fmla="*/ 1184424 h 1761294"/>
-                <a:gd name="connsiteX15" fmla="*/ 347629 w 495470"/>
-                <a:gd name="connsiteY15" fmla="*/ 1141465 h 1761294"/>
-                <a:gd name="connsiteX16" fmla="*/ 408998 w 495470"/>
-                <a:gd name="connsiteY16" fmla="*/ 1080096 h 1761294"/>
-                <a:gd name="connsiteX17" fmla="*/ 439682 w 495470"/>
-                <a:gd name="connsiteY17" fmla="*/ 1006453 h 1761294"/>
-                <a:gd name="connsiteX18" fmla="*/ 482641 w 495470"/>
-                <a:gd name="connsiteY18" fmla="*/ 926674 h 1761294"/>
-                <a:gd name="connsiteX19" fmla="*/ 494915 w 495470"/>
-                <a:gd name="connsiteY19" fmla="*/ 877578 h 1761294"/>
-                <a:gd name="connsiteX20" fmla="*/ 476504 w 495470"/>
-                <a:gd name="connsiteY20" fmla="*/ 760977 h 1761294"/>
-                <a:gd name="connsiteX21" fmla="*/ 433546 w 495470"/>
-                <a:gd name="connsiteY21" fmla="*/ 699608 h 1761294"/>
-                <a:gd name="connsiteX22" fmla="*/ 408998 w 495470"/>
-                <a:gd name="connsiteY22" fmla="*/ 613691 h 1761294"/>
-                <a:gd name="connsiteX23" fmla="*/ 390587 w 495470"/>
-                <a:gd name="connsiteY23" fmla="*/ 576869 h 1761294"/>
-                <a:gd name="connsiteX24" fmla="*/ 372176 w 495470"/>
-                <a:gd name="connsiteY24" fmla="*/ 552322 h 1761294"/>
-                <a:gd name="connsiteX25" fmla="*/ 353766 w 495470"/>
-                <a:gd name="connsiteY25" fmla="*/ 521637 h 1761294"/>
-                <a:gd name="connsiteX26" fmla="*/ 304670 w 495470"/>
-                <a:gd name="connsiteY26" fmla="*/ 478679 h 1761294"/>
-                <a:gd name="connsiteX27" fmla="*/ 249438 w 495470"/>
-                <a:gd name="connsiteY27" fmla="*/ 423447 h 1761294"/>
-                <a:gd name="connsiteX28" fmla="*/ 194206 w 495470"/>
-                <a:gd name="connsiteY28" fmla="*/ 355941 h 1761294"/>
-                <a:gd name="connsiteX29" fmla="*/ 157384 w 495470"/>
-                <a:gd name="connsiteY29" fmla="*/ 312982 h 1761294"/>
-                <a:gd name="connsiteX30" fmla="*/ 83742 w 495470"/>
-                <a:gd name="connsiteY30" fmla="*/ 257750 h 1761294"/>
-                <a:gd name="connsiteX31" fmla="*/ 77605 w 495470"/>
-                <a:gd name="connsiteY31" fmla="*/ 208655 h 1761294"/>
-                <a:gd name="connsiteX32" fmla="*/ 65331 w 495470"/>
-                <a:gd name="connsiteY32" fmla="*/ 153423 h 1761294"/>
-                <a:gd name="connsiteX33" fmla="*/ 59194 w 495470"/>
-                <a:gd name="connsiteY33" fmla="*/ 0 h 1761294"/>
-                <a:gd name="connsiteX34" fmla="*/ 22372 w 495470"/>
-                <a:gd name="connsiteY34" fmla="*/ 42958 h 1761294"/>
-                <a:gd name="connsiteX35" fmla="*/ 16236 w 495470"/>
-                <a:gd name="connsiteY35" fmla="*/ 141149 h 1761294"/>
-                <a:gd name="connsiteX36" fmla="*/ 10099 w 495470"/>
-                <a:gd name="connsiteY36" fmla="*/ 159559 h 1761294"/>
-                <a:gd name="connsiteX37" fmla="*/ 10099 w 495470"/>
-                <a:gd name="connsiteY37" fmla="*/ 177970 h 1761294"/>
-              </a:gdLst>
-              <a:ahLst/>
-              <a:cxnLst>
-                <a:cxn ang="0">
-                  <a:pos x="connsiteX0" y="connsiteY0"/>
-                </a:cxn>
-                <a:cxn ang="0">
-                  <a:pos x="connsiteX1" y="connsiteY1"/>
-                </a:cxn>
-                <a:cxn ang="0">
-                  <a:pos x="connsiteX2" y="connsiteY2"/>
-                </a:cxn>
-                <a:cxn ang="0">
-                  <a:pos x="connsiteX3" y="connsiteY3"/>
-                </a:cxn>
-                <a:cxn ang="0">
-                  <a:pos x="connsiteX4" y="connsiteY4"/>
-                </a:cxn>
-                <a:cxn ang="0">
-                  <a:pos x="connsiteX5" y="connsiteY5"/>
-                </a:cxn>
-                <a:cxn ang="0">
-                  <a:pos x="connsiteX6" y="connsiteY6"/>
-                </a:cxn>
-                <a:cxn ang="0">
-                  <a:pos x="connsiteX7" y="connsiteY7"/>
-                </a:cxn>
-                <a:cxn ang="0">
-                  <a:pos x="connsiteX8" y="connsiteY8"/>
-                </a:cxn>
-                <a:cxn ang="0">
-                  <a:pos x="connsiteX9" y="connsiteY9"/>
-                </a:cxn>
-                <a:cxn ang="0">
-                  <a:pos x="connsiteX10" y="connsiteY10"/>
-                </a:cxn>
-                <a:cxn ang="0">
-                  <a:pos x="connsiteX11" y="connsiteY11"/>
-                </a:cxn>
-                <a:cxn ang="0">
-                  <a:pos x="connsiteX12" y="connsiteY12"/>
-                </a:cxn>
-                <a:cxn ang="0">
-                  <a:pos x="connsiteX13" y="connsiteY13"/>
-                </a:cxn>
-                <a:cxn ang="0">
-                  <a:pos x="connsiteX14" y="connsiteY14"/>
-                </a:cxn>
-                <a:cxn ang="0">
-                  <a:pos x="connsiteX15" y="connsiteY15"/>
-                </a:cxn>
-                <a:cxn ang="0">
-                  <a:pos x="connsiteX16" y="connsiteY16"/>
-                </a:cxn>
-                <a:cxn ang="0">
-                  <a:pos x="connsiteX17" y="connsiteY17"/>
-                </a:cxn>
-                <a:cxn ang="0">
-                  <a:pos x="connsiteX18" y="connsiteY18"/>
-                </a:cxn>
-                <a:cxn ang="0">
-                  <a:pos x="connsiteX19" y="connsiteY19"/>
-                </a:cxn>
-                <a:cxn ang="0">
-                  <a:pos x="connsiteX20" y="connsiteY20"/>
-                </a:cxn>
-                <a:cxn ang="0">
-                  <a:pos x="connsiteX21" y="connsiteY21"/>
-                </a:cxn>
-                <a:cxn ang="0">
-                  <a:pos x="connsiteX22" y="connsiteY22"/>
-                </a:cxn>
-                <a:cxn ang="0">
-                  <a:pos x="connsiteX23" y="connsiteY23"/>
-                </a:cxn>
-                <a:cxn ang="0">
-                  <a:pos x="connsiteX24" y="connsiteY24"/>
-                </a:cxn>
-                <a:cxn ang="0">
-                  <a:pos x="connsiteX25" y="connsiteY25"/>
-                </a:cxn>
-                <a:cxn ang="0">
-                  <a:pos x="connsiteX26" y="connsiteY26"/>
-                </a:cxn>
-                <a:cxn ang="0">
-                  <a:pos x="connsiteX27" y="connsiteY27"/>
-                </a:cxn>
-                <a:cxn ang="0">
-                  <a:pos x="connsiteX28" y="connsiteY28"/>
-                </a:cxn>
-                <a:cxn ang="0">
-                  <a:pos x="connsiteX29" y="connsiteY29"/>
-                </a:cxn>
-                <a:cxn ang="0">
-                  <a:pos x="connsiteX30" y="connsiteY30"/>
-                </a:cxn>
-                <a:cxn ang="0">
-                  <a:pos x="connsiteX31" y="connsiteY31"/>
-                </a:cxn>
-                <a:cxn ang="0">
-                  <a:pos x="connsiteX32" y="connsiteY32"/>
-                </a:cxn>
-                <a:cxn ang="0">
-                  <a:pos x="connsiteX33" y="connsiteY33"/>
-                </a:cxn>
-                <a:cxn ang="0">
-                  <a:pos x="connsiteX34" y="connsiteY34"/>
-                </a:cxn>
-                <a:cxn ang="0">
-                  <a:pos x="connsiteX35" y="connsiteY35"/>
-                </a:cxn>
-                <a:cxn ang="0">
-                  <a:pos x="connsiteX36" y="connsiteY36"/>
-                </a:cxn>
-                <a:cxn ang="0">
-                  <a:pos x="connsiteX37" y="connsiteY37"/>
-                </a:cxn>
-              </a:cxnLst>
-              <a:rect l="l" t="t" r="r" b="b"/>
-              <a:pathLst>
-                <a:path w="495470" h="1761294">
-                  <a:moveTo>
-                    <a:pt x="10099" y="177970"/>
-                  </a:moveTo>
-                  <a:lnTo>
-                    <a:pt x="10099" y="177970"/>
-                  </a:lnTo>
-                  <a:cubicBezTo>
-                    <a:pt x="1571" y="587321"/>
-                    <a:pt x="-7553" y="893850"/>
-                    <a:pt x="10099" y="1343984"/>
-                  </a:cubicBezTo>
-                  <a:cubicBezTo>
-                    <a:pt x="11068" y="1368682"/>
-                    <a:pt x="29729" y="1389382"/>
-                    <a:pt x="40783" y="1411490"/>
-                  </a:cubicBezTo>
-                  <a:cubicBezTo>
-                    <a:pt x="91708" y="1513341"/>
-                    <a:pt x="54320" y="1420994"/>
-                    <a:pt x="89878" y="1515817"/>
-                  </a:cubicBezTo>
-                  <a:cubicBezTo>
-                    <a:pt x="93519" y="1566791"/>
-                    <a:pt x="91561" y="1590054"/>
-                    <a:pt x="102152" y="1632418"/>
-                  </a:cubicBezTo>
-                  <a:cubicBezTo>
-                    <a:pt x="103721" y="1638694"/>
-                    <a:pt x="106243" y="1644692"/>
-                    <a:pt x="108289" y="1650829"/>
-                  </a:cubicBezTo>
-                  <a:cubicBezTo>
-                    <a:pt x="85896" y="1673223"/>
-                    <a:pt x="59194" y="1685191"/>
-                    <a:pt x="59194" y="1718335"/>
-                  </a:cubicBezTo>
-                  <a:cubicBezTo>
-                    <a:pt x="59194" y="1732800"/>
-                    <a:pt x="63285" y="1746974"/>
-                    <a:pt x="65331" y="1761294"/>
-                  </a:cubicBezTo>
-                  <a:cubicBezTo>
-                    <a:pt x="83742" y="1749020"/>
-                    <a:pt x="108068" y="1742734"/>
-                    <a:pt x="120563" y="1724472"/>
-                  </a:cubicBezTo>
-                  <a:cubicBezTo>
-                    <a:pt x="155338" y="1673647"/>
-                    <a:pt x="136587" y="1635317"/>
-                    <a:pt x="157384" y="1583323"/>
-                  </a:cubicBezTo>
-                  <a:cubicBezTo>
-                    <a:pt x="213185" y="1443819"/>
-                    <a:pt x="184591" y="1533308"/>
-                    <a:pt x="237164" y="1454448"/>
-                  </a:cubicBezTo>
-                  <a:cubicBezTo>
-                    <a:pt x="248834" y="1436943"/>
-                    <a:pt x="259845" y="1406951"/>
-                    <a:pt x="267849" y="1386942"/>
-                  </a:cubicBezTo>
-                  <a:cubicBezTo>
-                    <a:pt x="271940" y="1331710"/>
-                    <a:pt x="267075" y="1275070"/>
-                    <a:pt x="280123" y="1221245"/>
-                  </a:cubicBezTo>
-                  <a:cubicBezTo>
-                    <a:pt x="284212" y="1204376"/>
-                    <a:pt x="305732" y="1197675"/>
-                    <a:pt x="316944" y="1184424"/>
-                  </a:cubicBezTo>
-                  <a:cubicBezTo>
-                    <a:pt x="328311" y="1170990"/>
-                    <a:pt x="335986" y="1154660"/>
-                    <a:pt x="347629" y="1141465"/>
-                  </a:cubicBezTo>
-                  <a:cubicBezTo>
-                    <a:pt x="366769" y="1119772"/>
-                    <a:pt x="396060" y="1105971"/>
-                    <a:pt x="408998" y="1080096"/>
-                  </a:cubicBezTo>
-                  <a:cubicBezTo>
-                    <a:pt x="468436" y="961224"/>
-                    <a:pt x="389844" y="1122743"/>
-                    <a:pt x="439682" y="1006453"/>
-                  </a:cubicBezTo>
-                  <a:cubicBezTo>
-                    <a:pt x="454622" y="971593"/>
-                    <a:pt x="464558" y="956812"/>
-                    <a:pt x="482641" y="926674"/>
-                  </a:cubicBezTo>
-                  <a:cubicBezTo>
-                    <a:pt x="486732" y="910309"/>
-                    <a:pt x="494149" y="894430"/>
-                    <a:pt x="494915" y="877578"/>
-                  </a:cubicBezTo>
-                  <a:cubicBezTo>
-                    <a:pt x="496417" y="844530"/>
-                    <a:pt x="496210" y="793819"/>
-                    <a:pt x="476504" y="760977"/>
-                  </a:cubicBezTo>
-                  <a:cubicBezTo>
-                    <a:pt x="447125" y="712013"/>
-                    <a:pt x="456309" y="749688"/>
-                    <a:pt x="433546" y="699608"/>
-                  </a:cubicBezTo>
-                  <a:cubicBezTo>
-                    <a:pt x="415774" y="660509"/>
-                    <a:pt x="424623" y="657442"/>
-                    <a:pt x="408998" y="613691"/>
-                  </a:cubicBezTo>
-                  <a:cubicBezTo>
-                    <a:pt x="404382" y="600768"/>
-                    <a:pt x="397647" y="588636"/>
-                    <a:pt x="390587" y="576869"/>
-                  </a:cubicBezTo>
-                  <a:cubicBezTo>
-                    <a:pt x="385325" y="568099"/>
-                    <a:pt x="377849" y="560832"/>
-                    <a:pt x="372176" y="552322"/>
-                  </a:cubicBezTo>
-                  <a:cubicBezTo>
-                    <a:pt x="365560" y="542397"/>
-                    <a:pt x="360923" y="531179"/>
-                    <a:pt x="353766" y="521637"/>
-                  </a:cubicBezTo>
-                  <a:cubicBezTo>
-                    <a:pt x="341002" y="504618"/>
-                    <a:pt x="319630" y="492570"/>
-                    <a:pt x="304670" y="478679"/>
-                  </a:cubicBezTo>
-                  <a:cubicBezTo>
-                    <a:pt x="285591" y="460962"/>
-                    <a:pt x="265925" y="443598"/>
-                    <a:pt x="249438" y="423447"/>
-                  </a:cubicBezTo>
-                  <a:cubicBezTo>
-                    <a:pt x="231027" y="400945"/>
-                    <a:pt x="212819" y="378276"/>
-                    <a:pt x="194206" y="355941"/>
-                  </a:cubicBezTo>
-                  <a:cubicBezTo>
-                    <a:pt x="182132" y="341452"/>
-                    <a:pt x="172271" y="324561"/>
-                    <a:pt x="157384" y="312982"/>
-                  </a:cubicBezTo>
-                  <a:cubicBezTo>
-                    <a:pt x="96330" y="265496"/>
-                    <a:pt x="121558" y="282962"/>
-                    <a:pt x="83742" y="257750"/>
-                  </a:cubicBezTo>
-                  <a:cubicBezTo>
-                    <a:pt x="81696" y="241385"/>
-                    <a:pt x="80471" y="224896"/>
-                    <a:pt x="77605" y="208655"/>
-                  </a:cubicBezTo>
-                  <a:cubicBezTo>
-                    <a:pt x="74327" y="190082"/>
-                    <a:pt x="66989" y="172210"/>
-                    <a:pt x="65331" y="153423"/>
-                  </a:cubicBezTo>
-                  <a:cubicBezTo>
-                    <a:pt x="60832" y="102439"/>
-                    <a:pt x="61240" y="51141"/>
-                    <a:pt x="59194" y="0"/>
-                  </a:cubicBezTo>
-                  <a:cubicBezTo>
-                    <a:pt x="51920" y="7273"/>
-                    <a:pt x="24340" y="33116"/>
-                    <a:pt x="22372" y="42958"/>
-                  </a:cubicBezTo>
-                  <a:cubicBezTo>
-                    <a:pt x="15941" y="75115"/>
-                    <a:pt x="19669" y="108535"/>
-                    <a:pt x="16236" y="141149"/>
-                  </a:cubicBezTo>
-                  <a:cubicBezTo>
-                    <a:pt x="15559" y="147582"/>
-                    <a:pt x="10901" y="153140"/>
-                    <a:pt x="10099" y="159559"/>
-                  </a:cubicBezTo>
-                  <a:cubicBezTo>
-                    <a:pt x="8830" y="169708"/>
-                    <a:pt x="10099" y="174902"/>
-                    <a:pt x="10099" y="177970"/>
-                  </a:cubicBezTo>
-                  <a:close/>
-                </a:path>
-              </a:pathLst>
-            </a:custGeom>
-            <a:solidFill>
-              <a:schemeClr val="bg1"/>
-            </a:solidFill>
-            <a:ln>
-              <a:solidFill>
-                <a:schemeClr val="accent6">
-                  <a:lumMod val="75000"/>
-                </a:schemeClr>
-              </a:solidFill>
-            </a:ln>
-          </p:spPr>
-          <p:style>
-            <a:lnRef idx="2">
-              <a:schemeClr val="accent1">
-                <a:shade val="15000"/>
-              </a:schemeClr>
-            </a:lnRef>
-            <a:fillRef idx="1">
-              <a:schemeClr val="accent1"/>
-            </a:fillRef>
-            <a:effectRef idx="0">
-              <a:schemeClr val="accent1"/>
-            </a:effectRef>
-            <a:fontRef idx="minor">
-              <a:schemeClr val="lt1"/>
-            </a:fontRef>
-          </p:style>
-          <p:txBody>
-            <a:bodyPr rtlCol="0" anchor="ctr"/>
-            <a:lstStyle/>
-            <a:p>
-              <a:pPr algn="ctr"/>
-              <a:endParaRPr lang="en-US"/>
-            </a:p>
-          </p:txBody>
-        </p:sp>
-        <p:cxnSp>
-          <p:nvCxnSpPr>
-            <p:cNvPr id="30" name="Straight Connector 29">
-              <a:extLst>
-                <a:ext uri="{FF2B5EF4-FFF2-40B4-BE49-F238E27FC236}">
-                  <a16:creationId xmlns:a16="http://schemas.microsoft.com/office/drawing/2014/main" id="{D1BCF5BA-19D0-11B6-948C-1529604AAE97}"/>
-                </a:ext>
-              </a:extLst>
-            </p:cNvPr>
-            <p:cNvCxnSpPr>
-              <a:cxnSpLocks/>
-            </p:cNvCxnSpPr>
-            <p:nvPr/>
-          </p:nvCxnSpPr>
-          <p:spPr>
-            <a:xfrm rot="5400000">
-              <a:off x="9499471" y="4928093"/>
-              <a:ext cx="0" cy="1115133"/>
-            </a:xfrm>
-            <a:prstGeom prst="line">
-              <a:avLst/>
-            </a:prstGeom>
-          </p:spPr>
-          <p:style>
-            <a:lnRef idx="2">
-              <a:schemeClr val="accent1"/>
-            </a:lnRef>
-            <a:fillRef idx="0">
-              <a:schemeClr val="accent1"/>
-            </a:fillRef>
-            <a:effectRef idx="1">
-              <a:schemeClr val="accent1"/>
-            </a:effectRef>
-            <a:fontRef idx="minor">
-              <a:schemeClr val="tx1"/>
-            </a:fontRef>
-          </p:style>
-        </p:cxnSp>
-        <p:sp>
-          <p:nvSpPr>
-            <p:cNvPr id="28" name="Rectangle 27">
-              <a:extLst>
-                <a:ext uri="{FF2B5EF4-FFF2-40B4-BE49-F238E27FC236}">
-                  <a16:creationId xmlns:a16="http://schemas.microsoft.com/office/drawing/2014/main" id="{24C12165-311E-22D0-BBDE-85030C1B31A9}"/>
-                </a:ext>
-              </a:extLst>
-            </p:cNvPr>
-            <p:cNvSpPr/>
-            <p:nvPr/>
-          </p:nvSpPr>
-          <p:spPr>
-            <a:xfrm rot="5400000">
-              <a:off x="9439594" y="5326099"/>
-              <a:ext cx="104328" cy="325257"/>
+            <a:xfrm>
+              <a:off x="2304052" y="1437509"/>
+              <a:ext cx="2927297" cy="2558563"/>
             </a:xfrm>
             <a:prstGeom prst="rect">
               <a:avLst/>
             </a:prstGeom>
-            <a:solidFill>
-              <a:schemeClr val="bg1"/>
-            </a:solidFill>
-            <a:ln>
-              <a:noFill/>
-            </a:ln>
           </p:spPr>
-          <p:style>
-            <a:lnRef idx="2">
-              <a:schemeClr val="accent1">
-                <a:shade val="15000"/>
-              </a:schemeClr>
-            </a:lnRef>
-            <a:fillRef idx="1">
-              <a:schemeClr val="accent1"/>
-            </a:fillRef>
-            <a:effectRef idx="0">
-              <a:schemeClr val="accent1"/>
-            </a:effectRef>
-            <a:fontRef idx="minor">
-              <a:schemeClr val="lt1"/>
-            </a:fontRef>
-          </p:style>
+        </p:pic>
+        <p:pic>
+          <p:nvPicPr>
+            <p:cNvPr id="9" name="Picture 8">
+              <a:extLst>
+                <a:ext uri="{FF2B5EF4-FFF2-40B4-BE49-F238E27FC236}">
+                  <a16:creationId xmlns:a16="http://schemas.microsoft.com/office/drawing/2014/main" id="{511F15A5-9417-A55F-F67C-ACF5BA71203F}"/>
+                </a:ext>
+              </a:extLst>
+            </p:cNvPr>
+            <p:cNvPicPr>
+              <a:picLocks noChangeAspect="1"/>
+            </p:cNvPicPr>
+            <p:nvPr/>
+          </p:nvPicPr>
+          <p:blipFill>
+            <a:blip r:embed="rId3"/>
+            <a:stretch>
+              <a:fillRect/>
+            </a:stretch>
+          </p:blipFill>
+          <p:spPr>
+            <a:xfrm>
+              <a:off x="5353200" y="1437509"/>
+              <a:ext cx="2927297" cy="2558563"/>
+            </a:xfrm>
+            <a:prstGeom prst="rect">
+              <a:avLst/>
+            </a:prstGeom>
+          </p:spPr>
+        </p:pic>
+        <p:pic>
+          <p:nvPicPr>
+            <p:cNvPr id="11" name="Picture 10">
+              <a:extLst>
+                <a:ext uri="{FF2B5EF4-FFF2-40B4-BE49-F238E27FC236}">
+                  <a16:creationId xmlns:a16="http://schemas.microsoft.com/office/drawing/2014/main" id="{A5A0A549-FB4E-C2CE-D514-C5D27B2AC993}"/>
+                </a:ext>
+              </a:extLst>
+            </p:cNvPr>
+            <p:cNvPicPr>
+              <a:picLocks noChangeAspect="1"/>
+            </p:cNvPicPr>
+            <p:nvPr/>
+          </p:nvPicPr>
+          <p:blipFill>
+            <a:blip r:embed="rId4"/>
+            <a:stretch>
+              <a:fillRect/>
+            </a:stretch>
+          </p:blipFill>
+          <p:spPr>
+            <a:xfrm rot="10800000" flipH="1">
+              <a:off x="2305557" y="4076544"/>
+              <a:ext cx="2925792" cy="1310425"/>
+            </a:xfrm>
+            <a:prstGeom prst="rect">
+              <a:avLst/>
+            </a:prstGeom>
+          </p:spPr>
+        </p:pic>
+        <p:pic>
+          <p:nvPicPr>
+            <p:cNvPr id="13" name="Picture 12">
+              <a:extLst>
+                <a:ext uri="{FF2B5EF4-FFF2-40B4-BE49-F238E27FC236}">
+                  <a16:creationId xmlns:a16="http://schemas.microsoft.com/office/drawing/2014/main" id="{17ECA0BC-EAF4-1F03-7E50-179A2F9085EB}"/>
+                </a:ext>
+              </a:extLst>
+            </p:cNvPr>
+            <p:cNvPicPr>
+              <a:picLocks noChangeAspect="1"/>
+            </p:cNvPicPr>
+            <p:nvPr/>
+          </p:nvPicPr>
+          <p:blipFill>
+            <a:blip r:embed="rId5"/>
+            <a:stretch>
+              <a:fillRect/>
+            </a:stretch>
+          </p:blipFill>
+          <p:spPr>
+            <a:xfrm rot="10800000" flipH="1">
+              <a:off x="5354705" y="4076544"/>
+              <a:ext cx="2925792" cy="1280170"/>
+            </a:xfrm>
+            <a:prstGeom prst="rect">
+              <a:avLst/>
+            </a:prstGeom>
+          </p:spPr>
+        </p:pic>
+        <p:sp>
+          <p:nvSpPr>
+            <p:cNvPr id="14" name="TextBox 13">
+              <a:extLst>
+                <a:ext uri="{FF2B5EF4-FFF2-40B4-BE49-F238E27FC236}">
+                  <a16:creationId xmlns:a16="http://schemas.microsoft.com/office/drawing/2014/main" id="{385341A5-63A7-50CB-3FB0-A5C349E80879}"/>
+                </a:ext>
+              </a:extLst>
+            </p:cNvPr>
+            <p:cNvSpPr txBox="1"/>
+            <p:nvPr/>
+          </p:nvSpPr>
+          <p:spPr>
+            <a:xfrm>
+              <a:off x="2235637" y="1068177"/>
+              <a:ext cx="959263" cy="313407"/>
+            </a:xfrm>
+            <a:prstGeom prst="rect">
+              <a:avLst/>
+            </a:prstGeom>
+            <a:noFill/>
+          </p:spPr>
           <p:txBody>
-            <a:bodyPr rtlCol="0" anchor="ctr"/>
+            <a:bodyPr wrap="none" rtlCol="0">
+              <a:spAutoFit/>
+            </a:bodyPr>
             <a:lstStyle/>
             <a:p>
-              <a:pPr algn="ctr"/>
-              <a:endParaRPr lang="en-US"/>
+              <a:r>
+                <a:rPr lang="en-US" dirty="0"/>
+                <a:t>Widefield</a:t>
+              </a:r>
             </a:p>
           </p:txBody>
         </p:sp>
-        <p:cxnSp>
-          <p:nvCxnSpPr>
-            <p:cNvPr id="42" name="Straight Connector 41">
+        <p:sp>
+          <p:nvSpPr>
+            <p:cNvPr id="15" name="TextBox 14">
               <a:extLst>
                 <a:ext uri="{FF2B5EF4-FFF2-40B4-BE49-F238E27FC236}">
-                  <a16:creationId xmlns:a16="http://schemas.microsoft.com/office/drawing/2014/main" id="{0D582AEF-2A78-1C00-9B67-E7D7EBDF96D5}"/>
+                  <a16:creationId xmlns:a16="http://schemas.microsoft.com/office/drawing/2014/main" id="{82C39089-3FEE-A937-F373-5C4562EB4FDC}"/>
                 </a:ext>
               </a:extLst>
             </p:cNvPr>
-            <p:cNvCxnSpPr>
-              <a:cxnSpLocks/>
-              <a:stCxn id="19" idx="7"/>
-              <a:endCxn id="20" idx="1"/>
-            </p:cNvCxnSpPr>
+            <p:cNvSpPr txBox="1"/>
             <p:nvPr/>
-          </p:nvCxnSpPr>
+          </p:nvSpPr>
           <p:spPr>
-            <a:xfrm rot="5400000">
-              <a:off x="9144568" y="3818975"/>
-              <a:ext cx="1519622" cy="0"/>
+            <a:xfrm>
+              <a:off x="5299764" y="1063042"/>
+              <a:ext cx="2209679" cy="313407"/>
             </a:xfrm>
-            <a:prstGeom prst="line">
+            <a:prstGeom prst="rect">
               <a:avLst/>
             </a:prstGeom>
-            <a:ln>
-              <a:solidFill>
-                <a:schemeClr val="accent6">
-                  <a:lumMod val="60000"/>
-                  <a:lumOff val="40000"/>
-                </a:schemeClr>
-              </a:solidFill>
-            </a:ln>
+            <a:noFill/>
           </p:spPr>
-          <p:style>
-            <a:lnRef idx="2">
-              <a:schemeClr val="accent1"/>
-            </a:lnRef>
-            <a:fillRef idx="0">
-              <a:schemeClr val="accent1"/>
-            </a:fillRef>
-            <a:effectRef idx="1">
-              <a:schemeClr val="accent1"/>
-            </a:effectRef>
-            <a:fontRef idx="minor">
-              <a:schemeClr val="tx1"/>
-            </a:fontRef>
-          </p:style>
-        </p:cxnSp>
-        <p:cxnSp>
-          <p:nvCxnSpPr>
-            <p:cNvPr id="45" name="Straight Connector 44">
+          <p:txBody>
+            <a:bodyPr wrap="none" rtlCol="0">
+              <a:spAutoFit/>
+            </a:bodyPr>
+            <a:lstStyle/>
+            <a:p>
+              <a:r>
+                <a:rPr lang="en-US" dirty="0"/>
+                <a:t>Laser scanning confocal</a:t>
+              </a:r>
+            </a:p>
+          </p:txBody>
+        </p:sp>
+        <p:sp>
+          <p:nvSpPr>
+            <p:cNvPr id="16" name="TextBox 15">
               <a:extLst>
                 <a:ext uri="{FF2B5EF4-FFF2-40B4-BE49-F238E27FC236}">
-                  <a16:creationId xmlns:a16="http://schemas.microsoft.com/office/drawing/2014/main" id="{2BC41E2F-38C5-BD63-2214-55B78E41CD1E}"/>
+                  <a16:creationId xmlns:a16="http://schemas.microsoft.com/office/drawing/2014/main" id="{A7E0C8E2-9BFA-FD16-32FE-BB5B6FCD0058}"/>
                 </a:ext>
               </a:extLst>
             </p:cNvPr>
-            <p:cNvCxnSpPr>
-              <a:cxnSpLocks/>
-              <a:stCxn id="20" idx="7"/>
-            </p:cNvCxnSpPr>
+            <p:cNvSpPr txBox="1"/>
             <p:nvPr/>
-          </p:nvCxnSpPr>
+          </p:nvSpPr>
           <p:spPr>
-            <a:xfrm flipH="1">
-              <a:off x="9236096" y="4708970"/>
-              <a:ext cx="668283" cy="1280657"/>
+            <a:xfrm>
+              <a:off x="2027351" y="3707212"/>
+              <a:ext cx="262804" cy="313407"/>
             </a:xfrm>
-            <a:prstGeom prst="line">
+            <a:prstGeom prst="rect">
               <a:avLst/>
             </a:prstGeom>
-            <a:ln>
-              <a:solidFill>
-                <a:schemeClr val="accent6">
-                  <a:lumMod val="60000"/>
-                  <a:lumOff val="40000"/>
-                </a:schemeClr>
-              </a:solidFill>
-              <a:headEnd type="none" w="med" len="med"/>
-              <a:tailEnd type="triangle" w="med" len="med"/>
-            </a:ln>
+            <a:noFill/>
           </p:spPr>
-          <p:style>
-            <a:lnRef idx="2">
-              <a:schemeClr val="accent1"/>
-            </a:lnRef>
-            <a:fillRef idx="0">
-              <a:schemeClr val="accent1"/>
-            </a:fillRef>
-            <a:effectRef idx="1">
-              <a:schemeClr val="accent1"/>
-            </a:effectRef>
-            <a:fontRef idx="minor">
-              <a:schemeClr val="tx1"/>
-            </a:fontRef>
-          </p:style>
-        </p:cxnSp>
-        <p:cxnSp>
-          <p:nvCxnSpPr>
-            <p:cNvPr id="46" name="Straight Connector 45">
+          <p:txBody>
+            <a:bodyPr wrap="none" rtlCol="0">
+              <a:spAutoFit/>
+            </a:bodyPr>
+            <a:lstStyle/>
+            <a:p>
+              <a:r>
+                <a:rPr lang="en-US" dirty="0"/>
+                <a:t>Y</a:t>
+              </a:r>
+            </a:p>
+          </p:txBody>
+        </p:sp>
+        <p:sp>
+          <p:nvSpPr>
+            <p:cNvPr id="17" name="TextBox 16">
               <a:extLst>
                 <a:ext uri="{FF2B5EF4-FFF2-40B4-BE49-F238E27FC236}">
-                  <a16:creationId xmlns:a16="http://schemas.microsoft.com/office/drawing/2014/main" id="{6AEC7E96-164B-3FA2-4FE2-9B01608890F8}"/>
+                  <a16:creationId xmlns:a16="http://schemas.microsoft.com/office/drawing/2014/main" id="{2580C4F2-01B7-A154-FCD2-6A5E7976F9EE}"/>
                 </a:ext>
               </a:extLst>
             </p:cNvPr>
-            <p:cNvCxnSpPr>
-              <a:cxnSpLocks/>
-              <a:stCxn id="19" idx="5"/>
-              <a:endCxn id="20" idx="3"/>
-            </p:cNvCxnSpPr>
+            <p:cNvSpPr txBox="1"/>
             <p:nvPr/>
-          </p:nvCxnSpPr>
+          </p:nvSpPr>
           <p:spPr>
-            <a:xfrm rot="5400000">
-              <a:off x="8307054" y="3818975"/>
-              <a:ext cx="1519622" cy="0"/>
+            <a:xfrm>
+              <a:off x="2027351" y="5098110"/>
+              <a:ext cx="257363" cy="313407"/>
             </a:xfrm>
-            <a:prstGeom prst="line">
+            <a:prstGeom prst="rect">
               <a:avLst/>
             </a:prstGeom>
-            <a:ln>
-              <a:solidFill>
-                <a:schemeClr val="accent6">
-                  <a:lumMod val="60000"/>
-                  <a:lumOff val="40000"/>
-                </a:schemeClr>
-              </a:solidFill>
-            </a:ln>
+            <a:noFill/>
           </p:spPr>
-          <p:style>
-            <a:lnRef idx="2">
-              <a:schemeClr val="accent1"/>
-            </a:lnRef>
-            <a:fillRef idx="0">
-              <a:schemeClr val="accent1"/>
-            </a:fillRef>
-            <a:effectRef idx="1">
-              <a:schemeClr val="accent1"/>
-            </a:effectRef>
-            <a:fontRef idx="minor">
-              <a:schemeClr val="tx1"/>
-            </a:fontRef>
-          </p:style>
-        </p:cxnSp>
-        <p:cxnSp>
-          <p:nvCxnSpPr>
-            <p:cNvPr id="50" name="Straight Connector 49">
+          <p:txBody>
+            <a:bodyPr wrap="none" rtlCol="0">
+              <a:spAutoFit/>
+            </a:bodyPr>
+            <a:lstStyle/>
+            <a:p>
+              <a:r>
+                <a:rPr lang="en-US" dirty="0"/>
+                <a:t>Z</a:t>
+              </a:r>
+            </a:p>
+          </p:txBody>
+        </p:sp>
+        <p:sp>
+          <p:nvSpPr>
+            <p:cNvPr id="18" name="TextBox 17">
               <a:extLst>
                 <a:ext uri="{FF2B5EF4-FFF2-40B4-BE49-F238E27FC236}">
-                  <a16:creationId xmlns:a16="http://schemas.microsoft.com/office/drawing/2014/main" id="{07D150F7-B379-471B-0445-738020D15099}"/>
+                  <a16:creationId xmlns:a16="http://schemas.microsoft.com/office/drawing/2014/main" id="{687D38E6-635D-7893-D767-C7446127BBE3}"/>
                 </a:ext>
               </a:extLst>
             </p:cNvPr>
-            <p:cNvCxnSpPr>
-              <a:cxnSpLocks/>
-              <a:stCxn id="20" idx="5"/>
-            </p:cNvCxnSpPr>
+            <p:cNvSpPr txBox="1"/>
             <p:nvPr/>
-          </p:nvCxnSpPr>
+          </p:nvSpPr>
           <p:spPr>
             <a:xfrm>
-              <a:off x="9066865" y="4708970"/>
-              <a:ext cx="693474" cy="1280657"/>
+              <a:off x="2305557" y="5386970"/>
+              <a:ext cx="265525" cy="313407"/>
             </a:xfrm>
-            <a:prstGeom prst="line">
+            <a:prstGeom prst="rect">
               <a:avLst/>
             </a:prstGeom>
-            <a:ln>
-              <a:solidFill>
-                <a:schemeClr val="accent6">
-                  <a:lumMod val="60000"/>
-                  <a:lumOff val="40000"/>
-                </a:schemeClr>
-              </a:solidFill>
-              <a:headEnd type="none" w="med" len="med"/>
-              <a:tailEnd type="triangle" w="med" len="med"/>
-            </a:ln>
+            <a:noFill/>
           </p:spPr>
-          <p:style>
-            <a:lnRef idx="2">
-              <a:schemeClr val="accent1"/>
-            </a:lnRef>
-            <a:fillRef idx="0">
-              <a:schemeClr val="accent1"/>
-            </a:fillRef>
-            <a:effectRef idx="1">
-              <a:schemeClr val="accent1"/>
-            </a:effectRef>
-            <a:fontRef idx="minor">
-              <a:schemeClr val="tx1"/>
-            </a:fontRef>
-          </p:style>
-        </p:cxnSp>
+          <p:txBody>
+            <a:bodyPr wrap="none" rtlCol="0">
+              <a:spAutoFit/>
+            </a:bodyPr>
+            <a:lstStyle/>
+            <a:p>
+              <a:r>
+                <a:rPr lang="en-US" dirty="0"/>
+                <a:t>X</a:t>
+              </a:r>
+            </a:p>
+          </p:txBody>
+        </p:sp>
         <p:grpSp>
           <p:nvGrpSpPr>
-            <p:cNvPr id="55" name="Group 54">
+            <p:cNvPr id="117" name="Group 116">
               <a:extLst>
                 <a:ext uri="{FF2B5EF4-FFF2-40B4-BE49-F238E27FC236}">
-                  <a16:creationId xmlns:a16="http://schemas.microsoft.com/office/drawing/2014/main" id="{F116F7C9-A9E4-7CB0-ED71-8CB0E55383ED}"/>
+                  <a16:creationId xmlns:a16="http://schemas.microsoft.com/office/drawing/2014/main" id="{22B0FD66-BCCA-199B-FC4F-13EF52223BBE}"/>
                 </a:ext>
               </a:extLst>
             </p:cNvPr>
@@ -4447,29 +3368,566 @@
             <p:nvPr/>
           </p:nvGrpSpPr>
           <p:grpSpPr>
-            <a:xfrm rot="5400000" flipH="1">
-              <a:off x="9069661" y="2094262"/>
-              <a:ext cx="831922" cy="837514"/>
-              <a:chOff x="10231909" y="863519"/>
-              <a:chExt cx="831922" cy="837514"/>
+            <a:xfrm>
+              <a:off x="8763841" y="1063042"/>
+              <a:ext cx="2826866" cy="4731916"/>
+              <a:chOff x="8438255" y="1824775"/>
+              <a:chExt cx="2826866" cy="4731916"/>
             </a:xfrm>
           </p:grpSpPr>
-          <p:cxnSp>
-            <p:nvCxnSpPr>
-              <p:cNvPr id="53" name="Straight Connector 52">
+          <p:sp>
+            <p:nvSpPr>
+              <p:cNvPr id="58" name="Freeform: Shape 57">
                 <a:extLst>
                   <a:ext uri="{FF2B5EF4-FFF2-40B4-BE49-F238E27FC236}">
-                    <a16:creationId xmlns:a16="http://schemas.microsoft.com/office/drawing/2014/main" id="{02974CA7-F507-9A02-8D97-917DB28B3BBD}"/>
+                    <a16:creationId xmlns:a16="http://schemas.microsoft.com/office/drawing/2014/main" id="{748BF6F1-E6DE-8DE9-88FE-306701896414}"/>
                   </a:ext>
                 </a:extLst>
               </p:cNvPr>
-              <p:cNvCxnSpPr/>
+              <p:cNvSpPr/>
+              <p:nvPr/>
+            </p:nvSpPr>
+            <p:spPr>
+              <a:xfrm rot="16200000">
+                <a:off x="9237887" y="1191863"/>
+                <a:ext cx="495470" cy="1761294"/>
+              </a:xfrm>
+              <a:custGeom>
+                <a:avLst/>
+                <a:gdLst>
+                  <a:gd name="connsiteX0" fmla="*/ 10099 w 495470"/>
+                  <a:gd name="connsiteY0" fmla="*/ 177970 h 1761294"/>
+                  <a:gd name="connsiteX1" fmla="*/ 10099 w 495470"/>
+                  <a:gd name="connsiteY1" fmla="*/ 177970 h 1761294"/>
+                  <a:gd name="connsiteX2" fmla="*/ 10099 w 495470"/>
+                  <a:gd name="connsiteY2" fmla="*/ 1343984 h 1761294"/>
+                  <a:gd name="connsiteX3" fmla="*/ 40783 w 495470"/>
+                  <a:gd name="connsiteY3" fmla="*/ 1411490 h 1761294"/>
+                  <a:gd name="connsiteX4" fmla="*/ 89878 w 495470"/>
+                  <a:gd name="connsiteY4" fmla="*/ 1515817 h 1761294"/>
+                  <a:gd name="connsiteX5" fmla="*/ 102152 w 495470"/>
+                  <a:gd name="connsiteY5" fmla="*/ 1632418 h 1761294"/>
+                  <a:gd name="connsiteX6" fmla="*/ 108289 w 495470"/>
+                  <a:gd name="connsiteY6" fmla="*/ 1650829 h 1761294"/>
+                  <a:gd name="connsiteX7" fmla="*/ 59194 w 495470"/>
+                  <a:gd name="connsiteY7" fmla="*/ 1718335 h 1761294"/>
+                  <a:gd name="connsiteX8" fmla="*/ 65331 w 495470"/>
+                  <a:gd name="connsiteY8" fmla="*/ 1761294 h 1761294"/>
+                  <a:gd name="connsiteX9" fmla="*/ 120563 w 495470"/>
+                  <a:gd name="connsiteY9" fmla="*/ 1724472 h 1761294"/>
+                  <a:gd name="connsiteX10" fmla="*/ 157384 w 495470"/>
+                  <a:gd name="connsiteY10" fmla="*/ 1583323 h 1761294"/>
+                  <a:gd name="connsiteX11" fmla="*/ 237164 w 495470"/>
+                  <a:gd name="connsiteY11" fmla="*/ 1454448 h 1761294"/>
+                  <a:gd name="connsiteX12" fmla="*/ 267849 w 495470"/>
+                  <a:gd name="connsiteY12" fmla="*/ 1386942 h 1761294"/>
+                  <a:gd name="connsiteX13" fmla="*/ 280123 w 495470"/>
+                  <a:gd name="connsiteY13" fmla="*/ 1221245 h 1761294"/>
+                  <a:gd name="connsiteX14" fmla="*/ 316944 w 495470"/>
+                  <a:gd name="connsiteY14" fmla="*/ 1184424 h 1761294"/>
+                  <a:gd name="connsiteX15" fmla="*/ 347629 w 495470"/>
+                  <a:gd name="connsiteY15" fmla="*/ 1141465 h 1761294"/>
+                  <a:gd name="connsiteX16" fmla="*/ 408998 w 495470"/>
+                  <a:gd name="connsiteY16" fmla="*/ 1080096 h 1761294"/>
+                  <a:gd name="connsiteX17" fmla="*/ 439682 w 495470"/>
+                  <a:gd name="connsiteY17" fmla="*/ 1006453 h 1761294"/>
+                  <a:gd name="connsiteX18" fmla="*/ 482641 w 495470"/>
+                  <a:gd name="connsiteY18" fmla="*/ 926674 h 1761294"/>
+                  <a:gd name="connsiteX19" fmla="*/ 494915 w 495470"/>
+                  <a:gd name="connsiteY19" fmla="*/ 877578 h 1761294"/>
+                  <a:gd name="connsiteX20" fmla="*/ 476504 w 495470"/>
+                  <a:gd name="connsiteY20" fmla="*/ 760977 h 1761294"/>
+                  <a:gd name="connsiteX21" fmla="*/ 433546 w 495470"/>
+                  <a:gd name="connsiteY21" fmla="*/ 699608 h 1761294"/>
+                  <a:gd name="connsiteX22" fmla="*/ 408998 w 495470"/>
+                  <a:gd name="connsiteY22" fmla="*/ 613691 h 1761294"/>
+                  <a:gd name="connsiteX23" fmla="*/ 390587 w 495470"/>
+                  <a:gd name="connsiteY23" fmla="*/ 576869 h 1761294"/>
+                  <a:gd name="connsiteX24" fmla="*/ 372176 w 495470"/>
+                  <a:gd name="connsiteY24" fmla="*/ 552322 h 1761294"/>
+                  <a:gd name="connsiteX25" fmla="*/ 353766 w 495470"/>
+                  <a:gd name="connsiteY25" fmla="*/ 521637 h 1761294"/>
+                  <a:gd name="connsiteX26" fmla="*/ 304670 w 495470"/>
+                  <a:gd name="connsiteY26" fmla="*/ 478679 h 1761294"/>
+                  <a:gd name="connsiteX27" fmla="*/ 249438 w 495470"/>
+                  <a:gd name="connsiteY27" fmla="*/ 423447 h 1761294"/>
+                  <a:gd name="connsiteX28" fmla="*/ 194206 w 495470"/>
+                  <a:gd name="connsiteY28" fmla="*/ 355941 h 1761294"/>
+                  <a:gd name="connsiteX29" fmla="*/ 157384 w 495470"/>
+                  <a:gd name="connsiteY29" fmla="*/ 312982 h 1761294"/>
+                  <a:gd name="connsiteX30" fmla="*/ 83742 w 495470"/>
+                  <a:gd name="connsiteY30" fmla="*/ 257750 h 1761294"/>
+                  <a:gd name="connsiteX31" fmla="*/ 77605 w 495470"/>
+                  <a:gd name="connsiteY31" fmla="*/ 208655 h 1761294"/>
+                  <a:gd name="connsiteX32" fmla="*/ 65331 w 495470"/>
+                  <a:gd name="connsiteY32" fmla="*/ 153423 h 1761294"/>
+                  <a:gd name="connsiteX33" fmla="*/ 59194 w 495470"/>
+                  <a:gd name="connsiteY33" fmla="*/ 0 h 1761294"/>
+                  <a:gd name="connsiteX34" fmla="*/ 22372 w 495470"/>
+                  <a:gd name="connsiteY34" fmla="*/ 42958 h 1761294"/>
+                  <a:gd name="connsiteX35" fmla="*/ 16236 w 495470"/>
+                  <a:gd name="connsiteY35" fmla="*/ 141149 h 1761294"/>
+                  <a:gd name="connsiteX36" fmla="*/ 10099 w 495470"/>
+                  <a:gd name="connsiteY36" fmla="*/ 159559 h 1761294"/>
+                  <a:gd name="connsiteX37" fmla="*/ 10099 w 495470"/>
+                  <a:gd name="connsiteY37" fmla="*/ 177970 h 1761294"/>
+                </a:gdLst>
+                <a:ahLst/>
+                <a:cxnLst>
+                  <a:cxn ang="0">
+                    <a:pos x="connsiteX0" y="connsiteY0"/>
+                  </a:cxn>
+                  <a:cxn ang="0">
+                    <a:pos x="connsiteX1" y="connsiteY1"/>
+                  </a:cxn>
+                  <a:cxn ang="0">
+                    <a:pos x="connsiteX2" y="connsiteY2"/>
+                  </a:cxn>
+                  <a:cxn ang="0">
+                    <a:pos x="connsiteX3" y="connsiteY3"/>
+                  </a:cxn>
+                  <a:cxn ang="0">
+                    <a:pos x="connsiteX4" y="connsiteY4"/>
+                  </a:cxn>
+                  <a:cxn ang="0">
+                    <a:pos x="connsiteX5" y="connsiteY5"/>
+                  </a:cxn>
+                  <a:cxn ang="0">
+                    <a:pos x="connsiteX6" y="connsiteY6"/>
+                  </a:cxn>
+                  <a:cxn ang="0">
+                    <a:pos x="connsiteX7" y="connsiteY7"/>
+                  </a:cxn>
+                  <a:cxn ang="0">
+                    <a:pos x="connsiteX8" y="connsiteY8"/>
+                  </a:cxn>
+                  <a:cxn ang="0">
+                    <a:pos x="connsiteX9" y="connsiteY9"/>
+                  </a:cxn>
+                  <a:cxn ang="0">
+                    <a:pos x="connsiteX10" y="connsiteY10"/>
+                  </a:cxn>
+                  <a:cxn ang="0">
+                    <a:pos x="connsiteX11" y="connsiteY11"/>
+                  </a:cxn>
+                  <a:cxn ang="0">
+                    <a:pos x="connsiteX12" y="connsiteY12"/>
+                  </a:cxn>
+                  <a:cxn ang="0">
+                    <a:pos x="connsiteX13" y="connsiteY13"/>
+                  </a:cxn>
+                  <a:cxn ang="0">
+                    <a:pos x="connsiteX14" y="connsiteY14"/>
+                  </a:cxn>
+                  <a:cxn ang="0">
+                    <a:pos x="connsiteX15" y="connsiteY15"/>
+                  </a:cxn>
+                  <a:cxn ang="0">
+                    <a:pos x="connsiteX16" y="connsiteY16"/>
+                  </a:cxn>
+                  <a:cxn ang="0">
+                    <a:pos x="connsiteX17" y="connsiteY17"/>
+                  </a:cxn>
+                  <a:cxn ang="0">
+                    <a:pos x="connsiteX18" y="connsiteY18"/>
+                  </a:cxn>
+                  <a:cxn ang="0">
+                    <a:pos x="connsiteX19" y="connsiteY19"/>
+                  </a:cxn>
+                  <a:cxn ang="0">
+                    <a:pos x="connsiteX20" y="connsiteY20"/>
+                  </a:cxn>
+                  <a:cxn ang="0">
+                    <a:pos x="connsiteX21" y="connsiteY21"/>
+                  </a:cxn>
+                  <a:cxn ang="0">
+                    <a:pos x="connsiteX22" y="connsiteY22"/>
+                  </a:cxn>
+                  <a:cxn ang="0">
+                    <a:pos x="connsiteX23" y="connsiteY23"/>
+                  </a:cxn>
+                  <a:cxn ang="0">
+                    <a:pos x="connsiteX24" y="connsiteY24"/>
+                  </a:cxn>
+                  <a:cxn ang="0">
+                    <a:pos x="connsiteX25" y="connsiteY25"/>
+                  </a:cxn>
+                  <a:cxn ang="0">
+                    <a:pos x="connsiteX26" y="connsiteY26"/>
+                  </a:cxn>
+                  <a:cxn ang="0">
+                    <a:pos x="connsiteX27" y="connsiteY27"/>
+                  </a:cxn>
+                  <a:cxn ang="0">
+                    <a:pos x="connsiteX28" y="connsiteY28"/>
+                  </a:cxn>
+                  <a:cxn ang="0">
+                    <a:pos x="connsiteX29" y="connsiteY29"/>
+                  </a:cxn>
+                  <a:cxn ang="0">
+                    <a:pos x="connsiteX30" y="connsiteY30"/>
+                  </a:cxn>
+                  <a:cxn ang="0">
+                    <a:pos x="connsiteX31" y="connsiteY31"/>
+                  </a:cxn>
+                  <a:cxn ang="0">
+                    <a:pos x="connsiteX32" y="connsiteY32"/>
+                  </a:cxn>
+                  <a:cxn ang="0">
+                    <a:pos x="connsiteX33" y="connsiteY33"/>
+                  </a:cxn>
+                  <a:cxn ang="0">
+                    <a:pos x="connsiteX34" y="connsiteY34"/>
+                  </a:cxn>
+                  <a:cxn ang="0">
+                    <a:pos x="connsiteX35" y="connsiteY35"/>
+                  </a:cxn>
+                  <a:cxn ang="0">
+                    <a:pos x="connsiteX36" y="connsiteY36"/>
+                  </a:cxn>
+                  <a:cxn ang="0">
+                    <a:pos x="connsiteX37" y="connsiteY37"/>
+                  </a:cxn>
+                </a:cxnLst>
+                <a:rect l="l" t="t" r="r" b="b"/>
+                <a:pathLst>
+                  <a:path w="495470" h="1761294">
+                    <a:moveTo>
+                      <a:pt x="10099" y="177970"/>
+                    </a:moveTo>
+                    <a:lnTo>
+                      <a:pt x="10099" y="177970"/>
+                    </a:lnTo>
+                    <a:cubicBezTo>
+                      <a:pt x="1571" y="587321"/>
+                      <a:pt x="-7553" y="893850"/>
+                      <a:pt x="10099" y="1343984"/>
+                    </a:cubicBezTo>
+                    <a:cubicBezTo>
+                      <a:pt x="11068" y="1368682"/>
+                      <a:pt x="29729" y="1389382"/>
+                      <a:pt x="40783" y="1411490"/>
+                    </a:cubicBezTo>
+                    <a:cubicBezTo>
+                      <a:pt x="91708" y="1513341"/>
+                      <a:pt x="54320" y="1420994"/>
+                      <a:pt x="89878" y="1515817"/>
+                    </a:cubicBezTo>
+                    <a:cubicBezTo>
+                      <a:pt x="93519" y="1566791"/>
+                      <a:pt x="91561" y="1590054"/>
+                      <a:pt x="102152" y="1632418"/>
+                    </a:cubicBezTo>
+                    <a:cubicBezTo>
+                      <a:pt x="103721" y="1638694"/>
+                      <a:pt x="106243" y="1644692"/>
+                      <a:pt x="108289" y="1650829"/>
+                    </a:cubicBezTo>
+                    <a:cubicBezTo>
+                      <a:pt x="85896" y="1673223"/>
+                      <a:pt x="59194" y="1685191"/>
+                      <a:pt x="59194" y="1718335"/>
+                    </a:cubicBezTo>
+                    <a:cubicBezTo>
+                      <a:pt x="59194" y="1732800"/>
+                      <a:pt x="63285" y="1746974"/>
+                      <a:pt x="65331" y="1761294"/>
+                    </a:cubicBezTo>
+                    <a:cubicBezTo>
+                      <a:pt x="83742" y="1749020"/>
+                      <a:pt x="108068" y="1742734"/>
+                      <a:pt x="120563" y="1724472"/>
+                    </a:cubicBezTo>
+                    <a:cubicBezTo>
+                      <a:pt x="155338" y="1673647"/>
+                      <a:pt x="136587" y="1635317"/>
+                      <a:pt x="157384" y="1583323"/>
+                    </a:cubicBezTo>
+                    <a:cubicBezTo>
+                      <a:pt x="213185" y="1443819"/>
+                      <a:pt x="184591" y="1533308"/>
+                      <a:pt x="237164" y="1454448"/>
+                    </a:cubicBezTo>
+                    <a:cubicBezTo>
+                      <a:pt x="248834" y="1436943"/>
+                      <a:pt x="259845" y="1406951"/>
+                      <a:pt x="267849" y="1386942"/>
+                    </a:cubicBezTo>
+                    <a:cubicBezTo>
+                      <a:pt x="271940" y="1331710"/>
+                      <a:pt x="267075" y="1275070"/>
+                      <a:pt x="280123" y="1221245"/>
+                    </a:cubicBezTo>
+                    <a:cubicBezTo>
+                      <a:pt x="284212" y="1204376"/>
+                      <a:pt x="305732" y="1197675"/>
+                      <a:pt x="316944" y="1184424"/>
+                    </a:cubicBezTo>
+                    <a:cubicBezTo>
+                      <a:pt x="328311" y="1170990"/>
+                      <a:pt x="335986" y="1154660"/>
+                      <a:pt x="347629" y="1141465"/>
+                    </a:cubicBezTo>
+                    <a:cubicBezTo>
+                      <a:pt x="366769" y="1119772"/>
+                      <a:pt x="396060" y="1105971"/>
+                      <a:pt x="408998" y="1080096"/>
+                    </a:cubicBezTo>
+                    <a:cubicBezTo>
+                      <a:pt x="468436" y="961224"/>
+                      <a:pt x="389844" y="1122743"/>
+                      <a:pt x="439682" y="1006453"/>
+                    </a:cubicBezTo>
+                    <a:cubicBezTo>
+                      <a:pt x="454622" y="971593"/>
+                      <a:pt x="464558" y="956812"/>
+                      <a:pt x="482641" y="926674"/>
+                    </a:cubicBezTo>
+                    <a:cubicBezTo>
+                      <a:pt x="486732" y="910309"/>
+                      <a:pt x="494149" y="894430"/>
+                      <a:pt x="494915" y="877578"/>
+                    </a:cubicBezTo>
+                    <a:cubicBezTo>
+                      <a:pt x="496417" y="844530"/>
+                      <a:pt x="496210" y="793819"/>
+                      <a:pt x="476504" y="760977"/>
+                    </a:cubicBezTo>
+                    <a:cubicBezTo>
+                      <a:pt x="447125" y="712013"/>
+                      <a:pt x="456309" y="749688"/>
+                      <a:pt x="433546" y="699608"/>
+                    </a:cubicBezTo>
+                    <a:cubicBezTo>
+                      <a:pt x="415774" y="660509"/>
+                      <a:pt x="424623" y="657442"/>
+                      <a:pt x="408998" y="613691"/>
+                    </a:cubicBezTo>
+                    <a:cubicBezTo>
+                      <a:pt x="404382" y="600768"/>
+                      <a:pt x="397647" y="588636"/>
+                      <a:pt x="390587" y="576869"/>
+                    </a:cubicBezTo>
+                    <a:cubicBezTo>
+                      <a:pt x="385325" y="568099"/>
+                      <a:pt x="377849" y="560832"/>
+                      <a:pt x="372176" y="552322"/>
+                    </a:cubicBezTo>
+                    <a:cubicBezTo>
+                      <a:pt x="365560" y="542397"/>
+                      <a:pt x="360923" y="531179"/>
+                      <a:pt x="353766" y="521637"/>
+                    </a:cubicBezTo>
+                    <a:cubicBezTo>
+                      <a:pt x="341002" y="504618"/>
+                      <a:pt x="319630" y="492570"/>
+                      <a:pt x="304670" y="478679"/>
+                    </a:cubicBezTo>
+                    <a:cubicBezTo>
+                      <a:pt x="285591" y="460962"/>
+                      <a:pt x="265925" y="443598"/>
+                      <a:pt x="249438" y="423447"/>
+                    </a:cubicBezTo>
+                    <a:cubicBezTo>
+                      <a:pt x="231027" y="400945"/>
+                      <a:pt x="212819" y="378276"/>
+                      <a:pt x="194206" y="355941"/>
+                    </a:cubicBezTo>
+                    <a:cubicBezTo>
+                      <a:pt x="182132" y="341452"/>
+                      <a:pt x="172271" y="324561"/>
+                      <a:pt x="157384" y="312982"/>
+                    </a:cubicBezTo>
+                    <a:cubicBezTo>
+                      <a:pt x="96330" y="265496"/>
+                      <a:pt x="121558" y="282962"/>
+                      <a:pt x="83742" y="257750"/>
+                    </a:cubicBezTo>
+                    <a:cubicBezTo>
+                      <a:pt x="81696" y="241385"/>
+                      <a:pt x="80471" y="224896"/>
+                      <a:pt x="77605" y="208655"/>
+                    </a:cubicBezTo>
+                    <a:cubicBezTo>
+                      <a:pt x="74327" y="190082"/>
+                      <a:pt x="66989" y="172210"/>
+                      <a:pt x="65331" y="153423"/>
+                    </a:cubicBezTo>
+                    <a:cubicBezTo>
+                      <a:pt x="60832" y="102439"/>
+                      <a:pt x="61240" y="51141"/>
+                      <a:pt x="59194" y="0"/>
+                    </a:cubicBezTo>
+                    <a:cubicBezTo>
+                      <a:pt x="51920" y="7273"/>
+                      <a:pt x="24340" y="33116"/>
+                      <a:pt x="22372" y="42958"/>
+                    </a:cubicBezTo>
+                    <a:cubicBezTo>
+                      <a:pt x="15941" y="75115"/>
+                      <a:pt x="19669" y="108535"/>
+                      <a:pt x="16236" y="141149"/>
+                    </a:cubicBezTo>
+                    <a:cubicBezTo>
+                      <a:pt x="15559" y="147582"/>
+                      <a:pt x="10901" y="153140"/>
+                      <a:pt x="10099" y="159559"/>
+                    </a:cubicBezTo>
+                    <a:cubicBezTo>
+                      <a:pt x="8830" y="169708"/>
+                      <a:pt x="10099" y="174902"/>
+                      <a:pt x="10099" y="177970"/>
+                    </a:cubicBezTo>
+                    <a:close/>
+                  </a:path>
+                </a:pathLst>
+              </a:custGeom>
+              <a:solidFill>
+                <a:schemeClr val="bg1"/>
+              </a:solidFill>
+              <a:ln>
+                <a:solidFill>
+                  <a:schemeClr val="accent6">
+                    <a:lumMod val="75000"/>
+                  </a:schemeClr>
+                </a:solidFill>
+              </a:ln>
+            </p:spPr>
+            <p:style>
+              <a:lnRef idx="2">
+                <a:schemeClr val="accent1">
+                  <a:shade val="15000"/>
+                </a:schemeClr>
+              </a:lnRef>
+              <a:fillRef idx="1">
+                <a:schemeClr val="accent1"/>
+              </a:fillRef>
+              <a:effectRef idx="0">
+                <a:schemeClr val="accent1"/>
+              </a:effectRef>
+              <a:fontRef idx="minor">
+                <a:schemeClr val="lt1"/>
+              </a:fontRef>
+            </p:style>
+            <p:txBody>
+              <a:bodyPr rtlCol="0" anchor="ctr"/>
+              <a:lstStyle/>
+              <a:p>
+                <a:pPr algn="ctr"/>
+                <a:endParaRPr lang="en-US"/>
+              </a:p>
+            </p:txBody>
+          </p:sp>
+          <p:cxnSp>
+            <p:nvCxnSpPr>
+              <p:cNvPr id="30" name="Straight Connector 29">
+                <a:extLst>
+                  <a:ext uri="{FF2B5EF4-FFF2-40B4-BE49-F238E27FC236}">
+                    <a16:creationId xmlns:a16="http://schemas.microsoft.com/office/drawing/2014/main" id="{D1BCF5BA-19D0-11B6-948C-1529604AAE97}"/>
+                  </a:ext>
+                </a:extLst>
+              </p:cNvPr>
+              <p:cNvCxnSpPr>
+                <a:cxnSpLocks/>
+              </p:cNvCxnSpPr>
               <p:nvPr/>
             </p:nvCxnSpPr>
             <p:spPr>
-              <a:xfrm>
-                <a:off x="10231909" y="863519"/>
-                <a:ext cx="831922" cy="418758"/>
+              <a:xfrm rot="5400000">
+                <a:off x="9499471" y="4928093"/>
+                <a:ext cx="0" cy="1115133"/>
+              </a:xfrm>
+              <a:prstGeom prst="line">
+                <a:avLst/>
+              </a:prstGeom>
+            </p:spPr>
+            <p:style>
+              <a:lnRef idx="2">
+                <a:schemeClr val="accent1"/>
+              </a:lnRef>
+              <a:fillRef idx="0">
+                <a:schemeClr val="accent1"/>
+              </a:fillRef>
+              <a:effectRef idx="1">
+                <a:schemeClr val="accent1"/>
+              </a:effectRef>
+              <a:fontRef idx="minor">
+                <a:schemeClr val="tx1"/>
+              </a:fontRef>
+            </p:style>
+          </p:cxnSp>
+          <p:sp>
+            <p:nvSpPr>
+              <p:cNvPr id="28" name="Rectangle 27">
+                <a:extLst>
+                  <a:ext uri="{FF2B5EF4-FFF2-40B4-BE49-F238E27FC236}">
+                    <a16:creationId xmlns:a16="http://schemas.microsoft.com/office/drawing/2014/main" id="{24C12165-311E-22D0-BBDE-85030C1B31A9}"/>
+                  </a:ext>
+                </a:extLst>
+              </p:cNvPr>
+              <p:cNvSpPr/>
+              <p:nvPr/>
+            </p:nvSpPr>
+            <p:spPr>
+              <a:xfrm rot="5400000">
+                <a:off x="9439594" y="5326099"/>
+                <a:ext cx="104328" cy="325257"/>
+              </a:xfrm>
+              <a:prstGeom prst="rect">
+                <a:avLst/>
+              </a:prstGeom>
+              <a:solidFill>
+                <a:schemeClr val="bg1"/>
+              </a:solidFill>
+              <a:ln>
+                <a:noFill/>
+              </a:ln>
+            </p:spPr>
+            <p:style>
+              <a:lnRef idx="2">
+                <a:schemeClr val="accent1">
+                  <a:shade val="15000"/>
+                </a:schemeClr>
+              </a:lnRef>
+              <a:fillRef idx="1">
+                <a:schemeClr val="accent1"/>
+              </a:fillRef>
+              <a:effectRef idx="0">
+                <a:schemeClr val="accent1"/>
+              </a:effectRef>
+              <a:fontRef idx="minor">
+                <a:schemeClr val="lt1"/>
+              </a:fontRef>
+            </p:style>
+            <p:txBody>
+              <a:bodyPr rtlCol="0" anchor="ctr"/>
+              <a:lstStyle/>
+              <a:p>
+                <a:pPr algn="ctr"/>
+                <a:endParaRPr lang="en-US"/>
+              </a:p>
+            </p:txBody>
+          </p:sp>
+          <p:cxnSp>
+            <p:nvCxnSpPr>
+              <p:cNvPr id="42" name="Straight Connector 41">
+                <a:extLst>
+                  <a:ext uri="{FF2B5EF4-FFF2-40B4-BE49-F238E27FC236}">
+                    <a16:creationId xmlns:a16="http://schemas.microsoft.com/office/drawing/2014/main" id="{0D582AEF-2A78-1C00-9B67-E7D7EBDF96D5}"/>
+                  </a:ext>
+                </a:extLst>
+              </p:cNvPr>
+              <p:cNvCxnSpPr>
+                <a:cxnSpLocks/>
+                <a:stCxn id="19" idx="7"/>
+                <a:endCxn id="20" idx="1"/>
+              </p:cNvCxnSpPr>
+              <p:nvPr/>
+            </p:nvCxnSpPr>
+            <p:spPr>
+              <a:xfrm rot="5400000">
+                <a:off x="9144568" y="3818975"/>
+                <a:ext cx="1519622" cy="0"/>
               </a:xfrm>
               <a:prstGeom prst="line">
                 <a:avLst/>
@@ -4500,22 +3958,73 @@
           </p:cxnSp>
           <p:cxnSp>
             <p:nvCxnSpPr>
-              <p:cNvPr id="54" name="Straight Connector 53">
+              <p:cNvPr id="45" name="Straight Connector 44">
                 <a:extLst>
                   <a:ext uri="{FF2B5EF4-FFF2-40B4-BE49-F238E27FC236}">
-                    <a16:creationId xmlns:a16="http://schemas.microsoft.com/office/drawing/2014/main" id="{3113D7F3-9753-B864-F0AA-FE2BA84E931E}"/>
+                    <a16:creationId xmlns:a16="http://schemas.microsoft.com/office/drawing/2014/main" id="{2BC41E2F-38C5-BD63-2214-55B78E41CD1E}"/>
                   </a:ext>
                 </a:extLst>
               </p:cNvPr>
               <p:cNvCxnSpPr>
                 <a:cxnSpLocks/>
+                <a:stCxn id="20" idx="7"/>
               </p:cNvCxnSpPr>
               <p:nvPr/>
             </p:nvCxnSpPr>
             <p:spPr>
-              <a:xfrm flipV="1">
-                <a:off x="10231909" y="1282277"/>
-                <a:ext cx="831922" cy="418756"/>
+              <a:xfrm flipH="1">
+                <a:off x="9236096" y="4708970"/>
+                <a:ext cx="668283" cy="1280657"/>
+              </a:xfrm>
+              <a:prstGeom prst="line">
+                <a:avLst/>
+              </a:prstGeom>
+              <a:ln>
+                <a:solidFill>
+                  <a:schemeClr val="accent6">
+                    <a:lumMod val="60000"/>
+                    <a:lumOff val="40000"/>
+                  </a:schemeClr>
+                </a:solidFill>
+                <a:headEnd type="none" w="med" len="med"/>
+                <a:tailEnd type="triangle" w="med" len="med"/>
+              </a:ln>
+            </p:spPr>
+            <p:style>
+              <a:lnRef idx="2">
+                <a:schemeClr val="accent1"/>
+              </a:lnRef>
+              <a:fillRef idx="0">
+                <a:schemeClr val="accent1"/>
+              </a:fillRef>
+              <a:effectRef idx="1">
+                <a:schemeClr val="accent1"/>
+              </a:effectRef>
+              <a:fontRef idx="minor">
+                <a:schemeClr val="tx1"/>
+              </a:fontRef>
+            </p:style>
+          </p:cxnSp>
+          <p:cxnSp>
+            <p:nvCxnSpPr>
+              <p:cNvPr id="46" name="Straight Connector 45">
+                <a:extLst>
+                  <a:ext uri="{FF2B5EF4-FFF2-40B4-BE49-F238E27FC236}">
+                    <a16:creationId xmlns:a16="http://schemas.microsoft.com/office/drawing/2014/main" id="{6AEC7E96-164B-3FA2-4FE2-9B01608890F8}"/>
+                  </a:ext>
+                </a:extLst>
+              </p:cNvPr>
+              <p:cNvCxnSpPr>
+                <a:cxnSpLocks/>
+                <a:stCxn id="19" idx="5"/>
+                <a:endCxn id="20" idx="3"/>
+              </p:cNvCxnSpPr>
+              <p:nvPr/>
+            </p:nvCxnSpPr>
+            <p:spPr>
+              <a:xfrm rot="5400000">
+                <a:off x="8307054" y="3818975"/>
+                <a:ext cx="1519622" cy="0"/>
               </a:xfrm>
               <a:prstGeom prst="line">
                 <a:avLst/>
@@ -4544,169 +4053,263 @@
               </a:fontRef>
             </p:style>
           </p:cxnSp>
-        </p:grpSp>
-        <p:cxnSp>
-          <p:nvCxnSpPr>
-            <p:cNvPr id="65" name="Straight Connector 64">
-              <a:extLst>
-                <a:ext uri="{FF2B5EF4-FFF2-40B4-BE49-F238E27FC236}">
-                  <a16:creationId xmlns:a16="http://schemas.microsoft.com/office/drawing/2014/main" id="{F8A0C71F-761C-A3E3-87B8-6496BFA97082}"/>
-                </a:ext>
-              </a:extLst>
-            </p:cNvPr>
-            <p:cNvCxnSpPr>
-              <a:cxnSpLocks/>
-            </p:cNvCxnSpPr>
-            <p:nvPr/>
-          </p:nvCxnSpPr>
-          <p:spPr>
-            <a:xfrm>
-              <a:off x="8438255" y="2052181"/>
-              <a:ext cx="2178604" cy="81726"/>
-            </a:xfrm>
-            <a:prstGeom prst="line">
-              <a:avLst/>
-            </a:prstGeom>
-            <a:ln>
-              <a:solidFill>
-                <a:schemeClr val="tx1"/>
-              </a:solidFill>
-              <a:prstDash val="dash"/>
-            </a:ln>
-          </p:spPr>
-          <p:style>
-            <a:lnRef idx="2">
-              <a:schemeClr val="accent1"/>
-            </a:lnRef>
-            <a:fillRef idx="0">
-              <a:schemeClr val="accent1"/>
-            </a:fillRef>
-            <a:effectRef idx="1">
-              <a:schemeClr val="accent1"/>
-            </a:effectRef>
-            <a:fontRef idx="minor">
-              <a:schemeClr val="tx1"/>
-            </a:fontRef>
-          </p:style>
-        </p:cxnSp>
-        <p:cxnSp>
-          <p:nvCxnSpPr>
-            <p:cNvPr id="70" name="Straight Arrow Connector 69">
-              <a:extLst>
-                <a:ext uri="{FF2B5EF4-FFF2-40B4-BE49-F238E27FC236}">
-                  <a16:creationId xmlns:a16="http://schemas.microsoft.com/office/drawing/2014/main" id="{B05B4C0F-72A1-5878-738C-805ED6F0E565}"/>
-                </a:ext>
-              </a:extLst>
-            </p:cNvPr>
-            <p:cNvCxnSpPr>
-              <a:stCxn id="19" idx="5"/>
-            </p:cNvCxnSpPr>
-            <p:nvPr/>
-          </p:nvCxnSpPr>
-          <p:spPr>
-            <a:xfrm>
-              <a:off x="9066865" y="3059164"/>
-              <a:ext cx="0" cy="874597"/>
-            </a:xfrm>
-            <a:prstGeom prst="straightConnector1">
-              <a:avLst/>
-            </a:prstGeom>
-            <a:ln>
-              <a:solidFill>
-                <a:schemeClr val="accent6">
-                  <a:lumMod val="60000"/>
-                  <a:lumOff val="40000"/>
-                </a:schemeClr>
-              </a:solidFill>
-              <a:tailEnd type="triangle"/>
-            </a:ln>
-          </p:spPr>
-          <p:style>
-            <a:lnRef idx="2">
-              <a:schemeClr val="accent1"/>
-            </a:lnRef>
-            <a:fillRef idx="0">
-              <a:schemeClr val="accent1"/>
-            </a:fillRef>
-            <a:effectRef idx="1">
-              <a:schemeClr val="accent1"/>
-            </a:effectRef>
-            <a:fontRef idx="minor">
-              <a:schemeClr val="tx1"/>
-            </a:fontRef>
-          </p:style>
-        </p:cxnSp>
-        <p:cxnSp>
-          <p:nvCxnSpPr>
-            <p:cNvPr id="71" name="Straight Arrow Connector 70">
-              <a:extLst>
-                <a:ext uri="{FF2B5EF4-FFF2-40B4-BE49-F238E27FC236}">
-                  <a16:creationId xmlns:a16="http://schemas.microsoft.com/office/drawing/2014/main" id="{6FBCAE29-970F-10B5-D09D-7FAF766953B3}"/>
-                </a:ext>
-              </a:extLst>
-            </p:cNvPr>
-            <p:cNvCxnSpPr/>
-            <p:nvPr/>
-          </p:nvCxnSpPr>
-          <p:spPr>
-            <a:xfrm>
-              <a:off x="9904379" y="3032059"/>
-              <a:ext cx="0" cy="874597"/>
-            </a:xfrm>
-            <a:prstGeom prst="straightConnector1">
-              <a:avLst/>
-            </a:prstGeom>
-            <a:ln>
-              <a:solidFill>
-                <a:schemeClr val="accent6">
-                  <a:lumMod val="60000"/>
-                  <a:lumOff val="40000"/>
-                </a:schemeClr>
-              </a:solidFill>
-              <a:tailEnd type="triangle"/>
-            </a:ln>
-          </p:spPr>
-          <p:style>
-            <a:lnRef idx="2">
-              <a:schemeClr val="accent1"/>
-            </a:lnRef>
-            <a:fillRef idx="0">
-              <a:schemeClr val="accent1"/>
-            </a:fillRef>
-            <a:effectRef idx="1">
-              <a:schemeClr val="accent1"/>
-            </a:effectRef>
-            <a:fontRef idx="minor">
-              <a:schemeClr val="tx1"/>
-            </a:fontRef>
-          </p:style>
-        </p:cxnSp>
-        <p:grpSp>
-          <p:nvGrpSpPr>
-            <p:cNvPr id="83" name="Group 82">
-              <a:extLst>
-                <a:ext uri="{FF2B5EF4-FFF2-40B4-BE49-F238E27FC236}">
-                  <a16:creationId xmlns:a16="http://schemas.microsoft.com/office/drawing/2014/main" id="{AAC32E6F-8E65-D30F-5B0B-74702BDD17A8}"/>
-                </a:ext>
-              </a:extLst>
-            </p:cNvPr>
-            <p:cNvGrpSpPr/>
-            <p:nvPr/>
-          </p:nvGrpSpPr>
-          <p:grpSpPr>
-            <a:xfrm rot="5400000" flipH="1">
-              <a:off x="8969733" y="1975026"/>
-              <a:ext cx="1031775" cy="837514"/>
-              <a:chOff x="10231909" y="863519"/>
-              <a:chExt cx="831922" cy="837514"/>
-            </a:xfrm>
-          </p:grpSpPr>
           <p:cxnSp>
             <p:nvCxnSpPr>
-              <p:cNvPr id="89" name="Straight Connector 88">
+              <p:cNvPr id="50" name="Straight Connector 49">
                 <a:extLst>
                   <a:ext uri="{FF2B5EF4-FFF2-40B4-BE49-F238E27FC236}">
-                    <a16:creationId xmlns:a16="http://schemas.microsoft.com/office/drawing/2014/main" id="{4BE03F26-A0E2-CEBC-79EE-3D63518A05C4}"/>
+                    <a16:creationId xmlns:a16="http://schemas.microsoft.com/office/drawing/2014/main" id="{07D150F7-B379-471B-0445-738020D15099}"/>
+                  </a:ext>
+                </a:extLst>
+              </p:cNvPr>
+              <p:cNvCxnSpPr>
+                <a:cxnSpLocks/>
+                <a:stCxn id="20" idx="5"/>
+              </p:cNvCxnSpPr>
+              <p:nvPr/>
+            </p:nvCxnSpPr>
+            <p:spPr>
+              <a:xfrm>
+                <a:off x="9066865" y="4708970"/>
+                <a:ext cx="693474" cy="1280657"/>
+              </a:xfrm>
+              <a:prstGeom prst="line">
+                <a:avLst/>
+              </a:prstGeom>
+              <a:ln>
+                <a:solidFill>
+                  <a:schemeClr val="accent6">
+                    <a:lumMod val="60000"/>
+                    <a:lumOff val="40000"/>
+                  </a:schemeClr>
+                </a:solidFill>
+                <a:headEnd type="none" w="med" len="med"/>
+                <a:tailEnd type="triangle" w="med" len="med"/>
+              </a:ln>
+            </p:spPr>
+            <p:style>
+              <a:lnRef idx="2">
+                <a:schemeClr val="accent1"/>
+              </a:lnRef>
+              <a:fillRef idx="0">
+                <a:schemeClr val="accent1"/>
+              </a:fillRef>
+              <a:effectRef idx="1">
+                <a:schemeClr val="accent1"/>
+              </a:effectRef>
+              <a:fontRef idx="minor">
+                <a:schemeClr val="tx1"/>
+              </a:fontRef>
+            </p:style>
+          </p:cxnSp>
+          <p:grpSp>
+            <p:nvGrpSpPr>
+              <p:cNvPr id="55" name="Group 54">
+                <a:extLst>
+                  <a:ext uri="{FF2B5EF4-FFF2-40B4-BE49-F238E27FC236}">
+                    <a16:creationId xmlns:a16="http://schemas.microsoft.com/office/drawing/2014/main" id="{F116F7C9-A9E4-7CB0-ED71-8CB0E55383ED}"/>
+                  </a:ext>
+                </a:extLst>
+              </p:cNvPr>
+              <p:cNvGrpSpPr/>
+              <p:nvPr/>
+            </p:nvGrpSpPr>
+            <p:grpSpPr>
+              <a:xfrm rot="5400000" flipH="1">
+                <a:off x="9069661" y="2094262"/>
+                <a:ext cx="831922" cy="837514"/>
+                <a:chOff x="10231909" y="863519"/>
+                <a:chExt cx="831922" cy="837514"/>
+              </a:xfrm>
+            </p:grpSpPr>
+            <p:cxnSp>
+              <p:nvCxnSpPr>
+                <p:cNvPr id="53" name="Straight Connector 52">
+                  <a:extLst>
+                    <a:ext uri="{FF2B5EF4-FFF2-40B4-BE49-F238E27FC236}">
+                      <a16:creationId xmlns:a16="http://schemas.microsoft.com/office/drawing/2014/main" id="{02974CA7-F507-9A02-8D97-917DB28B3BBD}"/>
+                    </a:ext>
+                  </a:extLst>
+                </p:cNvPr>
+                <p:cNvCxnSpPr/>
+                <p:nvPr/>
+              </p:nvCxnSpPr>
+              <p:spPr>
+                <a:xfrm>
+                  <a:off x="10231909" y="863519"/>
+                  <a:ext cx="831922" cy="418758"/>
+                </a:xfrm>
+                <a:prstGeom prst="line">
+                  <a:avLst/>
+                </a:prstGeom>
+                <a:ln>
+                  <a:solidFill>
+                    <a:schemeClr val="accent6">
+                      <a:lumMod val="60000"/>
+                      <a:lumOff val="40000"/>
+                    </a:schemeClr>
+                  </a:solidFill>
+                </a:ln>
+              </p:spPr>
+              <p:style>
+                <a:lnRef idx="2">
+                  <a:schemeClr val="accent1"/>
+                </a:lnRef>
+                <a:fillRef idx="0">
+                  <a:schemeClr val="accent1"/>
+                </a:fillRef>
+                <a:effectRef idx="1">
+                  <a:schemeClr val="accent1"/>
+                </a:effectRef>
+                <a:fontRef idx="minor">
+                  <a:schemeClr val="tx1"/>
+                </a:fontRef>
+              </p:style>
+            </p:cxnSp>
+            <p:cxnSp>
+              <p:nvCxnSpPr>
+                <p:cNvPr id="54" name="Straight Connector 53">
+                  <a:extLst>
+                    <a:ext uri="{FF2B5EF4-FFF2-40B4-BE49-F238E27FC236}">
+                      <a16:creationId xmlns:a16="http://schemas.microsoft.com/office/drawing/2014/main" id="{3113D7F3-9753-B864-F0AA-FE2BA84E931E}"/>
+                    </a:ext>
+                  </a:extLst>
+                </p:cNvPr>
+                <p:cNvCxnSpPr>
+                  <a:cxnSpLocks/>
+                </p:cNvCxnSpPr>
+                <p:nvPr/>
+              </p:nvCxnSpPr>
+              <p:spPr>
+                <a:xfrm flipV="1">
+                  <a:off x="10231909" y="1282277"/>
+                  <a:ext cx="831922" cy="418756"/>
+                </a:xfrm>
+                <a:prstGeom prst="line">
+                  <a:avLst/>
+                </a:prstGeom>
+                <a:ln>
+                  <a:solidFill>
+                    <a:schemeClr val="accent6">
+                      <a:lumMod val="60000"/>
+                      <a:lumOff val="40000"/>
+                    </a:schemeClr>
+                  </a:solidFill>
+                </a:ln>
+              </p:spPr>
+              <p:style>
+                <a:lnRef idx="2">
+                  <a:schemeClr val="accent1"/>
+                </a:lnRef>
+                <a:fillRef idx="0">
+                  <a:schemeClr val="accent1"/>
+                </a:fillRef>
+                <a:effectRef idx="1">
+                  <a:schemeClr val="accent1"/>
+                </a:effectRef>
+                <a:fontRef idx="minor">
+                  <a:schemeClr val="tx1"/>
+                </a:fontRef>
+              </p:style>
+            </p:cxnSp>
+          </p:grpSp>
+          <p:cxnSp>
+            <p:nvCxnSpPr>
+              <p:cNvPr id="65" name="Straight Connector 64">
+                <a:extLst>
+                  <a:ext uri="{FF2B5EF4-FFF2-40B4-BE49-F238E27FC236}">
+                    <a16:creationId xmlns:a16="http://schemas.microsoft.com/office/drawing/2014/main" id="{F8A0C71F-761C-A3E3-87B8-6496BFA97082}"/>
+                  </a:ext>
+                </a:extLst>
+              </p:cNvPr>
+              <p:cNvCxnSpPr>
+                <a:cxnSpLocks/>
+              </p:cNvCxnSpPr>
+              <p:nvPr/>
+            </p:nvCxnSpPr>
+            <p:spPr>
+              <a:xfrm>
+                <a:off x="8438255" y="2052181"/>
+                <a:ext cx="2178604" cy="81726"/>
+              </a:xfrm>
+              <a:prstGeom prst="line">
+                <a:avLst/>
+              </a:prstGeom>
+              <a:ln>
+                <a:solidFill>
+                  <a:schemeClr val="tx1"/>
+                </a:solidFill>
+                <a:prstDash val="dash"/>
+              </a:ln>
+            </p:spPr>
+            <p:style>
+              <a:lnRef idx="2">
+                <a:schemeClr val="accent1"/>
+              </a:lnRef>
+              <a:fillRef idx="0">
+                <a:schemeClr val="accent1"/>
+              </a:fillRef>
+              <a:effectRef idx="1">
+                <a:schemeClr val="accent1"/>
+              </a:effectRef>
+              <a:fontRef idx="minor">
+                <a:schemeClr val="tx1"/>
+              </a:fontRef>
+            </p:style>
+          </p:cxnSp>
+          <p:cxnSp>
+            <p:nvCxnSpPr>
+              <p:cNvPr id="70" name="Straight Arrow Connector 69">
+                <a:extLst>
+                  <a:ext uri="{FF2B5EF4-FFF2-40B4-BE49-F238E27FC236}">
+                    <a16:creationId xmlns:a16="http://schemas.microsoft.com/office/drawing/2014/main" id="{B05B4C0F-72A1-5878-738C-805ED6F0E565}"/>
+                  </a:ext>
+                </a:extLst>
+              </p:cNvPr>
+              <p:cNvCxnSpPr>
+                <a:stCxn id="19" idx="5"/>
+              </p:cNvCxnSpPr>
+              <p:nvPr/>
+            </p:nvCxnSpPr>
+            <p:spPr>
+              <a:xfrm>
+                <a:off x="9066865" y="3059164"/>
+                <a:ext cx="0" cy="874597"/>
+              </a:xfrm>
+              <a:prstGeom prst="straightConnector1">
+                <a:avLst/>
+              </a:prstGeom>
+              <a:ln>
+                <a:solidFill>
+                  <a:schemeClr val="accent6">
+                    <a:lumMod val="60000"/>
+                    <a:lumOff val="40000"/>
+                  </a:schemeClr>
+                </a:solidFill>
+                <a:tailEnd type="triangle"/>
+              </a:ln>
+            </p:spPr>
+            <p:style>
+              <a:lnRef idx="2">
+                <a:schemeClr val="accent1"/>
+              </a:lnRef>
+              <a:fillRef idx="0">
+                <a:schemeClr val="accent1"/>
+              </a:fillRef>
+              <a:effectRef idx="1">
+                <a:schemeClr val="accent1"/>
+              </a:effectRef>
+              <a:fontRef idx="minor">
+                <a:schemeClr val="tx1"/>
+              </a:fontRef>
+            </p:style>
+          </p:cxnSp>
+          <p:cxnSp>
+            <p:nvCxnSpPr>
+              <p:cNvPr id="71" name="Straight Arrow Connector 70">
+                <a:extLst>
+                  <a:ext uri="{FF2B5EF4-FFF2-40B4-BE49-F238E27FC236}">
+                    <a16:creationId xmlns:a16="http://schemas.microsoft.com/office/drawing/2014/main" id="{6FBCAE29-970F-10B5-D09D-7FAF766953B3}"/>
                   </a:ext>
                 </a:extLst>
               </p:cNvPr>
@@ -4715,8 +4318,166 @@
             </p:nvCxnSpPr>
             <p:spPr>
               <a:xfrm>
-                <a:off x="10231909" y="863519"/>
-                <a:ext cx="831922" cy="418758"/>
+                <a:off x="9904379" y="3032059"/>
+                <a:ext cx="0" cy="874597"/>
+              </a:xfrm>
+              <a:prstGeom prst="straightConnector1">
+                <a:avLst/>
+              </a:prstGeom>
+              <a:ln>
+                <a:solidFill>
+                  <a:schemeClr val="accent6">
+                    <a:lumMod val="60000"/>
+                    <a:lumOff val="40000"/>
+                  </a:schemeClr>
+                </a:solidFill>
+                <a:tailEnd type="triangle"/>
+              </a:ln>
+            </p:spPr>
+            <p:style>
+              <a:lnRef idx="2">
+                <a:schemeClr val="accent1"/>
+              </a:lnRef>
+              <a:fillRef idx="0">
+                <a:schemeClr val="accent1"/>
+              </a:fillRef>
+              <a:effectRef idx="1">
+                <a:schemeClr val="accent1"/>
+              </a:effectRef>
+              <a:fontRef idx="minor">
+                <a:schemeClr val="tx1"/>
+              </a:fontRef>
+            </p:style>
+          </p:cxnSp>
+          <p:grpSp>
+            <p:nvGrpSpPr>
+              <p:cNvPr id="83" name="Group 82">
+                <a:extLst>
+                  <a:ext uri="{FF2B5EF4-FFF2-40B4-BE49-F238E27FC236}">
+                    <a16:creationId xmlns:a16="http://schemas.microsoft.com/office/drawing/2014/main" id="{AAC32E6F-8E65-D30F-5B0B-74702BDD17A8}"/>
+                  </a:ext>
+                </a:extLst>
+              </p:cNvPr>
+              <p:cNvGrpSpPr/>
+              <p:nvPr/>
+            </p:nvGrpSpPr>
+            <p:grpSpPr>
+              <a:xfrm rot="5400000" flipH="1">
+                <a:off x="8969733" y="1975026"/>
+                <a:ext cx="1031775" cy="837514"/>
+                <a:chOff x="10231909" y="863519"/>
+                <a:chExt cx="831922" cy="837514"/>
+              </a:xfrm>
+            </p:grpSpPr>
+            <p:cxnSp>
+              <p:nvCxnSpPr>
+                <p:cNvPr id="89" name="Straight Connector 88">
+                  <a:extLst>
+                    <a:ext uri="{FF2B5EF4-FFF2-40B4-BE49-F238E27FC236}">
+                      <a16:creationId xmlns:a16="http://schemas.microsoft.com/office/drawing/2014/main" id="{4BE03F26-A0E2-CEBC-79EE-3D63518A05C4}"/>
+                    </a:ext>
+                  </a:extLst>
+                </p:cNvPr>
+                <p:cNvCxnSpPr/>
+                <p:nvPr/>
+              </p:nvCxnSpPr>
+              <p:spPr>
+                <a:xfrm>
+                  <a:off x="10231909" y="863519"/>
+                  <a:ext cx="831922" cy="418758"/>
+                </a:xfrm>
+                <a:prstGeom prst="line">
+                  <a:avLst/>
+                </a:prstGeom>
+                <a:ln>
+                  <a:solidFill>
+                    <a:schemeClr val="accent6">
+                      <a:lumMod val="40000"/>
+                      <a:lumOff val="60000"/>
+                    </a:schemeClr>
+                  </a:solidFill>
+                </a:ln>
+              </p:spPr>
+              <p:style>
+                <a:lnRef idx="2">
+                  <a:schemeClr val="accent1"/>
+                </a:lnRef>
+                <a:fillRef idx="0">
+                  <a:schemeClr val="accent1"/>
+                </a:fillRef>
+                <a:effectRef idx="1">
+                  <a:schemeClr val="accent1"/>
+                </a:effectRef>
+                <a:fontRef idx="minor">
+                  <a:schemeClr val="tx1"/>
+                </a:fontRef>
+              </p:style>
+            </p:cxnSp>
+            <p:cxnSp>
+              <p:nvCxnSpPr>
+                <p:cNvPr id="90" name="Straight Connector 89">
+                  <a:extLst>
+                    <a:ext uri="{FF2B5EF4-FFF2-40B4-BE49-F238E27FC236}">
+                      <a16:creationId xmlns:a16="http://schemas.microsoft.com/office/drawing/2014/main" id="{E8CF7D75-30FC-50DF-FF88-F7908A3BD986}"/>
+                    </a:ext>
+                  </a:extLst>
+                </p:cNvPr>
+                <p:cNvCxnSpPr>
+                  <a:cxnSpLocks/>
+                </p:cNvCxnSpPr>
+                <p:nvPr/>
+              </p:nvCxnSpPr>
+              <p:spPr>
+                <a:xfrm flipV="1">
+                  <a:off x="10231909" y="1282277"/>
+                  <a:ext cx="831922" cy="418756"/>
+                </a:xfrm>
+                <a:prstGeom prst="line">
+                  <a:avLst/>
+                </a:prstGeom>
+                <a:ln>
+                  <a:solidFill>
+                    <a:schemeClr val="accent6">
+                      <a:lumMod val="40000"/>
+                      <a:lumOff val="60000"/>
+                    </a:schemeClr>
+                  </a:solidFill>
+                </a:ln>
+              </p:spPr>
+              <p:style>
+                <a:lnRef idx="2">
+                  <a:schemeClr val="accent1"/>
+                </a:lnRef>
+                <a:fillRef idx="0">
+                  <a:schemeClr val="accent1"/>
+                </a:fillRef>
+                <a:effectRef idx="1">
+                  <a:schemeClr val="accent1"/>
+                </a:effectRef>
+                <a:fontRef idx="minor">
+                  <a:schemeClr val="tx1"/>
+                </a:fontRef>
+              </p:style>
+            </p:cxnSp>
+          </p:grpSp>
+          <p:cxnSp>
+            <p:nvCxnSpPr>
+              <p:cNvPr id="91" name="Straight Connector 90">
+                <a:extLst>
+                  <a:ext uri="{FF2B5EF4-FFF2-40B4-BE49-F238E27FC236}">
+                    <a16:creationId xmlns:a16="http://schemas.microsoft.com/office/drawing/2014/main" id="{8DF66E48-5659-3929-B8ED-74A3445B9838}"/>
+                  </a:ext>
+                </a:extLst>
+              </p:cNvPr>
+              <p:cNvCxnSpPr>
+                <a:cxnSpLocks/>
+              </p:cNvCxnSpPr>
+              <p:nvPr/>
+            </p:nvCxnSpPr>
+            <p:spPr>
+              <a:xfrm flipH="1">
+                <a:off x="9730925" y="3059164"/>
+                <a:ext cx="175074" cy="1519622"/>
               </a:xfrm>
               <a:prstGeom prst="line">
                 <a:avLst/>
@@ -4747,10 +4508,10 @@
           </p:cxnSp>
           <p:cxnSp>
             <p:nvCxnSpPr>
-              <p:cNvPr id="90" name="Straight Connector 89">
+              <p:cNvPr id="92" name="Straight Connector 91">
                 <a:extLst>
                   <a:ext uri="{FF2B5EF4-FFF2-40B4-BE49-F238E27FC236}">
-                    <a16:creationId xmlns:a16="http://schemas.microsoft.com/office/drawing/2014/main" id="{E8CF7D75-30FC-50DF-FF88-F7908A3BD986}"/>
+                    <a16:creationId xmlns:a16="http://schemas.microsoft.com/office/drawing/2014/main" id="{E0F21504-642D-28B0-CB63-1C305994673C}"/>
                   </a:ext>
                 </a:extLst>
               </p:cNvPr>
@@ -4760,9 +4521,9 @@
               <p:nvPr/>
             </p:nvCxnSpPr>
             <p:spPr>
-              <a:xfrm flipV="1">
-                <a:off x="10231909" y="1282277"/>
-                <a:ext cx="831922" cy="418756"/>
+              <a:xfrm>
+                <a:off x="9068485" y="3059164"/>
+                <a:ext cx="167611" cy="1519622"/>
               </a:xfrm>
               <a:prstGeom prst="line">
                 <a:avLst/>
@@ -4791,457 +4552,402 @@
               </a:fontRef>
             </p:style>
           </p:cxnSp>
-        </p:grpSp>
-        <p:cxnSp>
-          <p:nvCxnSpPr>
-            <p:cNvPr id="91" name="Straight Connector 90">
-              <a:extLst>
-                <a:ext uri="{FF2B5EF4-FFF2-40B4-BE49-F238E27FC236}">
-                  <a16:creationId xmlns:a16="http://schemas.microsoft.com/office/drawing/2014/main" id="{8DF66E48-5659-3929-B8ED-74A3445B9838}"/>
-                </a:ext>
-              </a:extLst>
-            </p:cNvPr>
-            <p:cNvCxnSpPr>
-              <a:cxnSpLocks/>
-            </p:cNvCxnSpPr>
-            <p:nvPr/>
-          </p:nvCxnSpPr>
-          <p:spPr>
-            <a:xfrm flipH="1">
-              <a:off x="9730925" y="3059164"/>
-              <a:ext cx="175074" cy="1519622"/>
-            </a:xfrm>
-            <a:prstGeom prst="line">
-              <a:avLst/>
-            </a:prstGeom>
-            <a:ln>
+          <p:cxnSp>
+            <p:nvCxnSpPr>
+              <p:cNvPr id="97" name="Straight Connector 96">
+                <a:extLst>
+                  <a:ext uri="{FF2B5EF4-FFF2-40B4-BE49-F238E27FC236}">
+                    <a16:creationId xmlns:a16="http://schemas.microsoft.com/office/drawing/2014/main" id="{6B09D96B-B257-3762-0C2D-AD6D038AC05D}"/>
+                  </a:ext>
+                </a:extLst>
+              </p:cNvPr>
+              <p:cNvCxnSpPr>
+                <a:cxnSpLocks/>
+                <a:stCxn id="107" idx="1"/>
+              </p:cNvCxnSpPr>
+              <p:nvPr/>
+            </p:nvCxnSpPr>
+            <p:spPr>
+              <a:xfrm>
+                <a:off x="9236096" y="4644357"/>
+                <a:ext cx="494829" cy="816000"/>
+              </a:xfrm>
+              <a:prstGeom prst="line">
+                <a:avLst/>
+              </a:prstGeom>
+              <a:ln>
+                <a:solidFill>
+                  <a:schemeClr val="accent6">
+                    <a:lumMod val="40000"/>
+                    <a:lumOff val="60000"/>
+                  </a:schemeClr>
+                </a:solidFill>
+                <a:headEnd type="none" w="med" len="med"/>
+                <a:tailEnd type="triangle" w="med" len="med"/>
+              </a:ln>
+            </p:spPr>
+            <p:style>
+              <a:lnRef idx="2">
+                <a:schemeClr val="accent1"/>
+              </a:lnRef>
+              <a:fillRef idx="0">
+                <a:schemeClr val="accent1"/>
+              </a:fillRef>
+              <a:effectRef idx="1">
+                <a:schemeClr val="accent1"/>
+              </a:effectRef>
+              <a:fontRef idx="minor">
+                <a:schemeClr val="tx1"/>
+              </a:fontRef>
+            </p:style>
+          </p:cxnSp>
+          <p:cxnSp>
+            <p:nvCxnSpPr>
+              <p:cNvPr id="99" name="Straight Connector 98">
+                <a:extLst>
+                  <a:ext uri="{FF2B5EF4-FFF2-40B4-BE49-F238E27FC236}">
+                    <a16:creationId xmlns:a16="http://schemas.microsoft.com/office/drawing/2014/main" id="{AA462E1A-42DB-240F-4EAA-E4EA6C7DF585}"/>
+                  </a:ext>
+                </a:extLst>
+              </p:cNvPr>
+              <p:cNvCxnSpPr>
+                <a:cxnSpLocks/>
+              </p:cNvCxnSpPr>
+              <p:nvPr/>
+            </p:nvCxnSpPr>
+            <p:spPr>
+              <a:xfrm flipH="1">
+                <a:off x="9265644" y="4728279"/>
+                <a:ext cx="465281" cy="757380"/>
+              </a:xfrm>
+              <a:prstGeom prst="line">
+                <a:avLst/>
+              </a:prstGeom>
+              <a:ln>
+                <a:solidFill>
+                  <a:schemeClr val="accent6">
+                    <a:lumMod val="40000"/>
+                    <a:lumOff val="60000"/>
+                  </a:schemeClr>
+                </a:solidFill>
+                <a:headEnd type="none" w="med" len="med"/>
+                <a:tailEnd type="triangle" w="med" len="med"/>
+              </a:ln>
+            </p:spPr>
+            <p:style>
+              <a:lnRef idx="2">
+                <a:schemeClr val="accent1"/>
+              </a:lnRef>
+              <a:fillRef idx="0">
+                <a:schemeClr val="accent1"/>
+              </a:fillRef>
+              <a:effectRef idx="1">
+                <a:schemeClr val="accent1"/>
+              </a:effectRef>
+              <a:fontRef idx="minor">
+                <a:schemeClr val="tx1"/>
+              </a:fontRef>
+            </p:style>
+          </p:cxnSp>
+          <p:sp>
+            <p:nvSpPr>
+              <p:cNvPr id="20" name="Oval 19">
+                <a:extLst>
+                  <a:ext uri="{FF2B5EF4-FFF2-40B4-BE49-F238E27FC236}">
+                    <a16:creationId xmlns:a16="http://schemas.microsoft.com/office/drawing/2014/main" id="{D5D3863A-52A2-48ED-BCE2-4428ECBB7CE1}"/>
+                  </a:ext>
+                </a:extLst>
+              </p:cNvPr>
+              <p:cNvSpPr/>
+              <p:nvPr/>
+            </p:nvSpPr>
+            <p:spPr>
+              <a:xfrm rot="5400000">
+                <a:off x="9393568" y="4051666"/>
+                <a:ext cx="184108" cy="1184424"/>
+              </a:xfrm>
+              <a:prstGeom prst="ellipse">
+                <a:avLst/>
+              </a:prstGeom>
               <a:solidFill>
-                <a:schemeClr val="accent6">
-                  <a:lumMod val="40000"/>
-                  <a:lumOff val="60000"/>
+                <a:schemeClr val="bg1"/>
+              </a:solidFill>
+            </p:spPr>
+            <p:style>
+              <a:lnRef idx="2">
+                <a:schemeClr val="accent1">
+                  <a:shade val="15000"/>
+                </a:schemeClr>
+              </a:lnRef>
+              <a:fillRef idx="1">
+                <a:schemeClr val="accent1"/>
+              </a:fillRef>
+              <a:effectRef idx="0">
+                <a:schemeClr val="accent1"/>
+              </a:effectRef>
+              <a:fontRef idx="minor">
+                <a:schemeClr val="lt1"/>
+              </a:fontRef>
+            </p:style>
+            <p:txBody>
+              <a:bodyPr rtlCol="0" anchor="ctr"/>
+              <a:lstStyle/>
+              <a:p>
+                <a:pPr algn="ctr"/>
+                <a:endParaRPr lang="en-US"/>
+              </a:p>
+            </p:txBody>
+          </p:sp>
+          <p:sp>
+            <p:nvSpPr>
+              <p:cNvPr id="19" name="Oval 18">
+                <a:extLst>
+                  <a:ext uri="{FF2B5EF4-FFF2-40B4-BE49-F238E27FC236}">
+                    <a16:creationId xmlns:a16="http://schemas.microsoft.com/office/drawing/2014/main" id="{75AA7ADA-E73B-1CCF-417B-5B4E097062F8}"/>
+                  </a:ext>
+                </a:extLst>
+              </p:cNvPr>
+              <p:cNvSpPr/>
+              <p:nvPr/>
+            </p:nvSpPr>
+            <p:spPr>
+              <a:xfrm rot="5400000">
+                <a:off x="9393568" y="2401860"/>
+                <a:ext cx="184108" cy="1184424"/>
+              </a:xfrm>
+              <a:prstGeom prst="ellipse">
+                <a:avLst/>
+              </a:prstGeom>
+              <a:solidFill>
+                <a:schemeClr val="bg1"/>
+              </a:solidFill>
+            </p:spPr>
+            <p:style>
+              <a:lnRef idx="2">
+                <a:schemeClr val="accent1">
+                  <a:shade val="15000"/>
+                </a:schemeClr>
+              </a:lnRef>
+              <a:fillRef idx="1">
+                <a:schemeClr val="accent1"/>
+              </a:fillRef>
+              <a:effectRef idx="0">
+                <a:schemeClr val="accent1"/>
+              </a:effectRef>
+              <a:fontRef idx="minor">
+                <a:schemeClr val="lt1"/>
+              </a:fontRef>
+            </p:style>
+            <p:txBody>
+              <a:bodyPr rtlCol="0" anchor="ctr"/>
+              <a:lstStyle/>
+              <a:p>
+                <a:pPr algn="ctr"/>
+                <a:endParaRPr lang="en-US" dirty="0"/>
+              </a:p>
+            </p:txBody>
+          </p:sp>
+          <p:sp>
+            <p:nvSpPr>
+              <p:cNvPr id="106" name="TextBox 105">
+                <a:extLst>
+                  <a:ext uri="{FF2B5EF4-FFF2-40B4-BE49-F238E27FC236}">
+                    <a16:creationId xmlns:a16="http://schemas.microsoft.com/office/drawing/2014/main" id="{32227B05-E180-6CD4-0AB0-075F4A303739}"/>
+                  </a:ext>
+                </a:extLst>
+              </p:cNvPr>
+              <p:cNvSpPr txBox="1"/>
+              <p:nvPr/>
+            </p:nvSpPr>
+            <p:spPr>
+              <a:xfrm>
+                <a:off x="9054410" y="2831943"/>
+                <a:ext cx="927433" cy="313407"/>
+              </a:xfrm>
+              <a:prstGeom prst="rect">
+                <a:avLst/>
+              </a:prstGeom>
+              <a:noFill/>
+            </p:spPr>
+            <p:txBody>
+              <a:bodyPr wrap="none" rtlCol="0">
+                <a:spAutoFit/>
+              </a:bodyPr>
+              <a:lstStyle/>
+              <a:p>
+                <a:r>
+                  <a:rPr lang="en-US" dirty="0"/>
+                  <a:t>objective</a:t>
+                </a:r>
+              </a:p>
+            </p:txBody>
+          </p:sp>
+          <p:sp>
+            <p:nvSpPr>
+              <p:cNvPr id="107" name="TextBox 106">
+                <a:extLst>
+                  <a:ext uri="{FF2B5EF4-FFF2-40B4-BE49-F238E27FC236}">
+                    <a16:creationId xmlns:a16="http://schemas.microsoft.com/office/drawing/2014/main" id="{55DEE6CC-BF41-67A1-7AA5-1A5338458E93}"/>
+                  </a:ext>
+                </a:extLst>
+              </p:cNvPr>
+              <p:cNvSpPr txBox="1"/>
+              <p:nvPr/>
+            </p:nvSpPr>
+            <p:spPr>
+              <a:xfrm>
+                <a:off x="9236096" y="4487653"/>
+                <a:ext cx="513094" cy="313407"/>
+              </a:xfrm>
+              <a:prstGeom prst="rect">
+                <a:avLst/>
+              </a:prstGeom>
+              <a:noFill/>
+            </p:spPr>
+            <p:txBody>
+              <a:bodyPr wrap="none" rtlCol="0">
+                <a:spAutoFit/>
+              </a:bodyPr>
+              <a:lstStyle/>
+              <a:p>
+                <a:r>
+                  <a:rPr lang="en-US" dirty="0"/>
+                  <a:t>lens</a:t>
+                </a:r>
+              </a:p>
+            </p:txBody>
+          </p:sp>
+          <p:sp>
+            <p:nvSpPr>
+              <p:cNvPr id="108" name="Rectangle 107">
+                <a:extLst>
+                  <a:ext uri="{FF2B5EF4-FFF2-40B4-BE49-F238E27FC236}">
+                    <a16:creationId xmlns:a16="http://schemas.microsoft.com/office/drawing/2014/main" id="{3EA9F497-05DD-4DD5-8F39-4C70478C18B4}"/>
+                  </a:ext>
+                </a:extLst>
+              </p:cNvPr>
+              <p:cNvSpPr/>
+              <p:nvPr/>
+            </p:nvSpPr>
+            <p:spPr>
+              <a:xfrm>
+                <a:off x="8984861" y="6021756"/>
+                <a:ext cx="1068425" cy="534935"/>
+              </a:xfrm>
+              <a:prstGeom prst="rect">
+                <a:avLst/>
+              </a:prstGeom>
+              <a:solidFill>
+                <a:schemeClr val="bg2">
+                  <a:lumMod val="75000"/>
                 </a:schemeClr>
               </a:solidFill>
-            </a:ln>
-          </p:spPr>
-          <p:style>
-            <a:lnRef idx="2">
-              <a:schemeClr val="accent1"/>
-            </a:lnRef>
-            <a:fillRef idx="0">
-              <a:schemeClr val="accent1"/>
-            </a:fillRef>
-            <a:effectRef idx="1">
-              <a:schemeClr val="accent1"/>
-            </a:effectRef>
-            <a:fontRef idx="minor">
-              <a:schemeClr val="tx1"/>
-            </a:fontRef>
-          </p:style>
-        </p:cxnSp>
-        <p:cxnSp>
-          <p:nvCxnSpPr>
-            <p:cNvPr id="92" name="Straight Connector 91">
-              <a:extLst>
-                <a:ext uri="{FF2B5EF4-FFF2-40B4-BE49-F238E27FC236}">
-                  <a16:creationId xmlns:a16="http://schemas.microsoft.com/office/drawing/2014/main" id="{E0F21504-642D-28B0-CB63-1C305994673C}"/>
-                </a:ext>
-              </a:extLst>
-            </p:cNvPr>
-            <p:cNvCxnSpPr>
-              <a:cxnSpLocks/>
-            </p:cNvCxnSpPr>
-            <p:nvPr/>
-          </p:nvCxnSpPr>
-          <p:spPr>
-            <a:xfrm>
-              <a:off x="9068485" y="3059164"/>
-              <a:ext cx="167611" cy="1519622"/>
-            </a:xfrm>
-            <a:prstGeom prst="line">
-              <a:avLst/>
-            </a:prstGeom>
-            <a:ln>
-              <a:solidFill>
-                <a:schemeClr val="accent6">
-                  <a:lumMod val="40000"/>
-                  <a:lumOff val="60000"/>
+              <a:ln>
+                <a:noFill/>
+              </a:ln>
+            </p:spPr>
+            <p:style>
+              <a:lnRef idx="2">
+                <a:schemeClr val="accent1">
+                  <a:shade val="15000"/>
                 </a:schemeClr>
-              </a:solidFill>
-            </a:ln>
-          </p:spPr>
-          <p:style>
-            <a:lnRef idx="2">
-              <a:schemeClr val="accent1"/>
-            </a:lnRef>
-            <a:fillRef idx="0">
-              <a:schemeClr val="accent1"/>
-            </a:fillRef>
-            <a:effectRef idx="1">
-              <a:schemeClr val="accent1"/>
-            </a:effectRef>
-            <a:fontRef idx="minor">
-              <a:schemeClr val="tx1"/>
-            </a:fontRef>
-          </p:style>
-        </p:cxnSp>
-        <p:cxnSp>
-          <p:nvCxnSpPr>
-            <p:cNvPr id="97" name="Straight Connector 96">
-              <a:extLst>
-                <a:ext uri="{FF2B5EF4-FFF2-40B4-BE49-F238E27FC236}">
-                  <a16:creationId xmlns:a16="http://schemas.microsoft.com/office/drawing/2014/main" id="{6B09D96B-B257-3762-0C2D-AD6D038AC05D}"/>
-                </a:ext>
-              </a:extLst>
-            </p:cNvPr>
-            <p:cNvCxnSpPr>
-              <a:cxnSpLocks/>
-              <a:stCxn id="107" idx="1"/>
-            </p:cNvCxnSpPr>
-            <p:nvPr/>
-          </p:nvCxnSpPr>
-          <p:spPr>
-            <a:xfrm>
-              <a:off x="9236096" y="4651455"/>
-              <a:ext cx="494829" cy="834204"/>
-            </a:xfrm>
-            <a:prstGeom prst="line">
-              <a:avLst/>
-            </a:prstGeom>
-            <a:ln>
-              <a:solidFill>
-                <a:schemeClr val="accent6">
-                  <a:lumMod val="40000"/>
-                  <a:lumOff val="60000"/>
-                </a:schemeClr>
-              </a:solidFill>
-              <a:headEnd type="none" w="med" len="med"/>
-              <a:tailEnd type="triangle" w="med" len="med"/>
-            </a:ln>
-          </p:spPr>
-          <p:style>
-            <a:lnRef idx="2">
-              <a:schemeClr val="accent1"/>
-            </a:lnRef>
-            <a:fillRef idx="0">
-              <a:schemeClr val="accent1"/>
-            </a:fillRef>
-            <a:effectRef idx="1">
-              <a:schemeClr val="accent1"/>
-            </a:effectRef>
-            <a:fontRef idx="minor">
-              <a:schemeClr val="tx1"/>
-            </a:fontRef>
-          </p:style>
-        </p:cxnSp>
-        <p:cxnSp>
-          <p:nvCxnSpPr>
-            <p:cNvPr id="99" name="Straight Connector 98">
-              <a:extLst>
-                <a:ext uri="{FF2B5EF4-FFF2-40B4-BE49-F238E27FC236}">
-                  <a16:creationId xmlns:a16="http://schemas.microsoft.com/office/drawing/2014/main" id="{AA462E1A-42DB-240F-4EAA-E4EA6C7DF585}"/>
-                </a:ext>
-              </a:extLst>
-            </p:cNvPr>
-            <p:cNvCxnSpPr>
-              <a:cxnSpLocks/>
-            </p:cNvCxnSpPr>
-            <p:nvPr/>
-          </p:nvCxnSpPr>
-          <p:spPr>
-            <a:xfrm flipH="1">
-              <a:off x="9265644" y="4728279"/>
-              <a:ext cx="465281" cy="757380"/>
-            </a:xfrm>
-            <a:prstGeom prst="line">
-              <a:avLst/>
-            </a:prstGeom>
-            <a:ln>
-              <a:solidFill>
-                <a:schemeClr val="accent6">
-                  <a:lumMod val="40000"/>
-                  <a:lumOff val="60000"/>
-                </a:schemeClr>
-              </a:solidFill>
-              <a:headEnd type="none" w="med" len="med"/>
-              <a:tailEnd type="triangle" w="med" len="med"/>
-            </a:ln>
-          </p:spPr>
-          <p:style>
-            <a:lnRef idx="2">
-              <a:schemeClr val="accent1"/>
-            </a:lnRef>
-            <a:fillRef idx="0">
-              <a:schemeClr val="accent1"/>
-            </a:fillRef>
-            <a:effectRef idx="1">
-              <a:schemeClr val="accent1"/>
-            </a:effectRef>
-            <a:fontRef idx="minor">
-              <a:schemeClr val="tx1"/>
-            </a:fontRef>
-          </p:style>
-        </p:cxnSp>
-        <p:sp>
-          <p:nvSpPr>
-            <p:cNvPr id="20" name="Oval 19">
-              <a:extLst>
-                <a:ext uri="{FF2B5EF4-FFF2-40B4-BE49-F238E27FC236}">
-                  <a16:creationId xmlns:a16="http://schemas.microsoft.com/office/drawing/2014/main" id="{D5D3863A-52A2-48ED-BCE2-4428ECBB7CE1}"/>
-                </a:ext>
-              </a:extLst>
-            </p:cNvPr>
-            <p:cNvSpPr/>
-            <p:nvPr/>
-          </p:nvSpPr>
-          <p:spPr>
-            <a:xfrm rot="5400000">
-              <a:off x="9393568" y="4051666"/>
-              <a:ext cx="184108" cy="1184424"/>
-            </a:xfrm>
-            <a:prstGeom prst="ellipse">
-              <a:avLst/>
-            </a:prstGeom>
-            <a:solidFill>
-              <a:schemeClr val="bg1"/>
-            </a:solidFill>
-          </p:spPr>
-          <p:style>
-            <a:lnRef idx="2">
-              <a:schemeClr val="accent1">
-                <a:shade val="15000"/>
-              </a:schemeClr>
-            </a:lnRef>
-            <a:fillRef idx="1">
-              <a:schemeClr val="accent1"/>
-            </a:fillRef>
-            <a:effectRef idx="0">
-              <a:schemeClr val="accent1"/>
-            </a:effectRef>
-            <a:fontRef idx="minor">
-              <a:schemeClr val="lt1"/>
-            </a:fontRef>
-          </p:style>
-          <p:txBody>
-            <a:bodyPr rtlCol="0" anchor="ctr"/>
-            <a:lstStyle/>
-            <a:p>
-              <a:pPr algn="ctr"/>
-              <a:endParaRPr lang="en-US"/>
-            </a:p>
-          </p:txBody>
-        </p:sp>
-        <p:sp>
-          <p:nvSpPr>
-            <p:cNvPr id="19" name="Oval 18">
-              <a:extLst>
-                <a:ext uri="{FF2B5EF4-FFF2-40B4-BE49-F238E27FC236}">
-                  <a16:creationId xmlns:a16="http://schemas.microsoft.com/office/drawing/2014/main" id="{75AA7ADA-E73B-1CCF-417B-5B4E097062F8}"/>
-                </a:ext>
-              </a:extLst>
-            </p:cNvPr>
-            <p:cNvSpPr/>
-            <p:nvPr/>
-          </p:nvSpPr>
-          <p:spPr>
-            <a:xfrm rot="5400000">
-              <a:off x="9393568" y="2401860"/>
-              <a:ext cx="184108" cy="1184424"/>
-            </a:xfrm>
-            <a:prstGeom prst="ellipse">
-              <a:avLst/>
-            </a:prstGeom>
-            <a:solidFill>
-              <a:schemeClr val="bg1"/>
-            </a:solidFill>
-          </p:spPr>
-          <p:style>
-            <a:lnRef idx="2">
-              <a:schemeClr val="accent1">
-                <a:shade val="15000"/>
-              </a:schemeClr>
-            </a:lnRef>
-            <a:fillRef idx="1">
-              <a:schemeClr val="accent1"/>
-            </a:fillRef>
-            <a:effectRef idx="0">
-              <a:schemeClr val="accent1"/>
-            </a:effectRef>
-            <a:fontRef idx="minor">
-              <a:schemeClr val="lt1"/>
-            </a:fontRef>
-          </p:style>
-          <p:txBody>
-            <a:bodyPr rtlCol="0" anchor="ctr"/>
-            <a:lstStyle/>
-            <a:p>
-              <a:pPr algn="ctr"/>
-              <a:endParaRPr lang="en-US" dirty="0"/>
-            </a:p>
-          </p:txBody>
-        </p:sp>
-        <p:sp>
-          <p:nvSpPr>
-            <p:cNvPr id="106" name="TextBox 105">
-              <a:extLst>
-                <a:ext uri="{FF2B5EF4-FFF2-40B4-BE49-F238E27FC236}">
-                  <a16:creationId xmlns:a16="http://schemas.microsoft.com/office/drawing/2014/main" id="{32227B05-E180-6CD4-0AB0-075F4A303739}"/>
-                </a:ext>
-              </a:extLst>
-            </p:cNvPr>
-            <p:cNvSpPr txBox="1"/>
-            <p:nvPr/>
-          </p:nvSpPr>
-          <p:spPr>
-            <a:xfrm>
-              <a:off x="9088146" y="2848811"/>
-              <a:ext cx="790729" cy="276999"/>
-            </a:xfrm>
-            <a:prstGeom prst="rect">
-              <a:avLst/>
-            </a:prstGeom>
-            <a:noFill/>
-          </p:spPr>
-          <p:txBody>
-            <a:bodyPr wrap="none" rtlCol="0">
-              <a:spAutoFit/>
-            </a:bodyPr>
-            <a:lstStyle/>
-            <a:p>
-              <a:r>
-                <a:rPr lang="en-US" sz="1200" dirty="0"/>
-                <a:t>objective</a:t>
-              </a:r>
-            </a:p>
-          </p:txBody>
-        </p:sp>
-        <p:sp>
-          <p:nvSpPr>
-            <p:cNvPr id="107" name="TextBox 106">
-              <a:extLst>
-                <a:ext uri="{FF2B5EF4-FFF2-40B4-BE49-F238E27FC236}">
-                  <a16:creationId xmlns:a16="http://schemas.microsoft.com/office/drawing/2014/main" id="{55DEE6CC-BF41-67A1-7AA5-1A5338458E93}"/>
-                </a:ext>
-              </a:extLst>
-            </p:cNvPr>
-            <p:cNvSpPr txBox="1"/>
-            <p:nvPr/>
-          </p:nvSpPr>
-          <p:spPr>
-            <a:xfrm>
-              <a:off x="9236096" y="4512955"/>
-              <a:ext cx="466794" cy="276999"/>
-            </a:xfrm>
-            <a:prstGeom prst="rect">
-              <a:avLst/>
-            </a:prstGeom>
-            <a:noFill/>
-          </p:spPr>
-          <p:txBody>
-            <a:bodyPr wrap="none" rtlCol="0">
-              <a:spAutoFit/>
-            </a:bodyPr>
-            <a:lstStyle/>
-            <a:p>
-              <a:r>
-                <a:rPr lang="en-US" sz="1200" dirty="0"/>
-                <a:t>lens</a:t>
-              </a:r>
-            </a:p>
-          </p:txBody>
-        </p:sp>
-        <p:sp>
-          <p:nvSpPr>
-            <p:cNvPr id="108" name="Rectangle 107">
-              <a:extLst>
-                <a:ext uri="{FF2B5EF4-FFF2-40B4-BE49-F238E27FC236}">
-                  <a16:creationId xmlns:a16="http://schemas.microsoft.com/office/drawing/2014/main" id="{3EA9F497-05DD-4DD5-8F39-4C70478C18B4}"/>
-                </a:ext>
-              </a:extLst>
-            </p:cNvPr>
-            <p:cNvSpPr/>
-            <p:nvPr/>
-          </p:nvSpPr>
-          <p:spPr>
-            <a:xfrm>
-              <a:off x="8984861" y="6021756"/>
-              <a:ext cx="1068425" cy="534935"/>
-            </a:xfrm>
-            <a:prstGeom prst="rect">
-              <a:avLst/>
-            </a:prstGeom>
-            <a:solidFill>
-              <a:schemeClr val="bg2">
-                <a:lumMod val="75000"/>
-              </a:schemeClr>
-            </a:solidFill>
-            <a:ln>
+              </a:lnRef>
+              <a:fillRef idx="1">
+                <a:schemeClr val="accent1"/>
+              </a:fillRef>
+              <a:effectRef idx="0">
+                <a:schemeClr val="accent1"/>
+              </a:effectRef>
+              <a:fontRef idx="minor">
+                <a:schemeClr val="lt1"/>
+              </a:fontRef>
+            </p:style>
+            <p:txBody>
+              <a:bodyPr rtlCol="0" anchor="ctr"/>
+              <a:lstStyle/>
+              <a:p>
+                <a:pPr algn="ctr"/>
+                <a:r>
+                  <a:rPr lang="en-US" dirty="0"/>
+                  <a:t>Detector</a:t>
+                </a:r>
+              </a:p>
+            </p:txBody>
+          </p:sp>
+          <p:sp>
+            <p:nvSpPr>
+              <p:cNvPr id="116" name="TextBox 115">
+                <a:extLst>
+                  <a:ext uri="{FF2B5EF4-FFF2-40B4-BE49-F238E27FC236}">
+                    <a16:creationId xmlns:a16="http://schemas.microsoft.com/office/drawing/2014/main" id="{4D371AB8-73F0-81B4-8AC1-66DB85FB967B}"/>
+                  </a:ext>
+                </a:extLst>
+              </p:cNvPr>
+              <p:cNvSpPr txBox="1"/>
+              <p:nvPr/>
+            </p:nvSpPr>
+            <p:spPr>
+              <a:xfrm>
+                <a:off x="10077114" y="1875292"/>
+                <a:ext cx="1188007" cy="313407"/>
+              </a:xfrm>
+              <a:prstGeom prst="rect">
+                <a:avLst/>
+              </a:prstGeom>
               <a:noFill/>
-            </a:ln>
-          </p:spPr>
-          <p:style>
-            <a:lnRef idx="2">
-              <a:schemeClr val="accent1">
-                <a:shade val="15000"/>
-              </a:schemeClr>
-            </a:lnRef>
-            <a:fillRef idx="1">
-              <a:schemeClr val="accent1"/>
-            </a:fillRef>
-            <a:effectRef idx="0">
-              <a:schemeClr val="accent1"/>
-            </a:effectRef>
-            <a:fontRef idx="minor">
-              <a:schemeClr val="lt1"/>
-            </a:fontRef>
-          </p:style>
-          <p:txBody>
-            <a:bodyPr rtlCol="0" anchor="ctr"/>
-            <a:lstStyle/>
-            <a:p>
-              <a:pPr algn="ctr"/>
-              <a:r>
-                <a:rPr lang="en-US" dirty="0"/>
-                <a:t>Detector</a:t>
-              </a:r>
-            </a:p>
-          </p:txBody>
-        </p:sp>
-        <p:sp>
-          <p:nvSpPr>
-            <p:cNvPr id="116" name="TextBox 115">
-              <a:extLst>
-                <a:ext uri="{FF2B5EF4-FFF2-40B4-BE49-F238E27FC236}">
-                  <a16:creationId xmlns:a16="http://schemas.microsoft.com/office/drawing/2014/main" id="{4D371AB8-73F0-81B4-8AC1-66DB85FB967B}"/>
-                </a:ext>
-              </a:extLst>
-            </p:cNvPr>
-            <p:cNvSpPr txBox="1"/>
-            <p:nvPr/>
-          </p:nvSpPr>
-          <p:spPr>
-            <a:xfrm>
-              <a:off x="10077114" y="1875292"/>
-              <a:ext cx="997068" cy="276999"/>
-            </a:xfrm>
-            <a:prstGeom prst="rect">
-              <a:avLst/>
-            </a:prstGeom>
-            <a:noFill/>
-          </p:spPr>
-          <p:txBody>
-            <a:bodyPr wrap="none" rtlCol="0">
-              <a:spAutoFit/>
-            </a:bodyPr>
-            <a:lstStyle/>
-            <a:p>
-              <a:r>
-                <a:rPr lang="en-US" sz="1200" dirty="0"/>
-                <a:t>Focus plane</a:t>
-              </a:r>
-            </a:p>
-          </p:txBody>
-        </p:sp>
+            </p:spPr>
+            <p:txBody>
+              <a:bodyPr wrap="none" rtlCol="0">
+                <a:spAutoFit/>
+              </a:bodyPr>
+              <a:lstStyle/>
+              <a:p>
+                <a:r>
+                  <a:rPr lang="en-US" dirty="0"/>
+                  <a:t>Focus plane</a:t>
+                </a:r>
+              </a:p>
+            </p:txBody>
+          </p:sp>
+        </p:grpSp>
       </p:grpSp>
+      <p:pic>
+        <p:nvPicPr>
+          <p:cNvPr id="4" name="Picture 3">
+            <a:extLst>
+              <a:ext uri="{FF2B5EF4-FFF2-40B4-BE49-F238E27FC236}">
+                <a16:creationId xmlns:a16="http://schemas.microsoft.com/office/drawing/2014/main" id="{0FD4080F-F972-FCF9-653C-EC01EB03EC70}"/>
+              </a:ext>
+            </a:extLst>
+          </p:cNvPr>
+          <p:cNvPicPr>
+            <a:picLocks noChangeAspect="1"/>
+          </p:cNvPicPr>
+          <p:nvPr/>
+        </p:nvPicPr>
+        <p:blipFill>
+          <a:blip r:embed="rId6">
+            <a:extLst>
+              <a:ext uri="{28A0092B-C50C-407E-A947-70E740481C1C}">
+                <a14:useLocalDpi xmlns:a14="http://schemas.microsoft.com/office/drawing/2010/main" val="0"/>
+              </a:ext>
+            </a:extLst>
+          </a:blip>
+          <a:srcRect t="10862"/>
+          <a:stretch>
+            <a:fillRect/>
+          </a:stretch>
+        </p:blipFill>
+        <p:spPr>
+          <a:xfrm>
+            <a:off x="801398" y="563568"/>
+            <a:ext cx="11029625" cy="5362655"/>
+          </a:xfrm>
+          <a:prstGeom prst="rect">
+            <a:avLst/>
+          </a:prstGeom>
+        </p:spPr>
+      </p:pic>
     </p:spTree>
     <p:extLst>
       <p:ext uri="{BB962C8B-B14F-4D97-AF65-F5344CB8AC3E}">
@@ -5255,10 +4961,77 @@
 </p:sld>
 </file>
 
+<file path=ppt/slides/slide3.xml><?xml version="1.0" encoding="utf-8"?>
+<p:sld xmlns:a="http://schemas.openxmlformats.org/drawingml/2006/main" xmlns:r="http://schemas.openxmlformats.org/officeDocument/2006/relationships" xmlns:p="http://schemas.openxmlformats.org/presentationml/2006/main">
+  <p:cSld>
+    <p:spTree>
+      <p:nvGrpSpPr>
+        <p:cNvPr id="1" name=""/>
+        <p:cNvGrpSpPr/>
+        <p:nvPr/>
+      </p:nvGrpSpPr>
+      <p:grpSpPr>
+        <a:xfrm>
+          <a:off x="0" y="0"/>
+          <a:ext cx="0" cy="0"/>
+          <a:chOff x="0" y="0"/>
+          <a:chExt cx="0" cy="0"/>
+        </a:xfrm>
+      </p:grpSpPr>
+      <p:pic>
+        <p:nvPicPr>
+          <p:cNvPr id="3" name="Picture 2">
+            <a:extLst>
+              <a:ext uri="{FF2B5EF4-FFF2-40B4-BE49-F238E27FC236}">
+                <a16:creationId xmlns:a16="http://schemas.microsoft.com/office/drawing/2014/main" id="{9E81649A-8628-D3C4-BAE4-C261E9649A84}"/>
+              </a:ext>
+            </a:extLst>
+          </p:cNvPr>
+          <p:cNvPicPr>
+            <a:picLocks noChangeAspect="1"/>
+          </p:cNvPicPr>
+          <p:nvPr/>
+        </p:nvPicPr>
+        <p:blipFill>
+          <a:blip r:embed="rId2">
+            <a:extLst>
+              <a:ext uri="{28A0092B-C50C-407E-A947-70E740481C1C}">
+                <a14:useLocalDpi xmlns:a14="http://schemas.microsoft.com/office/drawing/2010/main" val="0"/>
+              </a:ext>
+            </a:extLst>
+          </a:blip>
+          <a:srcRect t="10862"/>
+          <a:stretch>
+            <a:fillRect/>
+          </a:stretch>
+        </p:blipFill>
+        <p:spPr>
+          <a:xfrm>
+            <a:off x="1311442" y="4735192"/>
+            <a:ext cx="9932453" cy="4829205"/>
+          </a:xfrm>
+          <a:prstGeom prst="rect">
+            <a:avLst/>
+          </a:prstGeom>
+        </p:spPr>
+      </p:pic>
+    </p:spTree>
+    <p:extLst>
+      <p:ext uri="{BB962C8B-B14F-4D97-AF65-F5344CB8AC3E}">
+        <p14:creationId xmlns:p14="http://schemas.microsoft.com/office/powerpoint/2010/main" val="90892062"/>
+      </p:ext>
+    </p:extLst>
+  </p:cSld>
+  <p:clrMapOvr>
+    <a:masterClrMapping/>
+  </p:clrMapOvr>
+</p:sld>
+</file>
+
 <file path=ppt/theme/theme1.xml><?xml version="1.0" encoding="utf-8"?>
 <a:theme xmlns:a="http://schemas.openxmlformats.org/drawingml/2006/main" name="Office Theme">
   <a:themeElements>
-    <a:clrScheme name="Office">
+    <a:clrScheme name="Office Theme">
       <a:dk1>
         <a:sysClr val="windowText" lastClr="000000"/>
       </a:dk1>
@@ -5296,7 +5069,7 @@
         <a:srgbClr val="96607D"/>
       </a:folHlink>
     </a:clrScheme>
-    <a:fontScheme name="Office">
+    <a:fontScheme name="Office Theme">
       <a:majorFont>
         <a:latin typeface="Aptos Display" panose="02110004020202020204"/>
         <a:ea typeface=""/>
@@ -5402,7 +5175,7 @@
         <a:font script="Tfng" typeface="Ebrima"/>
       </a:minorFont>
     </a:fontScheme>
-    <a:fmtScheme name="Office">
+    <a:fmtScheme name="Office Theme">
       <a:fillStyleLst>
         <a:solidFill>
           <a:schemeClr val="phClr"/>

--- a/figures/resources/optical_sectioning.pptx
+++ b/figures/resources/optical_sectioning.pptx
@@ -245,7 +245,7 @@
           <a:p>
             <a:fld id="{B09E179D-AE25-442C-9DBD-25AA24DE7ADF}" type="datetimeFigureOut">
               <a:rPr lang="en-US" smtClean="0"/>
-              <a:t>4/24/26</a:t>
+              <a:t>5/31/26</a:t>
             </a:fld>
             <a:endParaRPr lang="en-US"/>
           </a:p>
@@ -415,7 +415,7 @@
           <a:p>
             <a:fld id="{B09E179D-AE25-442C-9DBD-25AA24DE7ADF}" type="datetimeFigureOut">
               <a:rPr lang="en-US" smtClean="0"/>
-              <a:t>4/24/26</a:t>
+              <a:t>5/31/26</a:t>
             </a:fld>
             <a:endParaRPr lang="en-US"/>
           </a:p>
@@ -595,7 +595,7 @@
           <a:p>
             <a:fld id="{B09E179D-AE25-442C-9DBD-25AA24DE7ADF}" type="datetimeFigureOut">
               <a:rPr lang="en-US" smtClean="0"/>
-              <a:t>4/24/26</a:t>
+              <a:t>5/31/26</a:t>
             </a:fld>
             <a:endParaRPr lang="en-US"/>
           </a:p>
@@ -765,7 +765,7 @@
           <a:p>
             <a:fld id="{B09E179D-AE25-442C-9DBD-25AA24DE7ADF}" type="datetimeFigureOut">
               <a:rPr lang="en-US" smtClean="0"/>
-              <a:t>4/24/26</a:t>
+              <a:t>5/31/26</a:t>
             </a:fld>
             <a:endParaRPr lang="en-US"/>
           </a:p>
@@ -1011,7 +1011,7 @@
           <a:p>
             <a:fld id="{B09E179D-AE25-442C-9DBD-25AA24DE7ADF}" type="datetimeFigureOut">
               <a:rPr lang="en-US" smtClean="0"/>
-              <a:t>4/24/26</a:t>
+              <a:t>5/31/26</a:t>
             </a:fld>
             <a:endParaRPr lang="en-US"/>
           </a:p>
@@ -1243,7 +1243,7 @@
           <a:p>
             <a:fld id="{B09E179D-AE25-442C-9DBD-25AA24DE7ADF}" type="datetimeFigureOut">
               <a:rPr lang="en-US" smtClean="0"/>
-              <a:t>4/24/26</a:t>
+              <a:t>5/31/26</a:t>
             </a:fld>
             <a:endParaRPr lang="en-US"/>
           </a:p>
@@ -1610,7 +1610,7 @@
           <a:p>
             <a:fld id="{B09E179D-AE25-442C-9DBD-25AA24DE7ADF}" type="datetimeFigureOut">
               <a:rPr lang="en-US" smtClean="0"/>
-              <a:t>4/24/26</a:t>
+              <a:t>5/31/26</a:t>
             </a:fld>
             <a:endParaRPr lang="en-US"/>
           </a:p>
@@ -1728,7 +1728,7 @@
           <a:p>
             <a:fld id="{B09E179D-AE25-442C-9DBD-25AA24DE7ADF}" type="datetimeFigureOut">
               <a:rPr lang="en-US" smtClean="0"/>
-              <a:t>4/24/26</a:t>
+              <a:t>5/31/26</a:t>
             </a:fld>
             <a:endParaRPr lang="en-US"/>
           </a:p>
@@ -1823,7 +1823,7 @@
           <a:p>
             <a:fld id="{B09E179D-AE25-442C-9DBD-25AA24DE7ADF}" type="datetimeFigureOut">
               <a:rPr lang="en-US" smtClean="0"/>
-              <a:t>4/24/26</a:t>
+              <a:t>5/31/26</a:t>
             </a:fld>
             <a:endParaRPr lang="en-US"/>
           </a:p>
@@ -2100,7 +2100,7 @@
           <a:p>
             <a:fld id="{B09E179D-AE25-442C-9DBD-25AA24DE7ADF}" type="datetimeFigureOut">
               <a:rPr lang="en-US" smtClean="0"/>
-              <a:t>4/24/26</a:t>
+              <a:t>5/31/26</a:t>
             </a:fld>
             <a:endParaRPr lang="en-US"/>
           </a:p>
@@ -2357,7 +2357,7 @@
           <a:p>
             <a:fld id="{B09E179D-AE25-442C-9DBD-25AA24DE7ADF}" type="datetimeFigureOut">
               <a:rPr lang="en-US" smtClean="0"/>
-              <a:t>4/24/26</a:t>
+              <a:t>5/31/26</a:t>
             </a:fld>
             <a:endParaRPr lang="en-US"/>
           </a:p>
@@ -2570,7 +2570,7 @@
           <a:p>
             <a:fld id="{B09E179D-AE25-442C-9DBD-25AA24DE7ADF}" type="datetimeFigureOut">
               <a:rPr lang="en-US" smtClean="0"/>
-              <a:t>4/24/26</a:t>
+              <a:t>5/31/26</a:t>
             </a:fld>
             <a:endParaRPr lang="en-US"/>
           </a:p>
@@ -4933,15 +4933,15 @@
               </a:ext>
             </a:extLst>
           </a:blip>
-          <a:srcRect t="10862"/>
+          <a:srcRect l="29793" t="10862"/>
           <a:stretch>
             <a:fillRect/>
           </a:stretch>
         </p:blipFill>
         <p:spPr>
           <a:xfrm>
-            <a:off x="801398" y="563568"/>
-            <a:ext cx="11029625" cy="5362655"/>
+            <a:off x="2319867" y="800308"/>
+            <a:ext cx="7743480" cy="5362655"/>
           </a:xfrm>
           <a:prstGeom prst="rect">
             <a:avLst/>
